--- a/SPOTIFLOW 30-4-2026.pptx
+++ b/SPOTIFLOW 30-4-2026.pptx
@@ -37,8 +37,8 @@
 </file>
 
 <file path=ppt/slideLayouts/slideLayout1.xml><?xml version="1.0" encoding="utf-8"?>
-<p:sldLayout xmlns:a="http://schemas.openxmlformats.org/drawingml/2006/main" xmlns:p="http://schemas.openxmlformats.org/presentationml/2006/main" xmlns:r="http://schemas.openxmlformats.org/officeDocument/2006/relationships" xmlns:p14="http://schemas.microsoft.com/office/powerpoint/2010/main" xmlns:p15="http://schemas.microsoft.com/office/powerpoint/2012/main" xmlns:mc="http://schemas.openxmlformats.org/markup-compatibility/2006" type="title" preserve="1">
-  <p:cSld name="Title Slide">
+<p:sldLayout xmlns:a="http://schemas.openxmlformats.org/drawingml/2006/main" xmlns:p="http://schemas.openxmlformats.org/presentationml/2006/main" xmlns:r="http://schemas.openxmlformats.org/officeDocument/2006/relationships" xmlns:p14="http://schemas.microsoft.com/office/powerpoint/2010/main" xmlns:p15="http://schemas.microsoft.com/office/powerpoint/2012/main" xmlns:mc="http://schemas.openxmlformats.org/markup-compatibility/2006" type="vertTitleAndTx" preserve="1">
+  <p:cSld name="Vertical Title and Text">
     <p:bg>
       <p:bgPr>
         <a:solidFill>
@@ -62,7 +62,7 @@
       </p:grpSpPr>
       <p:pic>
         <p:nvPicPr>
-          <p:cNvPr id="2" name="Picture 10" hidden="1"/>
+          <p:cNvPr id="2" name="Picture 10"/>
           <p:cNvPicPr/>
           <p:nvPr/>
         </p:nvPicPr>
@@ -73,31 +73,7 @@
         <p:spPr>
           <a:xfrm>
             <a:off x="0" y="0"/>
-            <a:ext cx="12177000" cy="6842880"/>
-          </a:xfrm>
-          <a:prstGeom prst="rect">
-            <a:avLst/>
-          </a:prstGeom>
-          <a:noFill/>
-          <a:ln w="9525">
-            <a:noFill/>
-          </a:ln>
-        </p:spPr>
-      </p:pic>
-      <p:pic>
-        <p:nvPicPr>
-          <p:cNvPr id="3" name="Picture 3"/>
-          <p:cNvPicPr/>
-          <p:nvPr/>
-        </p:nvPicPr>
-        <p:blipFill>
-          <a:blip r:embed="rId3"/>
-          <a:stretch/>
-        </p:blipFill>
-        <p:spPr>
-          <a:xfrm>
-            <a:off x="0" y="0"/>
-            <a:ext cx="12177000" cy="6842880"/>
+            <a:ext cx="12176640" cy="6842520"/>
           </a:xfrm>
           <a:prstGeom prst="rect">
             <a:avLst/>
@@ -110,7 +86,7 @@
       </p:pic>
       <p:sp>
         <p:nvSpPr>
-          <p:cNvPr id="4" name="PlaceHolder 1"/>
+          <p:cNvPr id="3" name="PlaceHolder 1"/>
           <p:cNvSpPr>
             <a:spLocks noGrp="1"/>
           </p:cNvSpPr>
@@ -120,8 +96,8 @@
         </p:nvSpPr>
         <p:spPr>
           <a:xfrm>
-            <a:off x="624240" y="3718080"/>
-            <a:ext cx="10928160" cy="1067400"/>
+            <a:off x="8839080" y="190440"/>
+            <a:ext cx="2727720" cy="5921640"/>
           </a:xfrm>
           <a:prstGeom prst="rect">
             <a:avLst/>
@@ -132,11 +108,11 @@
           </a:ln>
         </p:spPr>
         <p:txBody>
-          <a:bodyPr lIns="90000" rIns="90000" tIns="45000" bIns="45000" anchor="ctr">
+          <a:bodyPr lIns="45000" rIns="45000" tIns="90000" bIns="90000" anchor="ctr" vert="eaVert">
             <a:noAutofit/>
           </a:bodyPr>
           <a:p>
-            <a:pPr indent="0" algn="r">
+            <a:pPr indent="0">
               <a:lnSpc>
                 <a:spcPct val="100000"/>
               </a:lnSpc>
@@ -170,7 +146,211 @@
       </p:sp>
       <p:sp>
         <p:nvSpPr>
-          <p:cNvPr id="5" name="PlaceHolder 2"/>
+          <p:cNvPr id="4" name="PlaceHolder 2"/>
+          <p:cNvSpPr>
+            <a:spLocks noGrp="1"/>
+          </p:cNvSpPr>
+          <p:nvPr>
+            <p:ph type="body"/>
+          </p:nvPr>
+        </p:nvSpPr>
+        <p:spPr>
+          <a:xfrm>
+            <a:off x="609480" y="190440"/>
+            <a:ext cx="8011080" cy="5921640"/>
+          </a:xfrm>
+          <a:prstGeom prst="rect">
+            <a:avLst/>
+          </a:prstGeom>
+          <a:noFill/>
+          <a:ln w="9360">
+            <a:noFill/>
+          </a:ln>
+        </p:spPr>
+        <p:txBody>
+          <a:bodyPr lIns="45000" rIns="45000" tIns="90000" bIns="90000" anchor="t" vert="eaVert">
+            <a:noAutofit/>
+          </a:bodyPr>
+          <a:p>
+            <a:pPr marL="343080" indent="-343080">
+              <a:lnSpc>
+                <a:spcPct val="100000"/>
+              </a:lnSpc>
+              <a:spcBef>
+                <a:spcPts val="641"/>
+              </a:spcBef>
+              <a:buClr>
+                <a:srgbClr val="000000"/>
+              </a:buClr>
+              <a:buFont typeface="Symbol" charset="2"/>
+              <a:buChar char=""/>
+            </a:pPr>
+            <a:r>
+              <a:rPr lang="en-US" sz="3200" b="0" u="none" strike="noStrike">
+                <a:solidFill>
+                  <a:schemeClr val="dk1"/>
+                </a:solidFill>
+                <a:effectLst/>
+                <a:uFillTx/>
+                <a:latin typeface="Arial"/>
+                <a:ea typeface="SimSun"/>
+              </a:rPr>
+              <a:t>Click to edit Master text styles</a:t>
+            </a:r>
+            <a:endParaRPr lang="en-US" sz="3200" b="0" u="none" strike="noStrike">
+              <a:solidFill>
+                <a:srgbClr val="000000"/>
+              </a:solidFill>
+              <a:effectLst/>
+              <a:uFillTx/>
+              <a:latin typeface="Arial"/>
+            </a:endParaRPr>
+          </a:p>
+          <a:p>
+            <a:pPr marL="743040" lvl="1" indent="-285840">
+              <a:lnSpc>
+                <a:spcPct val="100000"/>
+              </a:lnSpc>
+              <a:spcBef>
+                <a:spcPts val="561"/>
+              </a:spcBef>
+              <a:buClr>
+                <a:srgbClr val="000000"/>
+              </a:buClr>
+              <a:buFont typeface="Symbol" charset="2"/>
+              <a:buChar char=""/>
+            </a:pPr>
+            <a:r>
+              <a:rPr lang="en-US" sz="2800" b="0" u="none" strike="noStrike">
+                <a:solidFill>
+                  <a:schemeClr val="dk1"/>
+                </a:solidFill>
+                <a:effectLst/>
+                <a:uFillTx/>
+                <a:latin typeface="Arial"/>
+                <a:ea typeface="SimSun"/>
+              </a:rPr>
+              <a:t>Second level</a:t>
+            </a:r>
+            <a:endParaRPr lang="en-US" sz="2800" b="0" u="none" strike="noStrike">
+              <a:solidFill>
+                <a:srgbClr val="000000"/>
+              </a:solidFill>
+              <a:effectLst/>
+              <a:uFillTx/>
+              <a:latin typeface="Arial"/>
+            </a:endParaRPr>
+          </a:p>
+          <a:p>
+            <a:pPr marL="1143000" lvl="2" indent="-228600">
+              <a:lnSpc>
+                <a:spcPct val="100000"/>
+              </a:lnSpc>
+              <a:spcBef>
+                <a:spcPts val="479"/>
+              </a:spcBef>
+              <a:buClr>
+                <a:srgbClr val="000000"/>
+              </a:buClr>
+              <a:buFont typeface="Symbol" charset="2"/>
+              <a:buChar char=""/>
+            </a:pPr>
+            <a:r>
+              <a:rPr lang="en-US" sz="2400" b="0" u="none" strike="noStrike">
+                <a:solidFill>
+                  <a:schemeClr val="dk1"/>
+                </a:solidFill>
+                <a:effectLst/>
+                <a:uFillTx/>
+                <a:latin typeface="Arial"/>
+                <a:ea typeface="SimSun"/>
+              </a:rPr>
+              <a:t>Third level</a:t>
+            </a:r>
+            <a:endParaRPr lang="en-US" sz="2400" b="0" u="none" strike="noStrike">
+              <a:solidFill>
+                <a:srgbClr val="000000"/>
+              </a:solidFill>
+              <a:effectLst/>
+              <a:uFillTx/>
+              <a:latin typeface="Arial"/>
+            </a:endParaRPr>
+          </a:p>
+          <a:p>
+            <a:pPr marL="1600200" lvl="3" indent="-228600">
+              <a:lnSpc>
+                <a:spcPct val="100000"/>
+              </a:lnSpc>
+              <a:spcBef>
+                <a:spcPts val="400"/>
+              </a:spcBef>
+              <a:buClr>
+                <a:srgbClr val="000000"/>
+              </a:buClr>
+              <a:buFont typeface="Symbol" charset="2"/>
+              <a:buChar char=""/>
+            </a:pPr>
+            <a:r>
+              <a:rPr lang="en-US" sz="2000" b="0" u="none" strike="noStrike">
+                <a:solidFill>
+                  <a:schemeClr val="dk1"/>
+                </a:solidFill>
+                <a:effectLst/>
+                <a:uFillTx/>
+                <a:latin typeface="Arial"/>
+                <a:ea typeface="SimSun"/>
+              </a:rPr>
+              <a:t>Fourth level</a:t>
+            </a:r>
+            <a:endParaRPr lang="en-US" sz="2000" b="0" u="none" strike="noStrike">
+              <a:solidFill>
+                <a:srgbClr val="000000"/>
+              </a:solidFill>
+              <a:effectLst/>
+              <a:uFillTx/>
+              <a:latin typeface="Arial"/>
+            </a:endParaRPr>
+          </a:p>
+          <a:p>
+            <a:pPr marL="2057400" lvl="4" indent="-228600">
+              <a:lnSpc>
+                <a:spcPct val="100000"/>
+              </a:lnSpc>
+              <a:spcBef>
+                <a:spcPts val="400"/>
+              </a:spcBef>
+              <a:buClr>
+                <a:srgbClr val="000000"/>
+              </a:buClr>
+              <a:buFont typeface="OpenSymbol"/>
+              <a:buChar char="»"/>
+            </a:pPr>
+            <a:r>
+              <a:rPr lang="en-US" sz="2000" b="0" u="none" strike="noStrike">
+                <a:solidFill>
+                  <a:schemeClr val="dk1"/>
+                </a:solidFill>
+                <a:effectLst/>
+                <a:uFillTx/>
+                <a:latin typeface="Arial"/>
+                <a:ea typeface="SimSun"/>
+              </a:rPr>
+              <a:t>Fifth level</a:t>
+            </a:r>
+            <a:endParaRPr lang="en-US" sz="2000" b="0" u="none" strike="noStrike">
+              <a:solidFill>
+                <a:srgbClr val="000000"/>
+              </a:solidFill>
+              <a:effectLst/>
+              <a:uFillTx/>
+              <a:latin typeface="Arial"/>
+            </a:endParaRPr>
+          </a:p>
+        </p:txBody>
+      </p:sp>
+      <p:sp>
+        <p:nvSpPr>
+          <p:cNvPr id="5" name="PlaceHolder 3"/>
           <p:cNvSpPr>
             <a:spLocks noGrp="1"/>
           </p:cNvSpPr>
@@ -181,7 +361,7 @@
         <p:spPr>
           <a:xfrm>
             <a:off x="609480" y="6245280"/>
-            <a:ext cx="2829600" cy="461160"/>
+            <a:ext cx="2829240" cy="460800"/>
           </a:xfrm>
           <a:prstGeom prst="rect">
             <a:avLst/>
@@ -250,7 +430,7 @@
       </p:sp>
       <p:sp>
         <p:nvSpPr>
-          <p:cNvPr id="6" name="PlaceHolder 3"/>
+          <p:cNvPr id="6" name="PlaceHolder 4"/>
           <p:cNvSpPr>
             <a:spLocks noGrp="1"/>
           </p:cNvSpPr>
@@ -261,7 +441,7 @@
         <p:spPr>
           <a:xfrm>
             <a:off x="4165560" y="6245280"/>
-            <a:ext cx="3845520" cy="461160"/>
+            <a:ext cx="3845160" cy="460800"/>
           </a:xfrm>
           <a:prstGeom prst="rect">
             <a:avLst/>
@@ -330,7 +510,7 @@
       </p:sp>
       <p:sp>
         <p:nvSpPr>
-          <p:cNvPr id="7" name="PlaceHolder 4"/>
+          <p:cNvPr id="7" name="PlaceHolder 5"/>
           <p:cNvSpPr>
             <a:spLocks noGrp="1"/>
           </p:cNvSpPr>
@@ -341,7 +521,7 @@
         <p:spPr>
           <a:xfrm>
             <a:off x="8737560" y="6245280"/>
-            <a:ext cx="2829600" cy="461160"/>
+            <a:ext cx="2829240" cy="460800"/>
           </a:xfrm>
           <a:prstGeom prst="rect">
             <a:avLst/>
@@ -377,7 +557,7 @@
 
 <file path=ppt/slideLayouts/slideLayout10.xml><?xml version="1.0" encoding="utf-8"?>
 <p:sldLayout xmlns:a="http://schemas.openxmlformats.org/drawingml/2006/main" xmlns:p="http://schemas.openxmlformats.org/presentationml/2006/main" xmlns:r="http://schemas.openxmlformats.org/officeDocument/2006/relationships" xmlns:p14="http://schemas.microsoft.com/office/powerpoint/2010/main" xmlns:p15="http://schemas.microsoft.com/office/powerpoint/2012/main" xmlns:mc="http://schemas.openxmlformats.org/markup-compatibility/2006" type="blank" preserve="1">
-  <p:cSld name="Content with Caption">
+  <p:cSld name="Comparison">
     <p:bg>
       <p:bgPr>
         <a:solidFill>
@@ -401,7 +581,7 @@
       </p:grpSpPr>
       <p:pic>
         <p:nvPicPr>
-          <p:cNvPr id="57" name="Picture 10"/>
+          <p:cNvPr id="58" name="Picture 10"/>
           <p:cNvPicPr/>
           <p:nvPr/>
         </p:nvPicPr>
@@ -412,7 +592,7 @@
         <p:spPr>
           <a:xfrm>
             <a:off x="0" y="0"/>
-            <a:ext cx="12177000" cy="6842880"/>
+            <a:ext cx="12176640" cy="6842520"/>
           </a:xfrm>
           <a:prstGeom prst="rect">
             <a:avLst/>
@@ -425,7 +605,7 @@
       </p:pic>
       <p:sp>
         <p:nvSpPr>
-          <p:cNvPr id="58" name="PlaceHolder 1"/>
+          <p:cNvPr id="59" name="PlaceHolder 1"/>
           <p:cNvSpPr>
             <a:spLocks noGrp="1"/>
           </p:cNvSpPr>
@@ -435,8 +615,68 @@
         </p:nvSpPr>
         <p:spPr>
           <a:xfrm>
-            <a:off x="840240" y="457200"/>
-            <a:ext cx="3917520" cy="1585080"/>
+            <a:off x="840240" y="365040"/>
+            <a:ext cx="10500120" cy="1310040"/>
+          </a:xfrm>
+          <a:prstGeom prst="rect">
+            <a:avLst/>
+          </a:prstGeom>
+          <a:noFill/>
+          <a:ln w="9360">
+            <a:noFill/>
+          </a:ln>
+        </p:spPr>
+        <p:txBody>
+          <a:bodyPr lIns="90000" rIns="90000" tIns="45000" bIns="45000" anchor="ctr">
+            <a:noAutofit/>
+          </a:bodyPr>
+          <a:p>
+            <a:pPr indent="0">
+              <a:lnSpc>
+                <a:spcPct val="100000"/>
+              </a:lnSpc>
+              <a:buNone/>
+              <a:tabLst>
+                <a:tab algn="l" pos="0"/>
+              </a:tabLst>
+            </a:pPr>
+            <a:r>
+              <a:rPr lang="en-US" sz="3600" b="0" u="none" strike="noStrike">
+                <a:solidFill>
+                  <a:schemeClr val="dk1"/>
+                </a:solidFill>
+                <a:effectLst/>
+                <a:uFillTx/>
+                <a:latin typeface="Arial"/>
+                <a:ea typeface="SimSun"/>
+              </a:rPr>
+              <a:t>Click to edit Master title style</a:t>
+            </a:r>
+            <a:endParaRPr lang="en-US" sz="3600" b="0" u="none" strike="noStrike">
+              <a:solidFill>
+                <a:srgbClr val="000000"/>
+              </a:solidFill>
+              <a:effectLst/>
+              <a:uFillTx/>
+              <a:latin typeface="Arial"/>
+            </a:endParaRPr>
+          </a:p>
+        </p:txBody>
+      </p:sp>
+      <p:sp>
+        <p:nvSpPr>
+          <p:cNvPr id="60" name="PlaceHolder 2"/>
+          <p:cNvSpPr>
+            <a:spLocks noGrp="1"/>
+          </p:cNvSpPr>
+          <p:nvPr>
+            <p:ph type="body"/>
+          </p:nvPr>
+        </p:nvSpPr>
+        <p:spPr>
+          <a:xfrm>
+            <a:off x="840240" y="1681200"/>
+            <a:ext cx="5142960" cy="808560"/>
           </a:xfrm>
           <a:prstGeom prst="rect">
             <a:avLst/>
@@ -455,13 +695,16 @@
               <a:lnSpc>
                 <a:spcPct val="100000"/>
               </a:lnSpc>
+              <a:spcBef>
+                <a:spcPts val="479"/>
+              </a:spcBef>
               <a:buNone/>
               <a:tabLst>
                 <a:tab algn="l" pos="0"/>
               </a:tabLst>
             </a:pPr>
             <a:r>
-              <a:rPr lang="en-US" sz="3200" b="0" u="none" strike="noStrike">
+              <a:rPr lang="en-US" sz="2400" b="1" u="none" strike="noStrike">
                 <a:solidFill>
                   <a:schemeClr val="dk1"/>
                 </a:solidFill>
@@ -470,9 +713,9 @@
                 <a:latin typeface="Arial"/>
                 <a:ea typeface="SimSun"/>
               </a:rPr>
-              <a:t>Click to edit Master title style</a:t>
-            </a:r>
-            <a:endParaRPr lang="en-US" sz="3200" b="0" u="none" strike="noStrike">
+              <a:t>Click to edit Master text styles</a:t>
+            </a:r>
+            <a:endParaRPr lang="en-US" sz="2400" b="0" u="none" strike="noStrike">
               <a:solidFill>
                 <a:srgbClr val="000000"/>
               </a:solidFill>
@@ -485,7 +728,7 @@
       </p:sp>
       <p:sp>
         <p:nvSpPr>
-          <p:cNvPr id="59" name="PlaceHolder 2"/>
+          <p:cNvPr id="61" name="PlaceHolder 3"/>
           <p:cNvSpPr>
             <a:spLocks noGrp="1"/>
           </p:cNvSpPr>
@@ -495,8 +738,8 @@
         </p:nvSpPr>
         <p:spPr>
           <a:xfrm>
-            <a:off x="5183640" y="987480"/>
-            <a:ext cx="6157080" cy="4858560"/>
+            <a:off x="840240" y="2505240"/>
+            <a:ext cx="5142960" cy="3669120"/>
           </a:xfrm>
           <a:prstGeom prst="rect">
             <a:avLst/>
@@ -689,7 +932,7 @@
       </p:sp>
       <p:sp>
         <p:nvSpPr>
-          <p:cNvPr id="60" name="PlaceHolder 3"/>
+          <p:cNvPr id="62" name="PlaceHolder 4"/>
           <p:cNvSpPr>
             <a:spLocks noGrp="1"/>
           </p:cNvSpPr>
@@ -699,8 +942,71 @@
         </p:nvSpPr>
         <p:spPr>
           <a:xfrm>
-            <a:off x="840240" y="2057400"/>
-            <a:ext cx="3917520" cy="3796560"/>
+            <a:off x="6172200" y="1681200"/>
+            <a:ext cx="5168160" cy="808560"/>
+          </a:xfrm>
+          <a:prstGeom prst="rect">
+            <a:avLst/>
+          </a:prstGeom>
+          <a:noFill/>
+          <a:ln w="9360">
+            <a:noFill/>
+          </a:ln>
+        </p:spPr>
+        <p:txBody>
+          <a:bodyPr lIns="90000" rIns="90000" tIns="45000" bIns="45000" anchor="b">
+            <a:noAutofit/>
+          </a:bodyPr>
+          <a:p>
+            <a:pPr indent="0">
+              <a:lnSpc>
+                <a:spcPct val="100000"/>
+              </a:lnSpc>
+              <a:spcBef>
+                <a:spcPts val="479"/>
+              </a:spcBef>
+              <a:buNone/>
+              <a:tabLst>
+                <a:tab algn="l" pos="0"/>
+              </a:tabLst>
+            </a:pPr>
+            <a:r>
+              <a:rPr lang="en-US" sz="2400" b="1" u="none" strike="noStrike">
+                <a:solidFill>
+                  <a:schemeClr val="dk1"/>
+                </a:solidFill>
+                <a:effectLst/>
+                <a:uFillTx/>
+                <a:latin typeface="Arial"/>
+                <a:ea typeface="SimSun"/>
+              </a:rPr>
+              <a:t>Click to edit Master text styles</a:t>
+            </a:r>
+            <a:endParaRPr lang="en-US" sz="2400" b="0" u="none" strike="noStrike">
+              <a:solidFill>
+                <a:srgbClr val="000000"/>
+              </a:solidFill>
+              <a:effectLst/>
+              <a:uFillTx/>
+              <a:latin typeface="Arial"/>
+            </a:endParaRPr>
+          </a:p>
+        </p:txBody>
+      </p:sp>
+      <p:sp>
+        <p:nvSpPr>
+          <p:cNvPr id="63" name="PlaceHolder 5"/>
+          <p:cNvSpPr>
+            <a:spLocks noGrp="1"/>
+          </p:cNvSpPr>
+          <p:nvPr>
+            <p:ph type="body"/>
+          </p:nvPr>
+        </p:nvSpPr>
+        <p:spPr>
+          <a:xfrm>
+            <a:off x="6172200" y="2505240"/>
+            <a:ext cx="5168160" cy="3669120"/>
           </a:xfrm>
           <a:prstGeom prst="rect">
             <a:avLst/>
@@ -715,20 +1021,21 @@
             <a:noAutofit/>
           </a:bodyPr>
           <a:p>
-            <a:pPr indent="0">
+            <a:pPr marL="343080" indent="-343080">
               <a:lnSpc>
                 <a:spcPct val="100000"/>
               </a:lnSpc>
               <a:spcBef>
-                <a:spcPts val="320"/>
+                <a:spcPts val="641"/>
               </a:spcBef>
-              <a:buNone/>
-              <a:tabLst>
-                <a:tab algn="l" pos="0"/>
-              </a:tabLst>
-            </a:pPr>
-            <a:r>
-              <a:rPr lang="en-US" sz="1600" b="0" u="none" strike="noStrike">
+              <a:buClr>
+                <a:srgbClr val="000000"/>
+              </a:buClr>
+              <a:buFont typeface="Symbol" charset="2"/>
+              <a:buChar char=""/>
+            </a:pPr>
+            <a:r>
+              <a:rPr lang="en-US" sz="3200" b="0" u="none" strike="noStrike">
                 <a:solidFill>
                   <a:schemeClr val="dk1"/>
                 </a:solidFill>
@@ -739,7 +1046,147 @@
               </a:rPr>
               <a:t>Click to edit Master text styles</a:t>
             </a:r>
-            <a:endParaRPr lang="en-US" sz="1600" b="0" u="none" strike="noStrike">
+            <a:endParaRPr lang="en-US" sz="3200" b="0" u="none" strike="noStrike">
+              <a:solidFill>
+                <a:srgbClr val="000000"/>
+              </a:solidFill>
+              <a:effectLst/>
+              <a:uFillTx/>
+              <a:latin typeface="Arial"/>
+            </a:endParaRPr>
+          </a:p>
+          <a:p>
+            <a:pPr marL="743040" lvl="1" indent="-285840">
+              <a:lnSpc>
+                <a:spcPct val="100000"/>
+              </a:lnSpc>
+              <a:spcBef>
+                <a:spcPts val="561"/>
+              </a:spcBef>
+              <a:buClr>
+                <a:srgbClr val="000000"/>
+              </a:buClr>
+              <a:buFont typeface="Symbol" charset="2"/>
+              <a:buChar char=""/>
+            </a:pPr>
+            <a:r>
+              <a:rPr lang="en-US" sz="2800" b="0" u="none" strike="noStrike">
+                <a:solidFill>
+                  <a:schemeClr val="dk1"/>
+                </a:solidFill>
+                <a:effectLst/>
+                <a:uFillTx/>
+                <a:latin typeface="Arial"/>
+                <a:ea typeface="SimSun"/>
+              </a:rPr>
+              <a:t>Second level</a:t>
+            </a:r>
+            <a:endParaRPr lang="en-US" sz="2800" b="0" u="none" strike="noStrike">
+              <a:solidFill>
+                <a:srgbClr val="000000"/>
+              </a:solidFill>
+              <a:effectLst/>
+              <a:uFillTx/>
+              <a:latin typeface="Arial"/>
+            </a:endParaRPr>
+          </a:p>
+          <a:p>
+            <a:pPr marL="1143000" lvl="2" indent="-228600">
+              <a:lnSpc>
+                <a:spcPct val="100000"/>
+              </a:lnSpc>
+              <a:spcBef>
+                <a:spcPts val="479"/>
+              </a:spcBef>
+              <a:buClr>
+                <a:srgbClr val="000000"/>
+              </a:buClr>
+              <a:buFont typeface="Symbol" charset="2"/>
+              <a:buChar char=""/>
+            </a:pPr>
+            <a:r>
+              <a:rPr lang="en-US" sz="2400" b="0" u="none" strike="noStrike">
+                <a:solidFill>
+                  <a:schemeClr val="dk1"/>
+                </a:solidFill>
+                <a:effectLst/>
+                <a:uFillTx/>
+                <a:latin typeface="Arial"/>
+                <a:ea typeface="SimSun"/>
+              </a:rPr>
+              <a:t>Third level</a:t>
+            </a:r>
+            <a:endParaRPr lang="en-US" sz="2400" b="0" u="none" strike="noStrike">
+              <a:solidFill>
+                <a:srgbClr val="000000"/>
+              </a:solidFill>
+              <a:effectLst/>
+              <a:uFillTx/>
+              <a:latin typeface="Arial"/>
+            </a:endParaRPr>
+          </a:p>
+          <a:p>
+            <a:pPr marL="1600200" lvl="3" indent="-228600">
+              <a:lnSpc>
+                <a:spcPct val="100000"/>
+              </a:lnSpc>
+              <a:spcBef>
+                <a:spcPts val="400"/>
+              </a:spcBef>
+              <a:buClr>
+                <a:srgbClr val="000000"/>
+              </a:buClr>
+              <a:buFont typeface="Symbol" charset="2"/>
+              <a:buChar char=""/>
+            </a:pPr>
+            <a:r>
+              <a:rPr lang="en-US" sz="2000" b="0" u="none" strike="noStrike">
+                <a:solidFill>
+                  <a:schemeClr val="dk1"/>
+                </a:solidFill>
+                <a:effectLst/>
+                <a:uFillTx/>
+                <a:latin typeface="Arial"/>
+                <a:ea typeface="SimSun"/>
+              </a:rPr>
+              <a:t>Fourth level</a:t>
+            </a:r>
+            <a:endParaRPr lang="en-US" sz="2000" b="0" u="none" strike="noStrike">
+              <a:solidFill>
+                <a:srgbClr val="000000"/>
+              </a:solidFill>
+              <a:effectLst/>
+              <a:uFillTx/>
+              <a:latin typeface="Arial"/>
+            </a:endParaRPr>
+          </a:p>
+          <a:p>
+            <a:pPr marL="2057400" lvl="4" indent="-228600">
+              <a:lnSpc>
+                <a:spcPct val="100000"/>
+              </a:lnSpc>
+              <a:spcBef>
+                <a:spcPts val="400"/>
+              </a:spcBef>
+              <a:buClr>
+                <a:srgbClr val="000000"/>
+              </a:buClr>
+              <a:buFont typeface="OpenSymbol"/>
+              <a:buChar char="»"/>
+            </a:pPr>
+            <a:r>
+              <a:rPr lang="en-US" sz="2000" b="0" u="none" strike="noStrike">
+                <a:solidFill>
+                  <a:schemeClr val="dk1"/>
+                </a:solidFill>
+                <a:effectLst/>
+                <a:uFillTx/>
+                <a:latin typeface="Arial"/>
+                <a:ea typeface="SimSun"/>
+              </a:rPr>
+              <a:t>Fifth level</a:t>
+            </a:r>
+            <a:endParaRPr lang="en-US" sz="2000" b="0" u="none" strike="noStrike">
               <a:solidFill>
                 <a:srgbClr val="000000"/>
               </a:solidFill>
@@ -752,7 +1199,7 @@
       </p:sp>
       <p:sp>
         <p:nvSpPr>
-          <p:cNvPr id="61" name="PlaceHolder 4"/>
+          <p:cNvPr id="64" name="PlaceHolder 6"/>
           <p:cNvSpPr>
             <a:spLocks noGrp="1"/>
           </p:cNvSpPr>
@@ -763,7 +1210,7 @@
         <p:spPr>
           <a:xfrm>
             <a:off x="609480" y="6245280"/>
-            <a:ext cx="2829600" cy="461160"/>
+            <a:ext cx="2829240" cy="460800"/>
           </a:xfrm>
           <a:prstGeom prst="rect">
             <a:avLst/>
@@ -832,7 +1279,7 @@
       </p:sp>
       <p:sp>
         <p:nvSpPr>
-          <p:cNvPr id="62" name="PlaceHolder 5"/>
+          <p:cNvPr id="65" name="PlaceHolder 7"/>
           <p:cNvSpPr>
             <a:spLocks noGrp="1"/>
           </p:cNvSpPr>
@@ -843,7 +1290,7 @@
         <p:spPr>
           <a:xfrm>
             <a:off x="4165560" y="6245280"/>
-            <a:ext cx="3845520" cy="461160"/>
+            <a:ext cx="3845160" cy="460800"/>
           </a:xfrm>
           <a:prstGeom prst="rect">
             <a:avLst/>
@@ -912,7 +1359,7 @@
       </p:sp>
       <p:sp>
         <p:nvSpPr>
-          <p:cNvPr id="63" name="PlaceHolder 6"/>
+          <p:cNvPr id="66" name="PlaceHolder 8"/>
           <p:cNvSpPr>
             <a:spLocks noGrp="1"/>
           </p:cNvSpPr>
@@ -923,7 +1370,7 @@
         <p:spPr>
           <a:xfrm>
             <a:off x="8737560" y="6245280"/>
-            <a:ext cx="2829600" cy="461160"/>
+            <a:ext cx="2829240" cy="460800"/>
           </a:xfrm>
           <a:prstGeom prst="rect">
             <a:avLst/>
@@ -959,7 +1406,7 @@
 
 <file path=ppt/slideLayouts/slideLayout11.xml><?xml version="1.0" encoding="utf-8"?>
 <p:sldLayout xmlns:a="http://schemas.openxmlformats.org/drawingml/2006/main" xmlns:p="http://schemas.openxmlformats.org/presentationml/2006/main" xmlns:r="http://schemas.openxmlformats.org/officeDocument/2006/relationships" xmlns:p14="http://schemas.microsoft.com/office/powerpoint/2010/main" xmlns:p15="http://schemas.microsoft.com/office/powerpoint/2012/main" xmlns:mc="http://schemas.openxmlformats.org/markup-compatibility/2006" type="blank" preserve="1">
-  <p:cSld name="Picture with Caption">
+  <p:cSld name="Blank">
     <p:bg>
       <p:bgPr>
         <a:solidFill>
@@ -983,7 +1430,7 @@
       </p:grpSpPr>
       <p:pic>
         <p:nvPicPr>
-          <p:cNvPr id="64" name="Picture 10"/>
+          <p:cNvPr id="67" name="Picture 10"/>
           <p:cNvPicPr/>
           <p:nvPr/>
         </p:nvPicPr>
@@ -994,7 +1441,7 @@
         <p:spPr>
           <a:xfrm>
             <a:off x="0" y="0"/>
-            <a:ext cx="12177000" cy="6842880"/>
+            <a:ext cx="12176640" cy="6842520"/>
           </a:xfrm>
           <a:prstGeom prst="rect">
             <a:avLst/>
@@ -1007,404 +1454,7 @@
       </p:pic>
       <p:sp>
         <p:nvSpPr>
-          <p:cNvPr id="65" name="PlaceHolder 1"/>
-          <p:cNvSpPr>
-            <a:spLocks noGrp="1"/>
-          </p:cNvSpPr>
-          <p:nvPr>
-            <p:ph type="title"/>
-          </p:nvPr>
-        </p:nvSpPr>
-        <p:spPr>
-          <a:xfrm>
-            <a:off x="840240" y="457200"/>
-            <a:ext cx="3917520" cy="1585080"/>
-          </a:xfrm>
-          <a:prstGeom prst="rect">
-            <a:avLst/>
-          </a:prstGeom>
-          <a:noFill/>
-          <a:ln w="9360">
-            <a:noFill/>
-          </a:ln>
-        </p:spPr>
-        <p:txBody>
-          <a:bodyPr lIns="90000" rIns="90000" tIns="45000" bIns="45000" anchor="b">
-            <a:noAutofit/>
-          </a:bodyPr>
-          <a:p>
-            <a:pPr indent="0">
-              <a:lnSpc>
-                <a:spcPct val="100000"/>
-              </a:lnSpc>
-              <a:buNone/>
-              <a:tabLst>
-                <a:tab algn="l" pos="0"/>
-              </a:tabLst>
-            </a:pPr>
-            <a:r>
-              <a:rPr lang="en-US" sz="3200" b="0" u="none" strike="noStrike">
-                <a:solidFill>
-                  <a:schemeClr val="dk1"/>
-                </a:solidFill>
-                <a:effectLst/>
-                <a:uFillTx/>
-                <a:latin typeface="Arial"/>
-                <a:ea typeface="SimSun"/>
-              </a:rPr>
-              <a:t>Click to edit Master title style</a:t>
-            </a:r>
-            <a:endParaRPr lang="en-US" sz="3200" b="0" u="none" strike="noStrike">
-              <a:solidFill>
-                <a:srgbClr val="000000"/>
-              </a:solidFill>
-              <a:effectLst/>
-              <a:uFillTx/>
-              <a:latin typeface="Arial"/>
-            </a:endParaRPr>
-          </a:p>
-        </p:txBody>
-      </p:sp>
-      <p:sp>
-        <p:nvSpPr>
-          <p:cNvPr id="66" name="PlaceHolder 2"/>
-          <p:cNvSpPr>
-            <a:spLocks noGrp="1"/>
-          </p:cNvSpPr>
-          <p:nvPr>
-            <p:ph type="body"/>
-          </p:nvPr>
-        </p:nvSpPr>
-        <p:spPr>
-          <a:xfrm>
-            <a:off x="5183640" y="987480"/>
-            <a:ext cx="6157080" cy="4858560"/>
-          </a:xfrm>
-          <a:prstGeom prst="rect">
-            <a:avLst/>
-          </a:prstGeom>
-          <a:noFill/>
-          <a:ln w="0">
-            <a:noFill/>
-          </a:ln>
-        </p:spPr>
-        <p:txBody>
-          <a:bodyPr numCol="1" spcCol="0" lIns="91440" rIns="91440" tIns="45720" bIns="45720" anchor="t">
-            <a:noAutofit/>
-          </a:bodyPr>
-          <a:p>
-            <a:pPr marL="431640" indent="-324000">
-              <a:lnSpc>
-                <a:spcPct val="100000"/>
-              </a:lnSpc>
-              <a:spcBef>
-                <a:spcPts val="1414"/>
-              </a:spcBef>
-              <a:buClr>
-                <a:srgbClr val="000000"/>
-              </a:buClr>
-              <a:buSzPct val="45000"/>
-              <a:buFont typeface="Wingdings" charset="2"/>
-              <a:buChar char=""/>
-            </a:pPr>
-            <a:r>
-              <a:rPr lang="en-US" sz="3200" b="0" u="none" strike="noStrike">
-                <a:solidFill>
-                  <a:schemeClr val="dk1"/>
-                </a:solidFill>
-                <a:effectLst/>
-                <a:uFillTx/>
-                <a:latin typeface="Arial"/>
-              </a:rPr>
-              <a:t>Click to edit the outline text format</a:t>
-            </a:r>
-            <a:endParaRPr lang="en-US" sz="3200" b="0" u="none" strike="noStrike">
-              <a:solidFill>
-                <a:srgbClr val="000000"/>
-              </a:solidFill>
-              <a:effectLst/>
-              <a:uFillTx/>
-              <a:latin typeface="Arial"/>
-            </a:endParaRPr>
-          </a:p>
-          <a:p>
-            <a:pPr marL="864360" lvl="1" indent="-324000">
-              <a:lnSpc>
-                <a:spcPct val="100000"/>
-              </a:lnSpc>
-              <a:spcBef>
-                <a:spcPts val="1134"/>
-              </a:spcBef>
-              <a:buClr>
-                <a:srgbClr val="000000"/>
-              </a:buClr>
-              <a:buSzPct val="75000"/>
-              <a:buFont typeface="Symbol" charset="2"/>
-              <a:buChar char=""/>
-            </a:pPr>
-            <a:r>
-              <a:rPr lang="en-US" sz="3200" b="0" u="none" strike="noStrike">
-                <a:solidFill>
-                  <a:schemeClr val="dk1"/>
-                </a:solidFill>
-                <a:effectLst/>
-                <a:uFillTx/>
-                <a:latin typeface="Arial"/>
-              </a:rPr>
-              <a:t>Second Outline Level</a:t>
-            </a:r>
-            <a:endParaRPr lang="en-US" sz="3200" b="0" u="none" strike="noStrike">
-              <a:solidFill>
-                <a:srgbClr val="000000"/>
-              </a:solidFill>
-              <a:effectLst/>
-              <a:uFillTx/>
-              <a:latin typeface="Arial"/>
-            </a:endParaRPr>
-          </a:p>
-          <a:p>
-            <a:pPr marL="1296000" lvl="2" indent="-288360">
-              <a:lnSpc>
-                <a:spcPct val="100000"/>
-              </a:lnSpc>
-              <a:spcBef>
-                <a:spcPts val="850"/>
-              </a:spcBef>
-              <a:buClr>
-                <a:srgbClr val="000000"/>
-              </a:buClr>
-              <a:buSzPct val="45000"/>
-              <a:buFont typeface="Wingdings" charset="2"/>
-              <a:buChar char=""/>
-            </a:pPr>
-            <a:r>
-              <a:rPr lang="en-US" sz="3200" b="0" u="none" strike="noStrike">
-                <a:solidFill>
-                  <a:schemeClr val="dk1"/>
-                </a:solidFill>
-                <a:effectLst/>
-                <a:uFillTx/>
-                <a:latin typeface="Arial"/>
-              </a:rPr>
-              <a:t>Third Outline Level</a:t>
-            </a:r>
-            <a:endParaRPr lang="en-US" sz="3200" b="0" u="none" strike="noStrike">
-              <a:solidFill>
-                <a:srgbClr val="000000"/>
-              </a:solidFill>
-              <a:effectLst/>
-              <a:uFillTx/>
-              <a:latin typeface="Arial"/>
-            </a:endParaRPr>
-          </a:p>
-          <a:p>
-            <a:pPr marL="1728000" lvl="3" indent="-216000">
-              <a:lnSpc>
-                <a:spcPct val="100000"/>
-              </a:lnSpc>
-              <a:spcBef>
-                <a:spcPts val="564"/>
-              </a:spcBef>
-              <a:buClr>
-                <a:srgbClr val="000000"/>
-              </a:buClr>
-              <a:buSzPct val="75000"/>
-              <a:buFont typeface="Symbol" charset="2"/>
-              <a:buChar char=""/>
-            </a:pPr>
-            <a:r>
-              <a:rPr lang="en-US" sz="3200" b="0" u="none" strike="noStrike">
-                <a:solidFill>
-                  <a:schemeClr val="dk1"/>
-                </a:solidFill>
-                <a:effectLst/>
-                <a:uFillTx/>
-                <a:latin typeface="Arial"/>
-              </a:rPr>
-              <a:t>Fourth Outline Level</a:t>
-            </a:r>
-            <a:endParaRPr lang="en-US" sz="3200" b="0" u="none" strike="noStrike">
-              <a:solidFill>
-                <a:srgbClr val="000000"/>
-              </a:solidFill>
-              <a:effectLst/>
-              <a:uFillTx/>
-              <a:latin typeface="Arial"/>
-            </a:endParaRPr>
-          </a:p>
-          <a:p>
-            <a:pPr marL="2160360" lvl="4" indent="-216000">
-              <a:lnSpc>
-                <a:spcPct val="100000"/>
-              </a:lnSpc>
-              <a:spcBef>
-                <a:spcPts val="286"/>
-              </a:spcBef>
-              <a:buClr>
-                <a:srgbClr val="000000"/>
-              </a:buClr>
-              <a:buSzPct val="45000"/>
-              <a:buFont typeface="Wingdings" charset="2"/>
-              <a:buChar char=""/>
-            </a:pPr>
-            <a:r>
-              <a:rPr lang="en-US" sz="3200" b="0" u="none" strike="noStrike">
-                <a:solidFill>
-                  <a:schemeClr val="dk1"/>
-                </a:solidFill>
-                <a:effectLst/>
-                <a:uFillTx/>
-                <a:latin typeface="Arial"/>
-              </a:rPr>
-              <a:t>Fifth Outline Level</a:t>
-            </a:r>
-            <a:endParaRPr lang="en-US" sz="3200" b="0" u="none" strike="noStrike">
-              <a:solidFill>
-                <a:srgbClr val="000000"/>
-              </a:solidFill>
-              <a:effectLst/>
-              <a:uFillTx/>
-              <a:latin typeface="Arial"/>
-            </a:endParaRPr>
-          </a:p>
-          <a:p>
-            <a:pPr marL="2592000" lvl="5" indent="-216000">
-              <a:lnSpc>
-                <a:spcPct val="100000"/>
-              </a:lnSpc>
-              <a:spcBef>
-                <a:spcPts val="286"/>
-              </a:spcBef>
-              <a:buClr>
-                <a:srgbClr val="000000"/>
-              </a:buClr>
-              <a:buSzPct val="45000"/>
-              <a:buFont typeface="Wingdings" charset="2"/>
-              <a:buChar char=""/>
-            </a:pPr>
-            <a:r>
-              <a:rPr lang="en-US" sz="3200" b="0" u="none" strike="noStrike">
-                <a:solidFill>
-                  <a:schemeClr val="dk1"/>
-                </a:solidFill>
-                <a:effectLst/>
-                <a:uFillTx/>
-                <a:latin typeface="Arial"/>
-              </a:rPr>
-              <a:t>Sixth Outline Level</a:t>
-            </a:r>
-            <a:endParaRPr lang="en-US" sz="3200" b="0" u="none" strike="noStrike">
-              <a:solidFill>
-                <a:srgbClr val="000000"/>
-              </a:solidFill>
-              <a:effectLst/>
-              <a:uFillTx/>
-              <a:latin typeface="Arial"/>
-            </a:endParaRPr>
-          </a:p>
-          <a:p>
-            <a:pPr marL="3024000" lvl="6" indent="-216000">
-              <a:lnSpc>
-                <a:spcPct val="100000"/>
-              </a:lnSpc>
-              <a:spcBef>
-                <a:spcPts val="286"/>
-              </a:spcBef>
-              <a:buClr>
-                <a:srgbClr val="000000"/>
-              </a:buClr>
-              <a:buSzPct val="45000"/>
-              <a:buFont typeface="Wingdings" charset="2"/>
-              <a:buChar char=""/>
-            </a:pPr>
-            <a:r>
-              <a:rPr lang="en-US" sz="3200" b="0" u="none" strike="noStrike">
-                <a:solidFill>
-                  <a:schemeClr val="dk1"/>
-                </a:solidFill>
-                <a:effectLst/>
-                <a:uFillTx/>
-                <a:latin typeface="Arial"/>
-              </a:rPr>
-              <a:t>Seventh Outline Level</a:t>
-            </a:r>
-            <a:endParaRPr lang="en-US" sz="3200" b="0" u="none" strike="noStrike">
-              <a:solidFill>
-                <a:srgbClr val="000000"/>
-              </a:solidFill>
-              <a:effectLst/>
-              <a:uFillTx/>
-              <a:latin typeface="Arial"/>
-            </a:endParaRPr>
-          </a:p>
-        </p:txBody>
-      </p:sp>
-      <p:sp>
-        <p:nvSpPr>
-          <p:cNvPr id="67" name="PlaceHolder 3"/>
-          <p:cNvSpPr>
-            <a:spLocks noGrp="1"/>
-          </p:cNvSpPr>
-          <p:nvPr>
-            <p:ph type="body"/>
-          </p:nvPr>
-        </p:nvSpPr>
-        <p:spPr>
-          <a:xfrm>
-            <a:off x="840240" y="2057400"/>
-            <a:ext cx="3917520" cy="3796560"/>
-          </a:xfrm>
-          <a:prstGeom prst="rect">
-            <a:avLst/>
-          </a:prstGeom>
-          <a:noFill/>
-          <a:ln w="9360">
-            <a:noFill/>
-          </a:ln>
-        </p:spPr>
-        <p:txBody>
-          <a:bodyPr lIns="90000" rIns="90000" tIns="45000" bIns="45000" anchor="t">
-            <a:noAutofit/>
-          </a:bodyPr>
-          <a:p>
-            <a:pPr indent="0">
-              <a:lnSpc>
-                <a:spcPct val="100000"/>
-              </a:lnSpc>
-              <a:spcBef>
-                <a:spcPts val="320"/>
-              </a:spcBef>
-              <a:buNone/>
-              <a:tabLst>
-                <a:tab algn="l" pos="0"/>
-              </a:tabLst>
-            </a:pPr>
-            <a:r>
-              <a:rPr lang="en-US" sz="1600" b="0" u="none" strike="noStrike">
-                <a:solidFill>
-                  <a:schemeClr val="dk1"/>
-                </a:solidFill>
-                <a:effectLst/>
-                <a:uFillTx/>
-                <a:latin typeface="Arial"/>
-                <a:ea typeface="SimSun"/>
-              </a:rPr>
-              <a:t>Click to edit Master text styles</a:t>
-            </a:r>
-            <a:endParaRPr lang="en-US" sz="1600" b="0" u="none" strike="noStrike">
-              <a:solidFill>
-                <a:srgbClr val="000000"/>
-              </a:solidFill>
-              <a:effectLst/>
-              <a:uFillTx/>
-              <a:latin typeface="Arial"/>
-            </a:endParaRPr>
-          </a:p>
-        </p:txBody>
-      </p:sp>
-      <p:sp>
-        <p:nvSpPr>
-          <p:cNvPr id="68" name="PlaceHolder 4"/>
+          <p:cNvPr id="68" name="PlaceHolder 1"/>
           <p:cNvSpPr>
             <a:spLocks noGrp="1"/>
           </p:cNvSpPr>
@@ -1415,7 +1465,7 @@
         <p:spPr>
           <a:xfrm>
             <a:off x="609480" y="6245280"/>
-            <a:ext cx="2829600" cy="461160"/>
+            <a:ext cx="2829240" cy="460800"/>
           </a:xfrm>
           <a:prstGeom prst="rect">
             <a:avLst/>
@@ -1484,7 +1534,7 @@
       </p:sp>
       <p:sp>
         <p:nvSpPr>
-          <p:cNvPr id="69" name="PlaceHolder 5"/>
+          <p:cNvPr id="69" name="PlaceHolder 2"/>
           <p:cNvSpPr>
             <a:spLocks noGrp="1"/>
           </p:cNvSpPr>
@@ -1495,7 +1545,7 @@
         <p:spPr>
           <a:xfrm>
             <a:off x="4165560" y="6245280"/>
-            <a:ext cx="3845520" cy="461160"/>
+            <a:ext cx="3845160" cy="460800"/>
           </a:xfrm>
           <a:prstGeom prst="rect">
             <a:avLst/>
@@ -1564,7 +1614,7 @@
       </p:sp>
       <p:sp>
         <p:nvSpPr>
-          <p:cNvPr id="70" name="PlaceHolder 6"/>
+          <p:cNvPr id="70" name="PlaceHolder 3"/>
           <p:cNvSpPr>
             <a:spLocks noGrp="1"/>
           </p:cNvSpPr>
@@ -1575,7 +1625,7 @@
         <p:spPr>
           <a:xfrm>
             <a:off x="8737560" y="6245280"/>
-            <a:ext cx="2829600" cy="461160"/>
+            <a:ext cx="2829240" cy="460800"/>
           </a:xfrm>
           <a:prstGeom prst="rect">
             <a:avLst/>
@@ -1610,8 +1660,8 @@
 </file>
 
 <file path=ppt/slideLayouts/slideLayout2.xml><?xml version="1.0" encoding="utf-8"?>
-<p:sldLayout xmlns:a="http://schemas.openxmlformats.org/drawingml/2006/main" xmlns:p="http://schemas.openxmlformats.org/presentationml/2006/main" xmlns:r="http://schemas.openxmlformats.org/officeDocument/2006/relationships" xmlns:p14="http://schemas.microsoft.com/office/powerpoint/2010/main" xmlns:p15="http://schemas.microsoft.com/office/powerpoint/2012/main" xmlns:mc="http://schemas.openxmlformats.org/markup-compatibility/2006" type="vertTx" preserve="1">
-  <p:cSld name="Title and Vertical Text">
+<p:sldLayout xmlns:a="http://schemas.openxmlformats.org/drawingml/2006/main" xmlns:p="http://schemas.openxmlformats.org/presentationml/2006/main" xmlns:r="http://schemas.openxmlformats.org/officeDocument/2006/relationships" xmlns:p14="http://schemas.microsoft.com/office/powerpoint/2010/main" xmlns:p15="http://schemas.microsoft.com/office/powerpoint/2012/main" xmlns:mc="http://schemas.openxmlformats.org/markup-compatibility/2006" type="blank" preserve="1">
+  <p:cSld name="Content with Caption">
     <p:bg>
       <p:bgPr>
         <a:solidFill>
@@ -1646,7 +1696,7 @@
         <p:spPr>
           <a:xfrm>
             <a:off x="0" y="0"/>
-            <a:ext cx="12177000" cy="6842880"/>
+            <a:ext cx="12176640" cy="6842520"/>
           </a:xfrm>
           <a:prstGeom prst="rect">
             <a:avLst/>
@@ -1669,8 +1719,8 @@
         </p:nvSpPr>
         <p:spPr>
           <a:xfrm>
-            <a:off x="609480" y="190440"/>
-            <a:ext cx="10957680" cy="567360"/>
+            <a:off x="840240" y="457200"/>
+            <a:ext cx="3917160" cy="1584720"/>
           </a:xfrm>
           <a:prstGeom prst="rect">
             <a:avLst/>
@@ -1681,7 +1731,7 @@
           </a:ln>
         </p:spPr>
         <p:txBody>
-          <a:bodyPr lIns="90000" rIns="90000" tIns="45000" bIns="45000" anchor="ctr">
+          <a:bodyPr lIns="90000" rIns="90000" tIns="45000" bIns="45000" anchor="b">
             <a:noAutofit/>
           </a:bodyPr>
           <a:p>
@@ -1695,7 +1745,7 @@
               </a:tabLst>
             </a:pPr>
             <a:r>
-              <a:rPr lang="en-US" sz="3600" b="0" u="none" strike="noStrike">
+              <a:rPr lang="en-US" sz="3200" b="0" u="none" strike="noStrike">
                 <a:solidFill>
                   <a:schemeClr val="dk1"/>
                 </a:solidFill>
@@ -1706,7 +1756,7 @@
               </a:rPr>
               <a:t>Click to edit Master title style</a:t>
             </a:r>
-            <a:endParaRPr lang="en-US" sz="3600" b="0" u="none" strike="noStrike">
+            <a:endParaRPr lang="en-US" sz="3200" b="0" u="none" strike="noStrike">
               <a:solidFill>
                 <a:srgbClr val="000000"/>
               </a:solidFill>
@@ -1729,8 +1779,8 @@
         </p:nvSpPr>
         <p:spPr>
           <a:xfrm>
-            <a:off x="609480" y="1174680"/>
-            <a:ext cx="10957680" cy="4937760"/>
+            <a:off x="5183640" y="987480"/>
+            <a:ext cx="6156720" cy="4858200"/>
           </a:xfrm>
           <a:prstGeom prst="rect">
             <a:avLst/>
@@ -1741,7 +1791,7 @@
           </a:ln>
         </p:spPr>
         <p:txBody>
-          <a:bodyPr lIns="45000" rIns="45000" tIns="90000" bIns="90000" anchor="t" vert="eaVert">
+          <a:bodyPr lIns="90000" rIns="90000" tIns="45000" bIns="45000" anchor="t">
             <a:noAutofit/>
           </a:bodyPr>
           <a:p>
@@ -1924,6 +1974,69 @@
       <p:sp>
         <p:nvSpPr>
           <p:cNvPr id="11" name="PlaceHolder 3"/>
+          <p:cNvSpPr>
+            <a:spLocks noGrp="1"/>
+          </p:cNvSpPr>
+          <p:nvPr>
+            <p:ph type="body"/>
+          </p:nvPr>
+        </p:nvSpPr>
+        <p:spPr>
+          <a:xfrm>
+            <a:off x="840240" y="2057400"/>
+            <a:ext cx="3917160" cy="3796200"/>
+          </a:xfrm>
+          <a:prstGeom prst="rect">
+            <a:avLst/>
+          </a:prstGeom>
+          <a:noFill/>
+          <a:ln w="9360">
+            <a:noFill/>
+          </a:ln>
+        </p:spPr>
+        <p:txBody>
+          <a:bodyPr lIns="90000" rIns="90000" tIns="45000" bIns="45000" anchor="t">
+            <a:noAutofit/>
+          </a:bodyPr>
+          <a:p>
+            <a:pPr indent="0">
+              <a:lnSpc>
+                <a:spcPct val="100000"/>
+              </a:lnSpc>
+              <a:spcBef>
+                <a:spcPts val="320"/>
+              </a:spcBef>
+              <a:buNone/>
+              <a:tabLst>
+                <a:tab algn="l" pos="0"/>
+              </a:tabLst>
+            </a:pPr>
+            <a:r>
+              <a:rPr lang="en-US" sz="1600" b="0" u="none" strike="noStrike">
+                <a:solidFill>
+                  <a:schemeClr val="dk1"/>
+                </a:solidFill>
+                <a:effectLst/>
+                <a:uFillTx/>
+                <a:latin typeface="Arial"/>
+                <a:ea typeface="SimSun"/>
+              </a:rPr>
+              <a:t>Click to edit Master text styles</a:t>
+            </a:r>
+            <a:endParaRPr lang="en-US" sz="1600" b="0" u="none" strike="noStrike">
+              <a:solidFill>
+                <a:srgbClr val="000000"/>
+              </a:solidFill>
+              <a:effectLst/>
+              <a:uFillTx/>
+              <a:latin typeface="Arial"/>
+            </a:endParaRPr>
+          </a:p>
+        </p:txBody>
+      </p:sp>
+      <p:sp>
+        <p:nvSpPr>
+          <p:cNvPr id="12" name="PlaceHolder 4"/>
           <p:cNvSpPr>
             <a:spLocks noGrp="1"/>
           </p:cNvSpPr>
@@ -1934,7 +2047,7 @@
         <p:spPr>
           <a:xfrm>
             <a:off x="609480" y="6245280"/>
-            <a:ext cx="2829600" cy="461160"/>
+            <a:ext cx="2829240" cy="460800"/>
           </a:xfrm>
           <a:prstGeom prst="rect">
             <a:avLst/>
@@ -2003,7 +2116,7 @@
       </p:sp>
       <p:sp>
         <p:nvSpPr>
-          <p:cNvPr id="12" name="PlaceHolder 4"/>
+          <p:cNvPr id="13" name="PlaceHolder 5"/>
           <p:cNvSpPr>
             <a:spLocks noGrp="1"/>
           </p:cNvSpPr>
@@ -2014,7 +2127,7 @@
         <p:spPr>
           <a:xfrm>
             <a:off x="4165560" y="6245280"/>
-            <a:ext cx="3845520" cy="461160"/>
+            <a:ext cx="3845160" cy="460800"/>
           </a:xfrm>
           <a:prstGeom prst="rect">
             <a:avLst/>
@@ -2083,7 +2196,7 @@
       </p:sp>
       <p:sp>
         <p:nvSpPr>
-          <p:cNvPr id="13" name="PlaceHolder 5"/>
+          <p:cNvPr id="14" name="PlaceHolder 6"/>
           <p:cNvSpPr>
             <a:spLocks noGrp="1"/>
           </p:cNvSpPr>
@@ -2094,7 +2207,7 @@
         <p:spPr>
           <a:xfrm>
             <a:off x="8737560" y="6245280"/>
-            <a:ext cx="2829600" cy="461160"/>
+            <a:ext cx="2829240" cy="460800"/>
           </a:xfrm>
           <a:prstGeom prst="rect">
             <a:avLst/>
@@ -2129,6 +2242,1516 @@
 </file>
 
 <file path=ppt/slideLayouts/slideLayout3.xml><?xml version="1.0" encoding="utf-8"?>
+<p:sldLayout xmlns:a="http://schemas.openxmlformats.org/drawingml/2006/main" xmlns:p="http://schemas.openxmlformats.org/presentationml/2006/main" xmlns:r="http://schemas.openxmlformats.org/officeDocument/2006/relationships" xmlns:p14="http://schemas.microsoft.com/office/powerpoint/2010/main" xmlns:p15="http://schemas.microsoft.com/office/powerpoint/2012/main" xmlns:mc="http://schemas.openxmlformats.org/markup-compatibility/2006" type="blank" preserve="1">
+  <p:cSld name="Picture with Caption">
+    <p:bg>
+      <p:bgPr>
+        <a:solidFill>
+          <a:srgbClr val="ffffff"/>
+        </a:solidFill>
+      </p:bgPr>
+    </p:bg>
+    <p:spTree>
+      <p:nvGrpSpPr>
+        <p:cNvPr id="1" name=""/>
+        <p:cNvGrpSpPr/>
+        <p:nvPr/>
+      </p:nvGrpSpPr>
+      <p:grpSpPr>
+        <a:xfrm>
+          <a:off x="0" y="0"/>
+          <a:ext cx="0" cy="0"/>
+          <a:chOff x="0" y="0"/>
+          <a:chExt cx="0" cy="0"/>
+        </a:xfrm>
+      </p:grpSpPr>
+      <p:pic>
+        <p:nvPicPr>
+          <p:cNvPr id="15" name="Picture 10"/>
+          <p:cNvPicPr/>
+          <p:nvPr/>
+        </p:nvPicPr>
+        <p:blipFill>
+          <a:blip r:embed="rId2"/>
+          <a:stretch/>
+        </p:blipFill>
+        <p:spPr>
+          <a:xfrm>
+            <a:off x="0" y="0"/>
+            <a:ext cx="12176640" cy="6842520"/>
+          </a:xfrm>
+          <a:prstGeom prst="rect">
+            <a:avLst/>
+          </a:prstGeom>
+          <a:noFill/>
+          <a:ln w="9525">
+            <a:noFill/>
+          </a:ln>
+        </p:spPr>
+      </p:pic>
+      <p:sp>
+        <p:nvSpPr>
+          <p:cNvPr id="16" name="PlaceHolder 1"/>
+          <p:cNvSpPr>
+            <a:spLocks noGrp="1"/>
+          </p:cNvSpPr>
+          <p:nvPr>
+            <p:ph type="title"/>
+          </p:nvPr>
+        </p:nvSpPr>
+        <p:spPr>
+          <a:xfrm>
+            <a:off x="840240" y="457200"/>
+            <a:ext cx="3917160" cy="1584720"/>
+          </a:xfrm>
+          <a:prstGeom prst="rect">
+            <a:avLst/>
+          </a:prstGeom>
+          <a:noFill/>
+          <a:ln w="9360">
+            <a:noFill/>
+          </a:ln>
+        </p:spPr>
+        <p:txBody>
+          <a:bodyPr lIns="90000" rIns="90000" tIns="45000" bIns="45000" anchor="b">
+            <a:noAutofit/>
+          </a:bodyPr>
+          <a:p>
+            <a:pPr indent="0">
+              <a:lnSpc>
+                <a:spcPct val="100000"/>
+              </a:lnSpc>
+              <a:buNone/>
+              <a:tabLst>
+                <a:tab algn="l" pos="0"/>
+              </a:tabLst>
+            </a:pPr>
+            <a:r>
+              <a:rPr lang="en-US" sz="3200" b="0" u="none" strike="noStrike">
+                <a:solidFill>
+                  <a:schemeClr val="dk1"/>
+                </a:solidFill>
+                <a:effectLst/>
+                <a:uFillTx/>
+                <a:latin typeface="Arial"/>
+                <a:ea typeface="SimSun"/>
+              </a:rPr>
+              <a:t>Click to edit Master title style</a:t>
+            </a:r>
+            <a:endParaRPr lang="en-US" sz="3200" b="0" u="none" strike="noStrike">
+              <a:solidFill>
+                <a:srgbClr val="000000"/>
+              </a:solidFill>
+              <a:effectLst/>
+              <a:uFillTx/>
+              <a:latin typeface="Arial"/>
+            </a:endParaRPr>
+          </a:p>
+        </p:txBody>
+      </p:sp>
+      <p:sp>
+        <p:nvSpPr>
+          <p:cNvPr id="17" name="PlaceHolder 2"/>
+          <p:cNvSpPr>
+            <a:spLocks noGrp="1"/>
+          </p:cNvSpPr>
+          <p:nvPr>
+            <p:ph type="body"/>
+          </p:nvPr>
+        </p:nvSpPr>
+        <p:spPr>
+          <a:xfrm>
+            <a:off x="5183640" y="987480"/>
+            <a:ext cx="6156720" cy="4858200"/>
+          </a:xfrm>
+          <a:prstGeom prst="rect">
+            <a:avLst/>
+          </a:prstGeom>
+          <a:noFill/>
+          <a:ln w="0">
+            <a:noFill/>
+          </a:ln>
+        </p:spPr>
+        <p:txBody>
+          <a:bodyPr numCol="1" spcCol="0" lIns="91440" rIns="91440" tIns="45720" bIns="45720" anchor="t">
+            <a:noAutofit/>
+          </a:bodyPr>
+          <a:p>
+            <a:pPr marL="431640" indent="-324000">
+              <a:lnSpc>
+                <a:spcPct val="100000"/>
+              </a:lnSpc>
+              <a:spcBef>
+                <a:spcPts val="1414"/>
+              </a:spcBef>
+              <a:buClr>
+                <a:srgbClr val="000000"/>
+              </a:buClr>
+              <a:buSzPct val="45000"/>
+              <a:buFont typeface="Wingdings" charset="2"/>
+              <a:buChar char=""/>
+            </a:pPr>
+            <a:r>
+              <a:rPr lang="en-US" sz="3200" b="0" u="none" strike="noStrike">
+                <a:solidFill>
+                  <a:schemeClr val="dk1"/>
+                </a:solidFill>
+                <a:effectLst/>
+                <a:uFillTx/>
+                <a:latin typeface="Arial"/>
+              </a:rPr>
+              <a:t>Click to edit the outline text format</a:t>
+            </a:r>
+            <a:endParaRPr lang="en-US" sz="3200" b="0" u="none" strike="noStrike">
+              <a:solidFill>
+                <a:srgbClr val="000000"/>
+              </a:solidFill>
+              <a:effectLst/>
+              <a:uFillTx/>
+              <a:latin typeface="Arial"/>
+            </a:endParaRPr>
+          </a:p>
+          <a:p>
+            <a:pPr marL="864360" lvl="1" indent="-324000">
+              <a:lnSpc>
+                <a:spcPct val="100000"/>
+              </a:lnSpc>
+              <a:spcBef>
+                <a:spcPts val="1134"/>
+              </a:spcBef>
+              <a:buClr>
+                <a:srgbClr val="000000"/>
+              </a:buClr>
+              <a:buSzPct val="75000"/>
+              <a:buFont typeface="Symbol" charset="2"/>
+              <a:buChar char=""/>
+            </a:pPr>
+            <a:r>
+              <a:rPr lang="en-US" sz="3200" b="0" u="none" strike="noStrike">
+                <a:solidFill>
+                  <a:schemeClr val="dk1"/>
+                </a:solidFill>
+                <a:effectLst/>
+                <a:uFillTx/>
+                <a:latin typeface="Arial"/>
+              </a:rPr>
+              <a:t>Second Outline Level</a:t>
+            </a:r>
+            <a:endParaRPr lang="en-US" sz="3200" b="0" u="none" strike="noStrike">
+              <a:solidFill>
+                <a:srgbClr val="000000"/>
+              </a:solidFill>
+              <a:effectLst/>
+              <a:uFillTx/>
+              <a:latin typeface="Arial"/>
+            </a:endParaRPr>
+          </a:p>
+          <a:p>
+            <a:pPr marL="1296000" lvl="2" indent="-288360">
+              <a:lnSpc>
+                <a:spcPct val="100000"/>
+              </a:lnSpc>
+              <a:spcBef>
+                <a:spcPts val="850"/>
+              </a:spcBef>
+              <a:buClr>
+                <a:srgbClr val="000000"/>
+              </a:buClr>
+              <a:buSzPct val="45000"/>
+              <a:buFont typeface="Wingdings" charset="2"/>
+              <a:buChar char=""/>
+            </a:pPr>
+            <a:r>
+              <a:rPr lang="en-US" sz="3200" b="0" u="none" strike="noStrike">
+                <a:solidFill>
+                  <a:schemeClr val="dk1"/>
+                </a:solidFill>
+                <a:effectLst/>
+                <a:uFillTx/>
+                <a:latin typeface="Arial"/>
+              </a:rPr>
+              <a:t>Third Outline Level</a:t>
+            </a:r>
+            <a:endParaRPr lang="en-US" sz="3200" b="0" u="none" strike="noStrike">
+              <a:solidFill>
+                <a:srgbClr val="000000"/>
+              </a:solidFill>
+              <a:effectLst/>
+              <a:uFillTx/>
+              <a:latin typeface="Arial"/>
+            </a:endParaRPr>
+          </a:p>
+          <a:p>
+            <a:pPr marL="1728000" lvl="3" indent="-216000">
+              <a:lnSpc>
+                <a:spcPct val="100000"/>
+              </a:lnSpc>
+              <a:spcBef>
+                <a:spcPts val="564"/>
+              </a:spcBef>
+              <a:buClr>
+                <a:srgbClr val="000000"/>
+              </a:buClr>
+              <a:buSzPct val="75000"/>
+              <a:buFont typeface="Symbol" charset="2"/>
+              <a:buChar char=""/>
+            </a:pPr>
+            <a:r>
+              <a:rPr lang="en-US" sz="3200" b="0" u="none" strike="noStrike">
+                <a:solidFill>
+                  <a:schemeClr val="dk1"/>
+                </a:solidFill>
+                <a:effectLst/>
+                <a:uFillTx/>
+                <a:latin typeface="Arial"/>
+              </a:rPr>
+              <a:t>Fourth Outline Level</a:t>
+            </a:r>
+            <a:endParaRPr lang="en-US" sz="3200" b="0" u="none" strike="noStrike">
+              <a:solidFill>
+                <a:srgbClr val="000000"/>
+              </a:solidFill>
+              <a:effectLst/>
+              <a:uFillTx/>
+              <a:latin typeface="Arial"/>
+            </a:endParaRPr>
+          </a:p>
+          <a:p>
+            <a:pPr marL="2160360" lvl="4" indent="-216000">
+              <a:lnSpc>
+                <a:spcPct val="100000"/>
+              </a:lnSpc>
+              <a:spcBef>
+                <a:spcPts val="286"/>
+              </a:spcBef>
+              <a:buClr>
+                <a:srgbClr val="000000"/>
+              </a:buClr>
+              <a:buSzPct val="45000"/>
+              <a:buFont typeface="Wingdings" charset="2"/>
+              <a:buChar char=""/>
+            </a:pPr>
+            <a:r>
+              <a:rPr lang="en-US" sz="3200" b="0" u="none" strike="noStrike">
+                <a:solidFill>
+                  <a:schemeClr val="dk1"/>
+                </a:solidFill>
+                <a:effectLst/>
+                <a:uFillTx/>
+                <a:latin typeface="Arial"/>
+              </a:rPr>
+              <a:t>Fifth Outline Level</a:t>
+            </a:r>
+            <a:endParaRPr lang="en-US" sz="3200" b="0" u="none" strike="noStrike">
+              <a:solidFill>
+                <a:srgbClr val="000000"/>
+              </a:solidFill>
+              <a:effectLst/>
+              <a:uFillTx/>
+              <a:latin typeface="Arial"/>
+            </a:endParaRPr>
+          </a:p>
+          <a:p>
+            <a:pPr marL="2592000" lvl="5" indent="-216000">
+              <a:lnSpc>
+                <a:spcPct val="100000"/>
+              </a:lnSpc>
+              <a:spcBef>
+                <a:spcPts val="286"/>
+              </a:spcBef>
+              <a:buClr>
+                <a:srgbClr val="000000"/>
+              </a:buClr>
+              <a:buSzPct val="45000"/>
+              <a:buFont typeface="Wingdings" charset="2"/>
+              <a:buChar char=""/>
+            </a:pPr>
+            <a:r>
+              <a:rPr lang="en-US" sz="3200" b="0" u="none" strike="noStrike">
+                <a:solidFill>
+                  <a:schemeClr val="dk1"/>
+                </a:solidFill>
+                <a:effectLst/>
+                <a:uFillTx/>
+                <a:latin typeface="Arial"/>
+              </a:rPr>
+              <a:t>Sixth Outline Level</a:t>
+            </a:r>
+            <a:endParaRPr lang="en-US" sz="3200" b="0" u="none" strike="noStrike">
+              <a:solidFill>
+                <a:srgbClr val="000000"/>
+              </a:solidFill>
+              <a:effectLst/>
+              <a:uFillTx/>
+              <a:latin typeface="Arial"/>
+            </a:endParaRPr>
+          </a:p>
+          <a:p>
+            <a:pPr marL="3024000" lvl="6" indent="-216000">
+              <a:lnSpc>
+                <a:spcPct val="100000"/>
+              </a:lnSpc>
+              <a:spcBef>
+                <a:spcPts val="286"/>
+              </a:spcBef>
+              <a:buClr>
+                <a:srgbClr val="000000"/>
+              </a:buClr>
+              <a:buSzPct val="45000"/>
+              <a:buFont typeface="Wingdings" charset="2"/>
+              <a:buChar char=""/>
+            </a:pPr>
+            <a:r>
+              <a:rPr lang="en-US" sz="3200" b="0" u="none" strike="noStrike">
+                <a:solidFill>
+                  <a:schemeClr val="dk1"/>
+                </a:solidFill>
+                <a:effectLst/>
+                <a:uFillTx/>
+                <a:latin typeface="Arial"/>
+              </a:rPr>
+              <a:t>Seventh Outline Level</a:t>
+            </a:r>
+            <a:endParaRPr lang="en-US" sz="3200" b="0" u="none" strike="noStrike">
+              <a:solidFill>
+                <a:srgbClr val="000000"/>
+              </a:solidFill>
+              <a:effectLst/>
+              <a:uFillTx/>
+              <a:latin typeface="Arial"/>
+            </a:endParaRPr>
+          </a:p>
+        </p:txBody>
+      </p:sp>
+      <p:sp>
+        <p:nvSpPr>
+          <p:cNvPr id="18" name="PlaceHolder 3"/>
+          <p:cNvSpPr>
+            <a:spLocks noGrp="1"/>
+          </p:cNvSpPr>
+          <p:nvPr>
+            <p:ph type="body"/>
+          </p:nvPr>
+        </p:nvSpPr>
+        <p:spPr>
+          <a:xfrm>
+            <a:off x="840240" y="2057400"/>
+            <a:ext cx="3917160" cy="3796200"/>
+          </a:xfrm>
+          <a:prstGeom prst="rect">
+            <a:avLst/>
+          </a:prstGeom>
+          <a:noFill/>
+          <a:ln w="9360">
+            <a:noFill/>
+          </a:ln>
+        </p:spPr>
+        <p:txBody>
+          <a:bodyPr lIns="90000" rIns="90000" tIns="45000" bIns="45000" anchor="t">
+            <a:noAutofit/>
+          </a:bodyPr>
+          <a:p>
+            <a:pPr indent="0">
+              <a:lnSpc>
+                <a:spcPct val="100000"/>
+              </a:lnSpc>
+              <a:spcBef>
+                <a:spcPts val="320"/>
+              </a:spcBef>
+              <a:buNone/>
+              <a:tabLst>
+                <a:tab algn="l" pos="0"/>
+              </a:tabLst>
+            </a:pPr>
+            <a:r>
+              <a:rPr lang="en-US" sz="1600" b="0" u="none" strike="noStrike">
+                <a:solidFill>
+                  <a:schemeClr val="dk1"/>
+                </a:solidFill>
+                <a:effectLst/>
+                <a:uFillTx/>
+                <a:latin typeface="Arial"/>
+                <a:ea typeface="SimSun"/>
+              </a:rPr>
+              <a:t>Click to edit Master text styles</a:t>
+            </a:r>
+            <a:endParaRPr lang="en-US" sz="1600" b="0" u="none" strike="noStrike">
+              <a:solidFill>
+                <a:srgbClr val="000000"/>
+              </a:solidFill>
+              <a:effectLst/>
+              <a:uFillTx/>
+              <a:latin typeface="Arial"/>
+            </a:endParaRPr>
+          </a:p>
+        </p:txBody>
+      </p:sp>
+      <p:sp>
+        <p:nvSpPr>
+          <p:cNvPr id="19" name="PlaceHolder 4"/>
+          <p:cNvSpPr>
+            <a:spLocks noGrp="1"/>
+          </p:cNvSpPr>
+          <p:nvPr>
+            <p:ph type="dt" idx="7"/>
+          </p:nvPr>
+        </p:nvSpPr>
+        <p:spPr>
+          <a:xfrm>
+            <a:off x="609480" y="6245280"/>
+            <a:ext cx="2829240" cy="460800"/>
+          </a:xfrm>
+          <a:prstGeom prst="rect">
+            <a:avLst/>
+          </a:prstGeom>
+          <a:noFill/>
+          <a:ln w="0">
+            <a:noFill/>
+          </a:ln>
+        </p:spPr>
+        <p:txBody>
+          <a:bodyPr numCol="1" spcCol="0" lIns="91440" rIns="91440" tIns="45720" bIns="45720" anchor="t">
+            <a:noAutofit/>
+          </a:bodyPr>
+          <a:lstStyle>
+            <a:lvl1pPr indent="0" defTabSz="914400">
+              <a:lnSpc>
+                <a:spcPct val="100000"/>
+              </a:lnSpc>
+              <a:buNone/>
+              <a:tabLst>
+                <a:tab algn="l" pos="0"/>
+              </a:tabLst>
+              <a:defRPr lang="en-US" sz="1400" b="0" u="none" strike="noStrike">
+                <a:solidFill>
+                  <a:srgbClr val="000000"/>
+                </a:solidFill>
+                <a:effectLst/>
+                <a:uFillTx/>
+                <a:latin typeface="Times New Roman"/>
+                <a:ea typeface="SimSun"/>
+              </a:defRPr>
+            </a:lvl1pPr>
+          </a:lstStyle>
+          <a:p>
+            <a:pPr indent="0" defTabSz="914400">
+              <a:lnSpc>
+                <a:spcPct val="100000"/>
+              </a:lnSpc>
+              <a:buNone/>
+              <a:tabLst>
+                <a:tab algn="l" pos="0"/>
+              </a:tabLst>
+            </a:pPr>
+            <a:r>
+              <a:rPr lang="en-US" sz="1400" b="0" u="none" strike="noStrike">
+                <a:solidFill>
+                  <a:srgbClr val="000000"/>
+                </a:solidFill>
+                <a:effectLst/>
+                <a:uFillTx/>
+                <a:latin typeface="Times New Roman"/>
+                <a:ea typeface="SimSun"/>
+              </a:rPr>
+              <a:t>&lt;date/time&gt;</a:t>
+            </a:r>
+            <a:endParaRPr lang="en-US" sz="1400" b="0" u="none" strike="noStrike">
+              <a:solidFill>
+                <a:srgbClr val="000000"/>
+              </a:solidFill>
+              <a:effectLst/>
+              <a:uFillTx/>
+              <a:latin typeface="Times New Roman"/>
+            </a:endParaRPr>
+          </a:p>
+        </p:txBody>
+      </p:sp>
+      <p:sp>
+        <p:nvSpPr>
+          <p:cNvPr id="20" name="PlaceHolder 5"/>
+          <p:cNvSpPr>
+            <a:spLocks noGrp="1"/>
+          </p:cNvSpPr>
+          <p:nvPr>
+            <p:ph type="ftr" idx="8"/>
+          </p:nvPr>
+        </p:nvSpPr>
+        <p:spPr>
+          <a:xfrm>
+            <a:off x="4165560" y="6245280"/>
+            <a:ext cx="3845160" cy="460800"/>
+          </a:xfrm>
+          <a:prstGeom prst="rect">
+            <a:avLst/>
+          </a:prstGeom>
+          <a:noFill/>
+          <a:ln w="0">
+            <a:noFill/>
+          </a:ln>
+        </p:spPr>
+        <p:txBody>
+          <a:bodyPr numCol="1" spcCol="0" lIns="91440" rIns="91440" tIns="45720" bIns="45720" anchor="t">
+            <a:noAutofit/>
+          </a:bodyPr>
+          <a:lstStyle>
+            <a:lvl1pPr indent="0" algn="ctr" defTabSz="914400">
+              <a:lnSpc>
+                <a:spcPct val="100000"/>
+              </a:lnSpc>
+              <a:buNone/>
+              <a:tabLst>
+                <a:tab algn="l" pos="0"/>
+              </a:tabLst>
+              <a:defRPr lang="en-US" sz="1400" b="0" u="none" strike="noStrike">
+                <a:solidFill>
+                  <a:srgbClr val="000000"/>
+                </a:solidFill>
+                <a:effectLst/>
+                <a:uFillTx/>
+                <a:latin typeface="Times New Roman"/>
+                <a:ea typeface="SimSun"/>
+              </a:defRPr>
+            </a:lvl1pPr>
+          </a:lstStyle>
+          <a:p>
+            <a:pPr indent="0" algn="ctr" defTabSz="914400">
+              <a:lnSpc>
+                <a:spcPct val="100000"/>
+              </a:lnSpc>
+              <a:buNone/>
+              <a:tabLst>
+                <a:tab algn="l" pos="0"/>
+              </a:tabLst>
+            </a:pPr>
+            <a:r>
+              <a:rPr lang="en-US" sz="1400" b="0" u="none" strike="noStrike">
+                <a:solidFill>
+                  <a:srgbClr val="000000"/>
+                </a:solidFill>
+                <a:effectLst/>
+                <a:uFillTx/>
+                <a:latin typeface="Times New Roman"/>
+                <a:ea typeface="SimSun"/>
+              </a:rPr>
+              <a:t>&lt;footer&gt;</a:t>
+            </a:r>
+            <a:endParaRPr lang="en-US" sz="1400" b="0" u="none" strike="noStrike">
+              <a:solidFill>
+                <a:srgbClr val="000000"/>
+              </a:solidFill>
+              <a:effectLst/>
+              <a:uFillTx/>
+              <a:latin typeface="Times New Roman"/>
+            </a:endParaRPr>
+          </a:p>
+        </p:txBody>
+      </p:sp>
+      <p:sp>
+        <p:nvSpPr>
+          <p:cNvPr id="21" name="PlaceHolder 6"/>
+          <p:cNvSpPr>
+            <a:spLocks noGrp="1"/>
+          </p:cNvSpPr>
+          <p:nvPr>
+            <p:ph type="sldNum" idx="9"/>
+          </p:nvPr>
+        </p:nvSpPr>
+        <p:spPr>
+          <a:xfrm>
+            <a:off x="8737560" y="6245280"/>
+            <a:ext cx="2829240" cy="460800"/>
+          </a:xfrm>
+          <a:prstGeom prst="rect">
+            <a:avLst/>
+          </a:prstGeom>
+          <a:noFill/>
+          <a:ln w="0">
+            <a:noFill/>
+          </a:ln>
+        </p:spPr>
+        <p:txBody>
+          <a:bodyPr numCol="1" spcCol="0" lIns="91440" rIns="91440" tIns="45720" bIns="45720" anchor="t">
+            <a:noAutofit/>
+          </a:bodyPr>
+          <a:p>
+            <a:pPr indent="0">
+              <a:buNone/>
+            </a:pPr>
+            <a:endParaRPr lang="en-US" sz="1800" b="0" u="none" strike="noStrike">
+              <a:solidFill>
+                <a:srgbClr val="000000"/>
+              </a:solidFill>
+              <a:effectLst/>
+              <a:uFillTx/>
+              <a:latin typeface="Times New Roman"/>
+            </a:endParaRPr>
+          </a:p>
+        </p:txBody>
+      </p:sp>
+    </p:spTree>
+  </p:cSld>
+</p:sldLayout>
+</file>
+
+<file path=ppt/slideLayouts/slideLayout4.xml><?xml version="1.0" encoding="utf-8"?>
+<p:sldLayout xmlns:a="http://schemas.openxmlformats.org/drawingml/2006/main" xmlns:p="http://schemas.openxmlformats.org/presentationml/2006/main" xmlns:r="http://schemas.openxmlformats.org/officeDocument/2006/relationships" xmlns:p14="http://schemas.microsoft.com/office/powerpoint/2010/main" xmlns:p15="http://schemas.microsoft.com/office/powerpoint/2012/main" xmlns:mc="http://schemas.openxmlformats.org/markup-compatibility/2006" type="title" preserve="1">
+  <p:cSld name="Title Slide">
+    <p:bg>
+      <p:bgPr>
+        <a:solidFill>
+          <a:srgbClr val="ffffff"/>
+        </a:solidFill>
+      </p:bgPr>
+    </p:bg>
+    <p:spTree>
+      <p:nvGrpSpPr>
+        <p:cNvPr id="1" name=""/>
+        <p:cNvGrpSpPr/>
+        <p:nvPr/>
+      </p:nvGrpSpPr>
+      <p:grpSpPr>
+        <a:xfrm>
+          <a:off x="0" y="0"/>
+          <a:ext cx="0" cy="0"/>
+          <a:chOff x="0" y="0"/>
+          <a:chExt cx="0" cy="0"/>
+        </a:xfrm>
+      </p:grpSpPr>
+      <p:pic>
+        <p:nvPicPr>
+          <p:cNvPr id="22" name="Picture 10" hidden="1"/>
+          <p:cNvPicPr/>
+          <p:nvPr/>
+        </p:nvPicPr>
+        <p:blipFill>
+          <a:blip r:embed="rId2"/>
+          <a:stretch/>
+        </p:blipFill>
+        <p:spPr>
+          <a:xfrm>
+            <a:off x="0" y="0"/>
+            <a:ext cx="12176640" cy="6842520"/>
+          </a:xfrm>
+          <a:prstGeom prst="rect">
+            <a:avLst/>
+          </a:prstGeom>
+          <a:noFill/>
+          <a:ln w="9525">
+            <a:noFill/>
+          </a:ln>
+        </p:spPr>
+      </p:pic>
+      <p:pic>
+        <p:nvPicPr>
+          <p:cNvPr id="23" name="Picture 3"/>
+          <p:cNvPicPr/>
+          <p:nvPr/>
+        </p:nvPicPr>
+        <p:blipFill>
+          <a:blip r:embed="rId3"/>
+          <a:stretch/>
+        </p:blipFill>
+        <p:spPr>
+          <a:xfrm>
+            <a:off x="0" y="0"/>
+            <a:ext cx="12176640" cy="6842520"/>
+          </a:xfrm>
+          <a:prstGeom prst="rect">
+            <a:avLst/>
+          </a:prstGeom>
+          <a:noFill/>
+          <a:ln w="9525">
+            <a:noFill/>
+          </a:ln>
+        </p:spPr>
+      </p:pic>
+      <p:sp>
+        <p:nvSpPr>
+          <p:cNvPr id="24" name="PlaceHolder 1"/>
+          <p:cNvSpPr>
+            <a:spLocks noGrp="1"/>
+          </p:cNvSpPr>
+          <p:nvPr>
+            <p:ph type="title"/>
+          </p:nvPr>
+        </p:nvSpPr>
+        <p:spPr>
+          <a:xfrm>
+            <a:off x="624240" y="3718080"/>
+            <a:ext cx="10927800" cy="1067040"/>
+          </a:xfrm>
+          <a:prstGeom prst="rect">
+            <a:avLst/>
+          </a:prstGeom>
+          <a:noFill/>
+          <a:ln w="9360">
+            <a:noFill/>
+          </a:ln>
+        </p:spPr>
+        <p:txBody>
+          <a:bodyPr lIns="90000" rIns="90000" tIns="45000" bIns="45000" anchor="ctr">
+            <a:noAutofit/>
+          </a:bodyPr>
+          <a:p>
+            <a:pPr indent="0" algn="r">
+              <a:lnSpc>
+                <a:spcPct val="100000"/>
+              </a:lnSpc>
+              <a:buNone/>
+              <a:tabLst>
+                <a:tab algn="l" pos="0"/>
+              </a:tabLst>
+            </a:pPr>
+            <a:r>
+              <a:rPr lang="en-US" sz="3600" b="0" u="none" strike="noStrike">
+                <a:solidFill>
+                  <a:schemeClr val="dk1"/>
+                </a:solidFill>
+                <a:effectLst/>
+                <a:uFillTx/>
+                <a:latin typeface="Arial"/>
+                <a:ea typeface="SimSun"/>
+              </a:rPr>
+              <a:t>Click to edit Master title style</a:t>
+            </a:r>
+            <a:endParaRPr lang="en-US" sz="3600" b="0" u="none" strike="noStrike">
+              <a:solidFill>
+                <a:srgbClr val="000000"/>
+              </a:solidFill>
+              <a:effectLst/>
+              <a:uFillTx/>
+              <a:latin typeface="Arial"/>
+            </a:endParaRPr>
+          </a:p>
+        </p:txBody>
+      </p:sp>
+      <p:sp>
+        <p:nvSpPr>
+          <p:cNvPr id="25" name="PlaceHolder 2"/>
+          <p:cNvSpPr>
+            <a:spLocks noGrp="1"/>
+          </p:cNvSpPr>
+          <p:nvPr>
+            <p:ph type="dt" idx="10"/>
+          </p:nvPr>
+        </p:nvSpPr>
+        <p:spPr>
+          <a:xfrm>
+            <a:off x="609480" y="6245280"/>
+            <a:ext cx="2829240" cy="460800"/>
+          </a:xfrm>
+          <a:prstGeom prst="rect">
+            <a:avLst/>
+          </a:prstGeom>
+          <a:noFill/>
+          <a:ln w="0">
+            <a:noFill/>
+          </a:ln>
+        </p:spPr>
+        <p:txBody>
+          <a:bodyPr numCol="1" spcCol="0" lIns="91440" rIns="91440" tIns="45720" bIns="45720" anchor="t">
+            <a:noAutofit/>
+          </a:bodyPr>
+          <a:lstStyle>
+            <a:lvl1pPr indent="0" defTabSz="914400">
+              <a:lnSpc>
+                <a:spcPct val="100000"/>
+              </a:lnSpc>
+              <a:buNone/>
+              <a:tabLst>
+                <a:tab algn="l" pos="0"/>
+              </a:tabLst>
+              <a:defRPr lang="en-US" sz="1400" b="0" u="none" strike="noStrike">
+                <a:solidFill>
+                  <a:srgbClr val="000000"/>
+                </a:solidFill>
+                <a:effectLst/>
+                <a:uFillTx/>
+                <a:latin typeface="Times New Roman"/>
+                <a:ea typeface="SimSun"/>
+              </a:defRPr>
+            </a:lvl1pPr>
+          </a:lstStyle>
+          <a:p>
+            <a:pPr indent="0" defTabSz="914400">
+              <a:lnSpc>
+                <a:spcPct val="100000"/>
+              </a:lnSpc>
+              <a:buNone/>
+              <a:tabLst>
+                <a:tab algn="l" pos="0"/>
+              </a:tabLst>
+            </a:pPr>
+            <a:r>
+              <a:rPr lang="en-US" sz="1400" b="0" u="none" strike="noStrike">
+                <a:solidFill>
+                  <a:srgbClr val="000000"/>
+                </a:solidFill>
+                <a:effectLst/>
+                <a:uFillTx/>
+                <a:latin typeface="Times New Roman"/>
+                <a:ea typeface="SimSun"/>
+              </a:rPr>
+              <a:t>&lt;date/time&gt;</a:t>
+            </a:r>
+            <a:endParaRPr lang="en-US" sz="1400" b="0" u="none" strike="noStrike">
+              <a:solidFill>
+                <a:srgbClr val="000000"/>
+              </a:solidFill>
+              <a:effectLst/>
+              <a:uFillTx/>
+              <a:latin typeface="Times New Roman"/>
+            </a:endParaRPr>
+          </a:p>
+        </p:txBody>
+      </p:sp>
+      <p:sp>
+        <p:nvSpPr>
+          <p:cNvPr id="26" name="PlaceHolder 3"/>
+          <p:cNvSpPr>
+            <a:spLocks noGrp="1"/>
+          </p:cNvSpPr>
+          <p:nvPr>
+            <p:ph type="ftr" idx="11"/>
+          </p:nvPr>
+        </p:nvSpPr>
+        <p:spPr>
+          <a:xfrm>
+            <a:off x="4165560" y="6245280"/>
+            <a:ext cx="3845160" cy="460800"/>
+          </a:xfrm>
+          <a:prstGeom prst="rect">
+            <a:avLst/>
+          </a:prstGeom>
+          <a:noFill/>
+          <a:ln w="0">
+            <a:noFill/>
+          </a:ln>
+        </p:spPr>
+        <p:txBody>
+          <a:bodyPr numCol="1" spcCol="0" lIns="91440" rIns="91440" tIns="45720" bIns="45720" anchor="t">
+            <a:noAutofit/>
+          </a:bodyPr>
+          <a:lstStyle>
+            <a:lvl1pPr indent="0" algn="ctr" defTabSz="914400">
+              <a:lnSpc>
+                <a:spcPct val="100000"/>
+              </a:lnSpc>
+              <a:buNone/>
+              <a:tabLst>
+                <a:tab algn="l" pos="0"/>
+              </a:tabLst>
+              <a:defRPr lang="en-US" sz="1400" b="0" u="none" strike="noStrike">
+                <a:solidFill>
+                  <a:srgbClr val="000000"/>
+                </a:solidFill>
+                <a:effectLst/>
+                <a:uFillTx/>
+                <a:latin typeface="Times New Roman"/>
+                <a:ea typeface="SimSun"/>
+              </a:defRPr>
+            </a:lvl1pPr>
+          </a:lstStyle>
+          <a:p>
+            <a:pPr indent="0" algn="ctr" defTabSz="914400">
+              <a:lnSpc>
+                <a:spcPct val="100000"/>
+              </a:lnSpc>
+              <a:buNone/>
+              <a:tabLst>
+                <a:tab algn="l" pos="0"/>
+              </a:tabLst>
+            </a:pPr>
+            <a:r>
+              <a:rPr lang="en-US" sz="1400" b="0" u="none" strike="noStrike">
+                <a:solidFill>
+                  <a:srgbClr val="000000"/>
+                </a:solidFill>
+                <a:effectLst/>
+                <a:uFillTx/>
+                <a:latin typeface="Times New Roman"/>
+                <a:ea typeface="SimSun"/>
+              </a:rPr>
+              <a:t>&lt;footer&gt;</a:t>
+            </a:r>
+            <a:endParaRPr lang="en-US" sz="1400" b="0" u="none" strike="noStrike">
+              <a:solidFill>
+                <a:srgbClr val="000000"/>
+              </a:solidFill>
+              <a:effectLst/>
+              <a:uFillTx/>
+              <a:latin typeface="Times New Roman"/>
+            </a:endParaRPr>
+          </a:p>
+        </p:txBody>
+      </p:sp>
+      <p:sp>
+        <p:nvSpPr>
+          <p:cNvPr id="27" name="PlaceHolder 4"/>
+          <p:cNvSpPr>
+            <a:spLocks noGrp="1"/>
+          </p:cNvSpPr>
+          <p:nvPr>
+            <p:ph type="sldNum" idx="12"/>
+          </p:nvPr>
+        </p:nvSpPr>
+        <p:spPr>
+          <a:xfrm>
+            <a:off x="8737560" y="6245280"/>
+            <a:ext cx="2829240" cy="460800"/>
+          </a:xfrm>
+          <a:prstGeom prst="rect">
+            <a:avLst/>
+          </a:prstGeom>
+          <a:noFill/>
+          <a:ln w="0">
+            <a:noFill/>
+          </a:ln>
+        </p:spPr>
+        <p:txBody>
+          <a:bodyPr numCol="1" spcCol="0" lIns="91440" rIns="91440" tIns="45720" bIns="45720" anchor="t">
+            <a:noAutofit/>
+          </a:bodyPr>
+          <a:p>
+            <a:pPr indent="0">
+              <a:buNone/>
+            </a:pPr>
+            <a:endParaRPr lang="en-US" sz="1800" b="0" u="none" strike="noStrike">
+              <a:solidFill>
+                <a:srgbClr val="000000"/>
+              </a:solidFill>
+              <a:effectLst/>
+              <a:uFillTx/>
+              <a:latin typeface="Times New Roman"/>
+            </a:endParaRPr>
+          </a:p>
+        </p:txBody>
+      </p:sp>
+    </p:spTree>
+  </p:cSld>
+</p:sldLayout>
+</file>
+
+<file path=ppt/slideLayouts/slideLayout5.xml><?xml version="1.0" encoding="utf-8"?>
+<p:sldLayout xmlns:a="http://schemas.openxmlformats.org/drawingml/2006/main" xmlns:p="http://schemas.openxmlformats.org/presentationml/2006/main" xmlns:r="http://schemas.openxmlformats.org/officeDocument/2006/relationships" xmlns:p14="http://schemas.microsoft.com/office/powerpoint/2010/main" xmlns:p15="http://schemas.microsoft.com/office/powerpoint/2012/main" xmlns:mc="http://schemas.openxmlformats.org/markup-compatibility/2006" type="vertTx" preserve="1">
+  <p:cSld name="Title and Vertical Text">
+    <p:bg>
+      <p:bgPr>
+        <a:solidFill>
+          <a:srgbClr val="ffffff"/>
+        </a:solidFill>
+      </p:bgPr>
+    </p:bg>
+    <p:spTree>
+      <p:nvGrpSpPr>
+        <p:cNvPr id="1" name=""/>
+        <p:cNvGrpSpPr/>
+        <p:nvPr/>
+      </p:nvGrpSpPr>
+      <p:grpSpPr>
+        <a:xfrm>
+          <a:off x="0" y="0"/>
+          <a:ext cx="0" cy="0"/>
+          <a:chOff x="0" y="0"/>
+          <a:chExt cx="0" cy="0"/>
+        </a:xfrm>
+      </p:grpSpPr>
+      <p:pic>
+        <p:nvPicPr>
+          <p:cNvPr id="28" name="Picture 10"/>
+          <p:cNvPicPr/>
+          <p:nvPr/>
+        </p:nvPicPr>
+        <p:blipFill>
+          <a:blip r:embed="rId2"/>
+          <a:stretch/>
+        </p:blipFill>
+        <p:spPr>
+          <a:xfrm>
+            <a:off x="0" y="0"/>
+            <a:ext cx="12176640" cy="6842520"/>
+          </a:xfrm>
+          <a:prstGeom prst="rect">
+            <a:avLst/>
+          </a:prstGeom>
+          <a:noFill/>
+          <a:ln w="9525">
+            <a:noFill/>
+          </a:ln>
+        </p:spPr>
+      </p:pic>
+      <p:sp>
+        <p:nvSpPr>
+          <p:cNvPr id="29" name="PlaceHolder 1"/>
+          <p:cNvSpPr>
+            <a:spLocks noGrp="1"/>
+          </p:cNvSpPr>
+          <p:nvPr>
+            <p:ph type="title"/>
+          </p:nvPr>
+        </p:nvSpPr>
+        <p:spPr>
+          <a:xfrm>
+            <a:off x="609480" y="190440"/>
+            <a:ext cx="10957320" cy="567000"/>
+          </a:xfrm>
+          <a:prstGeom prst="rect">
+            <a:avLst/>
+          </a:prstGeom>
+          <a:noFill/>
+          <a:ln w="9360">
+            <a:noFill/>
+          </a:ln>
+        </p:spPr>
+        <p:txBody>
+          <a:bodyPr lIns="90000" rIns="90000" tIns="45000" bIns="45000" anchor="ctr">
+            <a:noAutofit/>
+          </a:bodyPr>
+          <a:p>
+            <a:pPr indent="0">
+              <a:lnSpc>
+                <a:spcPct val="100000"/>
+              </a:lnSpc>
+              <a:buNone/>
+              <a:tabLst>
+                <a:tab algn="l" pos="0"/>
+              </a:tabLst>
+            </a:pPr>
+            <a:r>
+              <a:rPr lang="en-US" sz="3600" b="0" u="none" strike="noStrike">
+                <a:solidFill>
+                  <a:schemeClr val="dk1"/>
+                </a:solidFill>
+                <a:effectLst/>
+                <a:uFillTx/>
+                <a:latin typeface="Arial"/>
+                <a:ea typeface="SimSun"/>
+              </a:rPr>
+              <a:t>Click to edit Master title style</a:t>
+            </a:r>
+            <a:endParaRPr lang="en-US" sz="3600" b="0" u="none" strike="noStrike">
+              <a:solidFill>
+                <a:srgbClr val="000000"/>
+              </a:solidFill>
+              <a:effectLst/>
+              <a:uFillTx/>
+              <a:latin typeface="Arial"/>
+            </a:endParaRPr>
+          </a:p>
+        </p:txBody>
+      </p:sp>
+      <p:sp>
+        <p:nvSpPr>
+          <p:cNvPr id="30" name="PlaceHolder 2"/>
+          <p:cNvSpPr>
+            <a:spLocks noGrp="1"/>
+          </p:cNvSpPr>
+          <p:nvPr>
+            <p:ph type="body"/>
+          </p:nvPr>
+        </p:nvSpPr>
+        <p:spPr>
+          <a:xfrm>
+            <a:off x="609480" y="1174680"/>
+            <a:ext cx="10957320" cy="4937400"/>
+          </a:xfrm>
+          <a:prstGeom prst="rect">
+            <a:avLst/>
+          </a:prstGeom>
+          <a:noFill/>
+          <a:ln w="9360">
+            <a:noFill/>
+          </a:ln>
+        </p:spPr>
+        <p:txBody>
+          <a:bodyPr lIns="45000" rIns="45000" tIns="90000" bIns="90000" anchor="t" vert="eaVert">
+            <a:noAutofit/>
+          </a:bodyPr>
+          <a:p>
+            <a:pPr marL="343080" indent="-343080">
+              <a:lnSpc>
+                <a:spcPct val="100000"/>
+              </a:lnSpc>
+              <a:spcBef>
+                <a:spcPts val="641"/>
+              </a:spcBef>
+              <a:buClr>
+                <a:srgbClr val="000000"/>
+              </a:buClr>
+              <a:buFont typeface="Symbol" charset="2"/>
+              <a:buChar char=""/>
+            </a:pPr>
+            <a:r>
+              <a:rPr lang="en-US" sz="3200" b="0" u="none" strike="noStrike">
+                <a:solidFill>
+                  <a:schemeClr val="dk1"/>
+                </a:solidFill>
+                <a:effectLst/>
+                <a:uFillTx/>
+                <a:latin typeface="Arial"/>
+                <a:ea typeface="SimSun"/>
+              </a:rPr>
+              <a:t>Click to edit Master text styles</a:t>
+            </a:r>
+            <a:endParaRPr lang="en-US" sz="3200" b="0" u="none" strike="noStrike">
+              <a:solidFill>
+                <a:srgbClr val="000000"/>
+              </a:solidFill>
+              <a:effectLst/>
+              <a:uFillTx/>
+              <a:latin typeface="Arial"/>
+            </a:endParaRPr>
+          </a:p>
+          <a:p>
+            <a:pPr marL="743040" lvl="1" indent="-285840">
+              <a:lnSpc>
+                <a:spcPct val="100000"/>
+              </a:lnSpc>
+              <a:spcBef>
+                <a:spcPts val="561"/>
+              </a:spcBef>
+              <a:buClr>
+                <a:srgbClr val="000000"/>
+              </a:buClr>
+              <a:buFont typeface="Symbol" charset="2"/>
+              <a:buChar char=""/>
+            </a:pPr>
+            <a:r>
+              <a:rPr lang="en-US" sz="2800" b="0" u="none" strike="noStrike">
+                <a:solidFill>
+                  <a:schemeClr val="dk1"/>
+                </a:solidFill>
+                <a:effectLst/>
+                <a:uFillTx/>
+                <a:latin typeface="Arial"/>
+                <a:ea typeface="SimSun"/>
+              </a:rPr>
+              <a:t>Second level</a:t>
+            </a:r>
+            <a:endParaRPr lang="en-US" sz="2800" b="0" u="none" strike="noStrike">
+              <a:solidFill>
+                <a:srgbClr val="000000"/>
+              </a:solidFill>
+              <a:effectLst/>
+              <a:uFillTx/>
+              <a:latin typeface="Arial"/>
+            </a:endParaRPr>
+          </a:p>
+          <a:p>
+            <a:pPr marL="1143000" lvl="2" indent="-228600">
+              <a:lnSpc>
+                <a:spcPct val="100000"/>
+              </a:lnSpc>
+              <a:spcBef>
+                <a:spcPts val="479"/>
+              </a:spcBef>
+              <a:buClr>
+                <a:srgbClr val="000000"/>
+              </a:buClr>
+              <a:buFont typeface="Symbol" charset="2"/>
+              <a:buChar char=""/>
+            </a:pPr>
+            <a:r>
+              <a:rPr lang="en-US" sz="2400" b="0" u="none" strike="noStrike">
+                <a:solidFill>
+                  <a:schemeClr val="dk1"/>
+                </a:solidFill>
+                <a:effectLst/>
+                <a:uFillTx/>
+                <a:latin typeface="Arial"/>
+                <a:ea typeface="SimSun"/>
+              </a:rPr>
+              <a:t>Third level</a:t>
+            </a:r>
+            <a:endParaRPr lang="en-US" sz="2400" b="0" u="none" strike="noStrike">
+              <a:solidFill>
+                <a:srgbClr val="000000"/>
+              </a:solidFill>
+              <a:effectLst/>
+              <a:uFillTx/>
+              <a:latin typeface="Arial"/>
+            </a:endParaRPr>
+          </a:p>
+          <a:p>
+            <a:pPr marL="1600200" lvl="3" indent="-228600">
+              <a:lnSpc>
+                <a:spcPct val="100000"/>
+              </a:lnSpc>
+              <a:spcBef>
+                <a:spcPts val="400"/>
+              </a:spcBef>
+              <a:buClr>
+                <a:srgbClr val="000000"/>
+              </a:buClr>
+              <a:buFont typeface="Symbol" charset="2"/>
+              <a:buChar char=""/>
+            </a:pPr>
+            <a:r>
+              <a:rPr lang="en-US" sz="2000" b="0" u="none" strike="noStrike">
+                <a:solidFill>
+                  <a:schemeClr val="dk1"/>
+                </a:solidFill>
+                <a:effectLst/>
+                <a:uFillTx/>
+                <a:latin typeface="Arial"/>
+                <a:ea typeface="SimSun"/>
+              </a:rPr>
+              <a:t>Fourth level</a:t>
+            </a:r>
+            <a:endParaRPr lang="en-US" sz="2000" b="0" u="none" strike="noStrike">
+              <a:solidFill>
+                <a:srgbClr val="000000"/>
+              </a:solidFill>
+              <a:effectLst/>
+              <a:uFillTx/>
+              <a:latin typeface="Arial"/>
+            </a:endParaRPr>
+          </a:p>
+          <a:p>
+            <a:pPr marL="2057400" lvl="4" indent="-228600">
+              <a:lnSpc>
+                <a:spcPct val="100000"/>
+              </a:lnSpc>
+              <a:spcBef>
+                <a:spcPts val="400"/>
+              </a:spcBef>
+              <a:buClr>
+                <a:srgbClr val="000000"/>
+              </a:buClr>
+              <a:buFont typeface="OpenSymbol"/>
+              <a:buChar char="»"/>
+            </a:pPr>
+            <a:r>
+              <a:rPr lang="en-US" sz="2000" b="0" u="none" strike="noStrike">
+                <a:solidFill>
+                  <a:schemeClr val="dk1"/>
+                </a:solidFill>
+                <a:effectLst/>
+                <a:uFillTx/>
+                <a:latin typeface="Arial"/>
+                <a:ea typeface="SimSun"/>
+              </a:rPr>
+              <a:t>Fifth level</a:t>
+            </a:r>
+            <a:endParaRPr lang="en-US" sz="2000" b="0" u="none" strike="noStrike">
+              <a:solidFill>
+                <a:srgbClr val="000000"/>
+              </a:solidFill>
+              <a:effectLst/>
+              <a:uFillTx/>
+              <a:latin typeface="Arial"/>
+            </a:endParaRPr>
+          </a:p>
+        </p:txBody>
+      </p:sp>
+      <p:sp>
+        <p:nvSpPr>
+          <p:cNvPr id="31" name="PlaceHolder 3"/>
+          <p:cNvSpPr>
+            <a:spLocks noGrp="1"/>
+          </p:cNvSpPr>
+          <p:nvPr>
+            <p:ph type="dt" idx="13"/>
+          </p:nvPr>
+        </p:nvSpPr>
+        <p:spPr>
+          <a:xfrm>
+            <a:off x="609480" y="6245280"/>
+            <a:ext cx="2829240" cy="460800"/>
+          </a:xfrm>
+          <a:prstGeom prst="rect">
+            <a:avLst/>
+          </a:prstGeom>
+          <a:noFill/>
+          <a:ln w="0">
+            <a:noFill/>
+          </a:ln>
+        </p:spPr>
+        <p:txBody>
+          <a:bodyPr numCol="1" spcCol="0" lIns="91440" rIns="91440" tIns="45720" bIns="45720" anchor="t">
+            <a:noAutofit/>
+          </a:bodyPr>
+          <a:lstStyle>
+            <a:lvl1pPr indent="0" defTabSz="914400">
+              <a:lnSpc>
+                <a:spcPct val="100000"/>
+              </a:lnSpc>
+              <a:buNone/>
+              <a:tabLst>
+                <a:tab algn="l" pos="0"/>
+              </a:tabLst>
+              <a:defRPr lang="en-US" sz="1400" b="0" u="none" strike="noStrike">
+                <a:solidFill>
+                  <a:srgbClr val="000000"/>
+                </a:solidFill>
+                <a:effectLst/>
+                <a:uFillTx/>
+                <a:latin typeface="Times New Roman"/>
+                <a:ea typeface="SimSun"/>
+              </a:defRPr>
+            </a:lvl1pPr>
+          </a:lstStyle>
+          <a:p>
+            <a:pPr indent="0" defTabSz="914400">
+              <a:lnSpc>
+                <a:spcPct val="100000"/>
+              </a:lnSpc>
+              <a:buNone/>
+              <a:tabLst>
+                <a:tab algn="l" pos="0"/>
+              </a:tabLst>
+            </a:pPr>
+            <a:r>
+              <a:rPr lang="en-US" sz="1400" b="0" u="none" strike="noStrike">
+                <a:solidFill>
+                  <a:srgbClr val="000000"/>
+                </a:solidFill>
+                <a:effectLst/>
+                <a:uFillTx/>
+                <a:latin typeface="Times New Roman"/>
+                <a:ea typeface="SimSun"/>
+              </a:rPr>
+              <a:t>&lt;date/time&gt;</a:t>
+            </a:r>
+            <a:endParaRPr lang="en-US" sz="1400" b="0" u="none" strike="noStrike">
+              <a:solidFill>
+                <a:srgbClr val="000000"/>
+              </a:solidFill>
+              <a:effectLst/>
+              <a:uFillTx/>
+              <a:latin typeface="Times New Roman"/>
+            </a:endParaRPr>
+          </a:p>
+        </p:txBody>
+      </p:sp>
+      <p:sp>
+        <p:nvSpPr>
+          <p:cNvPr id="32" name="PlaceHolder 4"/>
+          <p:cNvSpPr>
+            <a:spLocks noGrp="1"/>
+          </p:cNvSpPr>
+          <p:nvPr>
+            <p:ph type="ftr" idx="14"/>
+          </p:nvPr>
+        </p:nvSpPr>
+        <p:spPr>
+          <a:xfrm>
+            <a:off x="4165560" y="6245280"/>
+            <a:ext cx="3845160" cy="460800"/>
+          </a:xfrm>
+          <a:prstGeom prst="rect">
+            <a:avLst/>
+          </a:prstGeom>
+          <a:noFill/>
+          <a:ln w="0">
+            <a:noFill/>
+          </a:ln>
+        </p:spPr>
+        <p:txBody>
+          <a:bodyPr numCol="1" spcCol="0" lIns="91440" rIns="91440" tIns="45720" bIns="45720" anchor="t">
+            <a:noAutofit/>
+          </a:bodyPr>
+          <a:lstStyle>
+            <a:lvl1pPr indent="0" algn="ctr" defTabSz="914400">
+              <a:lnSpc>
+                <a:spcPct val="100000"/>
+              </a:lnSpc>
+              <a:buNone/>
+              <a:tabLst>
+                <a:tab algn="l" pos="0"/>
+              </a:tabLst>
+              <a:defRPr lang="en-US" sz="1400" b="0" u="none" strike="noStrike">
+                <a:solidFill>
+                  <a:srgbClr val="000000"/>
+                </a:solidFill>
+                <a:effectLst/>
+                <a:uFillTx/>
+                <a:latin typeface="Times New Roman"/>
+                <a:ea typeface="SimSun"/>
+              </a:defRPr>
+            </a:lvl1pPr>
+          </a:lstStyle>
+          <a:p>
+            <a:pPr indent="0" algn="ctr" defTabSz="914400">
+              <a:lnSpc>
+                <a:spcPct val="100000"/>
+              </a:lnSpc>
+              <a:buNone/>
+              <a:tabLst>
+                <a:tab algn="l" pos="0"/>
+              </a:tabLst>
+            </a:pPr>
+            <a:r>
+              <a:rPr lang="en-US" sz="1400" b="0" u="none" strike="noStrike">
+                <a:solidFill>
+                  <a:srgbClr val="000000"/>
+                </a:solidFill>
+                <a:effectLst/>
+                <a:uFillTx/>
+                <a:latin typeface="Times New Roman"/>
+                <a:ea typeface="SimSun"/>
+              </a:rPr>
+              <a:t>&lt;footer&gt;</a:t>
+            </a:r>
+            <a:endParaRPr lang="en-US" sz="1400" b="0" u="none" strike="noStrike">
+              <a:solidFill>
+                <a:srgbClr val="000000"/>
+              </a:solidFill>
+              <a:effectLst/>
+              <a:uFillTx/>
+              <a:latin typeface="Times New Roman"/>
+            </a:endParaRPr>
+          </a:p>
+        </p:txBody>
+      </p:sp>
+      <p:sp>
+        <p:nvSpPr>
+          <p:cNvPr id="33" name="PlaceHolder 5"/>
+          <p:cNvSpPr>
+            <a:spLocks noGrp="1"/>
+          </p:cNvSpPr>
+          <p:nvPr>
+            <p:ph type="sldNum" idx="15"/>
+          </p:nvPr>
+        </p:nvSpPr>
+        <p:spPr>
+          <a:xfrm>
+            <a:off x="8737560" y="6245280"/>
+            <a:ext cx="2829240" cy="460800"/>
+          </a:xfrm>
+          <a:prstGeom prst="rect">
+            <a:avLst/>
+          </a:prstGeom>
+          <a:noFill/>
+          <a:ln w="0">
+            <a:noFill/>
+          </a:ln>
+        </p:spPr>
+        <p:txBody>
+          <a:bodyPr numCol="1" spcCol="0" lIns="91440" rIns="91440" tIns="45720" bIns="45720" anchor="t">
+            <a:noAutofit/>
+          </a:bodyPr>
+          <a:p>
+            <a:pPr indent="0">
+              <a:buNone/>
+            </a:pPr>
+            <a:endParaRPr lang="en-US" sz="1800" b="0" u="none" strike="noStrike">
+              <a:solidFill>
+                <a:srgbClr val="000000"/>
+              </a:solidFill>
+              <a:effectLst/>
+              <a:uFillTx/>
+              <a:latin typeface="Times New Roman"/>
+            </a:endParaRPr>
+          </a:p>
+        </p:txBody>
+      </p:sp>
+    </p:spTree>
+  </p:cSld>
+</p:sldLayout>
+</file>
+
+<file path=ppt/slideLayouts/slideLayout6.xml><?xml version="1.0" encoding="utf-8"?>
 <p:sldLayout xmlns:a="http://schemas.openxmlformats.org/drawingml/2006/main" xmlns:p="http://schemas.openxmlformats.org/presentationml/2006/main" xmlns:r="http://schemas.openxmlformats.org/officeDocument/2006/relationships" xmlns:p14="http://schemas.microsoft.com/office/powerpoint/2010/main" xmlns:p15="http://schemas.microsoft.com/office/powerpoint/2012/main" xmlns:mc="http://schemas.openxmlformats.org/markup-compatibility/2006" type="obj" preserve="1">
   <p:cSld name="Title and Content">
     <p:bg>
@@ -2154,7 +3777,7 @@
       </p:grpSpPr>
       <p:pic>
         <p:nvPicPr>
-          <p:cNvPr id="14" name="Picture 10"/>
+          <p:cNvPr id="34" name="Picture 10"/>
           <p:cNvPicPr/>
           <p:nvPr/>
         </p:nvPicPr>
@@ -2165,7 +3788,7 @@
         <p:spPr>
           <a:xfrm>
             <a:off x="0" y="0"/>
-            <a:ext cx="12177000" cy="6842880"/>
+            <a:ext cx="12176640" cy="6842520"/>
           </a:xfrm>
           <a:prstGeom prst="rect">
             <a:avLst/>
@@ -2178,7 +3801,7 @@
       </p:pic>
       <p:sp>
         <p:nvSpPr>
-          <p:cNvPr id="15" name="PlaceHolder 1"/>
+          <p:cNvPr id="35" name="PlaceHolder 1"/>
           <p:cNvSpPr>
             <a:spLocks noGrp="1"/>
           </p:cNvSpPr>
@@ -2189,7 +3812,7 @@
         <p:spPr>
           <a:xfrm>
             <a:off x="609480" y="190440"/>
-            <a:ext cx="10957680" cy="567360"/>
+            <a:ext cx="10957320" cy="567000"/>
           </a:xfrm>
           <a:prstGeom prst="rect">
             <a:avLst/>
@@ -2238,7 +3861,7 @@
       </p:sp>
       <p:sp>
         <p:nvSpPr>
-          <p:cNvPr id="16" name="PlaceHolder 2"/>
+          <p:cNvPr id="36" name="PlaceHolder 2"/>
           <p:cNvSpPr>
             <a:spLocks noGrp="1"/>
           </p:cNvSpPr>
@@ -2249,7 +3872,7 @@
         <p:spPr>
           <a:xfrm>
             <a:off x="609480" y="1174680"/>
-            <a:ext cx="10957680" cy="4937760"/>
+            <a:ext cx="10957320" cy="4937400"/>
           </a:xfrm>
           <a:prstGeom prst="rect">
             <a:avLst/>
@@ -2442,18 +4065,18 @@
       </p:sp>
       <p:sp>
         <p:nvSpPr>
-          <p:cNvPr id="17" name="PlaceHolder 3"/>
+          <p:cNvPr id="37" name="PlaceHolder 3"/>
           <p:cNvSpPr>
             <a:spLocks noGrp="1"/>
           </p:cNvSpPr>
           <p:nvPr>
-            <p:ph type="dt" idx="7"/>
+            <p:ph type="dt" idx="16"/>
           </p:nvPr>
         </p:nvSpPr>
         <p:spPr>
           <a:xfrm>
             <a:off x="609480" y="6245280"/>
-            <a:ext cx="2829600" cy="461160"/>
+            <a:ext cx="2829240" cy="460800"/>
           </a:xfrm>
           <a:prstGeom prst="rect">
             <a:avLst/>
@@ -2522,18 +4145,18 @@
       </p:sp>
       <p:sp>
         <p:nvSpPr>
-          <p:cNvPr id="18" name="PlaceHolder 4"/>
+          <p:cNvPr id="38" name="PlaceHolder 4"/>
           <p:cNvSpPr>
             <a:spLocks noGrp="1"/>
           </p:cNvSpPr>
           <p:nvPr>
-            <p:ph type="ftr" idx="8"/>
+            <p:ph type="ftr" idx="17"/>
           </p:nvPr>
         </p:nvSpPr>
         <p:spPr>
           <a:xfrm>
             <a:off x="4165560" y="6245280"/>
-            <a:ext cx="3845520" cy="461160"/>
+            <a:ext cx="3845160" cy="460800"/>
           </a:xfrm>
           <a:prstGeom prst="rect">
             <a:avLst/>
@@ -2602,18 +4225,18 @@
       </p:sp>
       <p:sp>
         <p:nvSpPr>
-          <p:cNvPr id="19" name="PlaceHolder 5"/>
+          <p:cNvPr id="39" name="PlaceHolder 5"/>
           <p:cNvSpPr>
             <a:spLocks noGrp="1"/>
           </p:cNvSpPr>
           <p:nvPr>
-            <p:ph type="sldNum" idx="9"/>
+            <p:ph type="sldNum" idx="18"/>
           </p:nvPr>
         </p:nvSpPr>
         <p:spPr>
           <a:xfrm>
             <a:off x="8737560" y="6245280"/>
-            <a:ext cx="2829600" cy="461160"/>
+            <a:ext cx="2829240" cy="460800"/>
           </a:xfrm>
           <a:prstGeom prst="rect">
             <a:avLst/>
@@ -2647,7 +4270,7 @@
 </p:sldLayout>
 </file>
 
-<file path=ppt/slideLayouts/slideLayout4.xml><?xml version="1.0" encoding="utf-8"?>
+<file path=ppt/slideLayouts/slideLayout7.xml><?xml version="1.0" encoding="utf-8"?>
 <p:sldLayout xmlns:a="http://schemas.openxmlformats.org/drawingml/2006/main" xmlns:p="http://schemas.openxmlformats.org/presentationml/2006/main" xmlns:r="http://schemas.openxmlformats.org/officeDocument/2006/relationships" xmlns:p14="http://schemas.microsoft.com/office/powerpoint/2010/main" xmlns:p15="http://schemas.microsoft.com/office/powerpoint/2012/main" xmlns:mc="http://schemas.openxmlformats.org/markup-compatibility/2006" type="blank" preserve="1">
   <p:cSld name="Section Header">
     <p:bg>
@@ -2673,7 +4296,7 @@
       </p:grpSpPr>
       <p:pic>
         <p:nvPicPr>
-          <p:cNvPr id="20" name="Picture 10"/>
+          <p:cNvPr id="40" name="Picture 10"/>
           <p:cNvPicPr/>
           <p:nvPr/>
         </p:nvPicPr>
@@ -2684,7 +4307,7 @@
         <p:spPr>
           <a:xfrm>
             <a:off x="0" y="0"/>
-            <a:ext cx="12177000" cy="6842880"/>
+            <a:ext cx="12176640" cy="6842520"/>
           </a:xfrm>
           <a:prstGeom prst="rect">
             <a:avLst/>
@@ -2697,7 +4320,7 @@
       </p:pic>
       <p:sp>
         <p:nvSpPr>
-          <p:cNvPr id="21" name="PlaceHolder 1"/>
+          <p:cNvPr id="41" name="PlaceHolder 1"/>
           <p:cNvSpPr>
             <a:spLocks noGrp="1"/>
           </p:cNvSpPr>
@@ -2708,7 +4331,7 @@
         <p:spPr>
           <a:xfrm>
             <a:off x="831960" y="1709640"/>
-            <a:ext cx="10500480" cy="2837520"/>
+            <a:ext cx="10500120" cy="2837160"/>
           </a:xfrm>
           <a:prstGeom prst="rect">
             <a:avLst/>
@@ -2757,7 +4380,7 @@
       </p:sp>
       <p:sp>
         <p:nvSpPr>
-          <p:cNvPr id="22" name="PlaceHolder 2"/>
+          <p:cNvPr id="42" name="PlaceHolder 2"/>
           <p:cNvSpPr>
             <a:spLocks noGrp="1"/>
           </p:cNvSpPr>
@@ -2768,7 +4391,7 @@
         <p:spPr>
           <a:xfrm>
             <a:off x="831960" y="4589640"/>
-            <a:ext cx="10500480" cy="1485000"/>
+            <a:ext cx="10500120" cy="1484640"/>
           </a:xfrm>
           <a:prstGeom prst="rect">
             <a:avLst/>
@@ -2820,18 +4443,18 @@
       </p:sp>
       <p:sp>
         <p:nvSpPr>
-          <p:cNvPr id="23" name="PlaceHolder 3"/>
+          <p:cNvPr id="43" name="PlaceHolder 3"/>
           <p:cNvSpPr>
             <a:spLocks noGrp="1"/>
           </p:cNvSpPr>
           <p:nvPr>
-            <p:ph type="dt" idx="10"/>
+            <p:ph type="dt" idx="19"/>
           </p:nvPr>
         </p:nvSpPr>
         <p:spPr>
           <a:xfrm>
             <a:off x="609480" y="6245280"/>
-            <a:ext cx="2829600" cy="461160"/>
+            <a:ext cx="2829240" cy="460800"/>
           </a:xfrm>
           <a:prstGeom prst="rect">
             <a:avLst/>
@@ -2900,18 +4523,18 @@
       </p:sp>
       <p:sp>
         <p:nvSpPr>
-          <p:cNvPr id="24" name="PlaceHolder 4"/>
+          <p:cNvPr id="44" name="PlaceHolder 4"/>
           <p:cNvSpPr>
             <a:spLocks noGrp="1"/>
           </p:cNvSpPr>
           <p:nvPr>
-            <p:ph type="ftr" idx="11"/>
+            <p:ph type="ftr" idx="20"/>
           </p:nvPr>
         </p:nvSpPr>
         <p:spPr>
           <a:xfrm>
             <a:off x="4165560" y="6245280"/>
-            <a:ext cx="3845520" cy="461160"/>
+            <a:ext cx="3845160" cy="460800"/>
           </a:xfrm>
           <a:prstGeom prst="rect">
             <a:avLst/>
@@ -2980,18 +4603,18 @@
       </p:sp>
       <p:sp>
         <p:nvSpPr>
-          <p:cNvPr id="25" name="PlaceHolder 5"/>
+          <p:cNvPr id="45" name="PlaceHolder 5"/>
           <p:cNvSpPr>
             <a:spLocks noGrp="1"/>
           </p:cNvSpPr>
           <p:nvPr>
-            <p:ph type="sldNum" idx="12"/>
+            <p:ph type="sldNum" idx="21"/>
           </p:nvPr>
         </p:nvSpPr>
         <p:spPr>
           <a:xfrm>
             <a:off x="8737560" y="6245280"/>
-            <a:ext cx="2829600" cy="461160"/>
+            <a:ext cx="2829240" cy="460800"/>
           </a:xfrm>
           <a:prstGeom prst="rect">
             <a:avLst/>
@@ -3025,7 +4648,7 @@
 </p:sldLayout>
 </file>
 
-<file path=ppt/slideLayouts/slideLayout5.xml><?xml version="1.0" encoding="utf-8"?>
+<file path=ppt/slideLayouts/slideLayout8.xml><?xml version="1.0" encoding="utf-8"?>
 <p:sldLayout xmlns:a="http://schemas.openxmlformats.org/drawingml/2006/main" xmlns:p="http://schemas.openxmlformats.org/presentationml/2006/main" xmlns:r="http://schemas.openxmlformats.org/officeDocument/2006/relationships" xmlns:p14="http://schemas.microsoft.com/office/powerpoint/2010/main" xmlns:p15="http://schemas.microsoft.com/office/powerpoint/2012/main" xmlns:mc="http://schemas.openxmlformats.org/markup-compatibility/2006" type="titleOnly" preserve="1">
   <p:cSld name="Title Only">
     <p:bg>
@@ -3051,7 +4674,7 @@
       </p:grpSpPr>
       <p:pic>
         <p:nvPicPr>
-          <p:cNvPr id="26" name="Picture 10"/>
+          <p:cNvPr id="46" name="Picture 10"/>
           <p:cNvPicPr/>
           <p:nvPr/>
         </p:nvPicPr>
@@ -3062,7 +4685,7 @@
         <p:spPr>
           <a:xfrm>
             <a:off x="0" y="0"/>
-            <a:ext cx="12177000" cy="6842880"/>
+            <a:ext cx="12176640" cy="6842520"/>
           </a:xfrm>
           <a:prstGeom prst="rect">
             <a:avLst/>
@@ -3075,7 +4698,7 @@
       </p:pic>
       <p:sp>
         <p:nvSpPr>
-          <p:cNvPr id="27" name="PlaceHolder 1"/>
+          <p:cNvPr id="47" name="PlaceHolder 1"/>
           <p:cNvSpPr>
             <a:spLocks noGrp="1"/>
           </p:cNvSpPr>
@@ -3086,7 +4709,7 @@
         <p:spPr>
           <a:xfrm>
             <a:off x="609480" y="190440"/>
-            <a:ext cx="10957680" cy="567360"/>
+            <a:ext cx="10957320" cy="567000"/>
           </a:xfrm>
           <a:prstGeom prst="rect">
             <a:avLst/>
@@ -3135,18 +4758,18 @@
       </p:sp>
       <p:sp>
         <p:nvSpPr>
-          <p:cNvPr id="28" name="PlaceHolder 2"/>
+          <p:cNvPr id="48" name="PlaceHolder 2"/>
           <p:cNvSpPr>
             <a:spLocks noGrp="1"/>
           </p:cNvSpPr>
           <p:nvPr>
-            <p:ph type="dt" idx="13"/>
+            <p:ph type="dt" idx="22"/>
           </p:nvPr>
         </p:nvSpPr>
         <p:spPr>
           <a:xfrm>
             <a:off x="609480" y="6245280"/>
-            <a:ext cx="2829600" cy="461160"/>
+            <a:ext cx="2829240" cy="460800"/>
           </a:xfrm>
           <a:prstGeom prst="rect">
             <a:avLst/>
@@ -3215,18 +4838,18 @@
       </p:sp>
       <p:sp>
         <p:nvSpPr>
-          <p:cNvPr id="29" name="PlaceHolder 3"/>
+          <p:cNvPr id="49" name="PlaceHolder 3"/>
           <p:cNvSpPr>
             <a:spLocks noGrp="1"/>
           </p:cNvSpPr>
           <p:nvPr>
-            <p:ph type="ftr" idx="14"/>
+            <p:ph type="ftr" idx="23"/>
           </p:nvPr>
         </p:nvSpPr>
         <p:spPr>
           <a:xfrm>
             <a:off x="4165560" y="6245280"/>
-            <a:ext cx="3845520" cy="461160"/>
+            <a:ext cx="3845160" cy="460800"/>
           </a:xfrm>
           <a:prstGeom prst="rect">
             <a:avLst/>
@@ -3295,18 +4918,18 @@
       </p:sp>
       <p:sp>
         <p:nvSpPr>
-          <p:cNvPr id="30" name="PlaceHolder 4"/>
+          <p:cNvPr id="50" name="PlaceHolder 4"/>
           <p:cNvSpPr>
             <a:spLocks noGrp="1"/>
           </p:cNvSpPr>
           <p:nvPr>
-            <p:ph type="sldNum" idx="15"/>
+            <p:ph type="sldNum" idx="24"/>
           </p:nvPr>
         </p:nvSpPr>
         <p:spPr>
           <a:xfrm>
             <a:off x="8737560" y="6245280"/>
-            <a:ext cx="2829600" cy="461160"/>
+            <a:ext cx="2829240" cy="460800"/>
           </a:xfrm>
           <a:prstGeom prst="rect">
             <a:avLst/>
@@ -3340,1836 +4963,9 @@
 </p:sldLayout>
 </file>
 
-<file path=ppt/slideLayouts/slideLayout6.xml><?xml version="1.0" encoding="utf-8"?>
+<file path=ppt/slideLayouts/slideLayout9.xml><?xml version="1.0" encoding="utf-8"?>
 <p:sldLayout xmlns:a="http://schemas.openxmlformats.org/drawingml/2006/main" xmlns:p="http://schemas.openxmlformats.org/presentationml/2006/main" xmlns:r="http://schemas.openxmlformats.org/officeDocument/2006/relationships" xmlns:p14="http://schemas.microsoft.com/office/powerpoint/2010/main" xmlns:p15="http://schemas.microsoft.com/office/powerpoint/2012/main" xmlns:mc="http://schemas.openxmlformats.org/markup-compatibility/2006" type="twoObj" preserve="1">
   <p:cSld name="Two Content">
-    <p:bg>
-      <p:bgPr>
-        <a:solidFill>
-          <a:srgbClr val="ffffff"/>
-        </a:solidFill>
-      </p:bgPr>
-    </p:bg>
-    <p:spTree>
-      <p:nvGrpSpPr>
-        <p:cNvPr id="1" name=""/>
-        <p:cNvGrpSpPr/>
-        <p:nvPr/>
-      </p:nvGrpSpPr>
-      <p:grpSpPr>
-        <a:xfrm>
-          <a:off x="0" y="0"/>
-          <a:ext cx="0" cy="0"/>
-          <a:chOff x="0" y="0"/>
-          <a:chExt cx="0" cy="0"/>
-        </a:xfrm>
-      </p:grpSpPr>
-      <p:pic>
-        <p:nvPicPr>
-          <p:cNvPr id="31" name="Picture 10"/>
-          <p:cNvPicPr/>
-          <p:nvPr/>
-        </p:nvPicPr>
-        <p:blipFill>
-          <a:blip r:embed="rId2"/>
-          <a:stretch/>
-        </p:blipFill>
-        <p:spPr>
-          <a:xfrm>
-            <a:off x="0" y="0"/>
-            <a:ext cx="12177000" cy="6842880"/>
-          </a:xfrm>
-          <a:prstGeom prst="rect">
-            <a:avLst/>
-          </a:prstGeom>
-          <a:noFill/>
-          <a:ln w="9525">
-            <a:noFill/>
-          </a:ln>
-        </p:spPr>
-      </p:pic>
-      <p:sp>
-        <p:nvSpPr>
-          <p:cNvPr id="32" name="PlaceHolder 1"/>
-          <p:cNvSpPr>
-            <a:spLocks noGrp="1"/>
-          </p:cNvSpPr>
-          <p:nvPr>
-            <p:ph type="title"/>
-          </p:nvPr>
-        </p:nvSpPr>
-        <p:spPr>
-          <a:xfrm>
-            <a:off x="609480" y="190440"/>
-            <a:ext cx="10957680" cy="567360"/>
-          </a:xfrm>
-          <a:prstGeom prst="rect">
-            <a:avLst/>
-          </a:prstGeom>
-          <a:noFill/>
-          <a:ln w="9360">
-            <a:noFill/>
-          </a:ln>
-        </p:spPr>
-        <p:txBody>
-          <a:bodyPr lIns="90000" rIns="90000" tIns="45000" bIns="45000" anchor="ctr">
-            <a:noAutofit/>
-          </a:bodyPr>
-          <a:p>
-            <a:pPr indent="0">
-              <a:lnSpc>
-                <a:spcPct val="100000"/>
-              </a:lnSpc>
-              <a:buNone/>
-              <a:tabLst>
-                <a:tab algn="l" pos="0"/>
-              </a:tabLst>
-            </a:pPr>
-            <a:r>
-              <a:rPr lang="en-US" sz="3600" b="0" u="none" strike="noStrike">
-                <a:solidFill>
-                  <a:schemeClr val="dk1"/>
-                </a:solidFill>
-                <a:effectLst/>
-                <a:uFillTx/>
-                <a:latin typeface="Arial"/>
-                <a:ea typeface="SimSun"/>
-              </a:rPr>
-              <a:t>Click to edit Master title style</a:t>
-            </a:r>
-            <a:endParaRPr lang="en-US" sz="3600" b="0" u="none" strike="noStrike">
-              <a:solidFill>
-                <a:srgbClr val="000000"/>
-              </a:solidFill>
-              <a:effectLst/>
-              <a:uFillTx/>
-              <a:latin typeface="Arial"/>
-            </a:endParaRPr>
-          </a:p>
-        </p:txBody>
-      </p:sp>
-      <p:sp>
-        <p:nvSpPr>
-          <p:cNvPr id="33" name="PlaceHolder 2"/>
-          <p:cNvSpPr>
-            <a:spLocks noGrp="1"/>
-          </p:cNvSpPr>
-          <p:nvPr>
-            <p:ph type="body"/>
-          </p:nvPr>
-        </p:nvSpPr>
-        <p:spPr>
-          <a:xfrm>
-            <a:off x="609480" y="1174680"/>
-            <a:ext cx="5369760" cy="4937760"/>
-          </a:xfrm>
-          <a:prstGeom prst="rect">
-            <a:avLst/>
-          </a:prstGeom>
-          <a:noFill/>
-          <a:ln w="9360">
-            <a:noFill/>
-          </a:ln>
-        </p:spPr>
-        <p:txBody>
-          <a:bodyPr lIns="90000" rIns="90000" tIns="45000" bIns="45000" anchor="t">
-            <a:noAutofit/>
-          </a:bodyPr>
-          <a:p>
-            <a:pPr marL="343080" indent="-343080">
-              <a:lnSpc>
-                <a:spcPct val="100000"/>
-              </a:lnSpc>
-              <a:spcBef>
-                <a:spcPts val="641"/>
-              </a:spcBef>
-              <a:buClr>
-                <a:srgbClr val="000000"/>
-              </a:buClr>
-              <a:buFont typeface="Symbol" charset="2"/>
-              <a:buChar char=""/>
-            </a:pPr>
-            <a:r>
-              <a:rPr lang="en-US" sz="3200" b="0" u="none" strike="noStrike">
-                <a:solidFill>
-                  <a:schemeClr val="dk1"/>
-                </a:solidFill>
-                <a:effectLst/>
-                <a:uFillTx/>
-                <a:latin typeface="Arial"/>
-                <a:ea typeface="SimSun"/>
-              </a:rPr>
-              <a:t>Click to edit Master text styles</a:t>
-            </a:r>
-            <a:endParaRPr lang="en-US" sz="3200" b="0" u="none" strike="noStrike">
-              <a:solidFill>
-                <a:srgbClr val="000000"/>
-              </a:solidFill>
-              <a:effectLst/>
-              <a:uFillTx/>
-              <a:latin typeface="Arial"/>
-            </a:endParaRPr>
-          </a:p>
-          <a:p>
-            <a:pPr marL="743040" lvl="1" indent="-285840">
-              <a:lnSpc>
-                <a:spcPct val="100000"/>
-              </a:lnSpc>
-              <a:spcBef>
-                <a:spcPts val="561"/>
-              </a:spcBef>
-              <a:buClr>
-                <a:srgbClr val="000000"/>
-              </a:buClr>
-              <a:buFont typeface="Symbol" charset="2"/>
-              <a:buChar char=""/>
-            </a:pPr>
-            <a:r>
-              <a:rPr lang="en-US" sz="2800" b="0" u="none" strike="noStrike">
-                <a:solidFill>
-                  <a:schemeClr val="dk1"/>
-                </a:solidFill>
-                <a:effectLst/>
-                <a:uFillTx/>
-                <a:latin typeface="Arial"/>
-                <a:ea typeface="SimSun"/>
-              </a:rPr>
-              <a:t>Second level</a:t>
-            </a:r>
-            <a:endParaRPr lang="en-US" sz="2800" b="0" u="none" strike="noStrike">
-              <a:solidFill>
-                <a:srgbClr val="000000"/>
-              </a:solidFill>
-              <a:effectLst/>
-              <a:uFillTx/>
-              <a:latin typeface="Arial"/>
-            </a:endParaRPr>
-          </a:p>
-          <a:p>
-            <a:pPr marL="1143000" lvl="2" indent="-228600">
-              <a:lnSpc>
-                <a:spcPct val="100000"/>
-              </a:lnSpc>
-              <a:spcBef>
-                <a:spcPts val="479"/>
-              </a:spcBef>
-              <a:buClr>
-                <a:srgbClr val="000000"/>
-              </a:buClr>
-              <a:buFont typeface="Symbol" charset="2"/>
-              <a:buChar char=""/>
-            </a:pPr>
-            <a:r>
-              <a:rPr lang="en-US" sz="2400" b="0" u="none" strike="noStrike">
-                <a:solidFill>
-                  <a:schemeClr val="dk1"/>
-                </a:solidFill>
-                <a:effectLst/>
-                <a:uFillTx/>
-                <a:latin typeface="Arial"/>
-                <a:ea typeface="SimSun"/>
-              </a:rPr>
-              <a:t>Third level</a:t>
-            </a:r>
-            <a:endParaRPr lang="en-US" sz="2400" b="0" u="none" strike="noStrike">
-              <a:solidFill>
-                <a:srgbClr val="000000"/>
-              </a:solidFill>
-              <a:effectLst/>
-              <a:uFillTx/>
-              <a:latin typeface="Arial"/>
-            </a:endParaRPr>
-          </a:p>
-          <a:p>
-            <a:pPr marL="1600200" lvl="3" indent="-228600">
-              <a:lnSpc>
-                <a:spcPct val="100000"/>
-              </a:lnSpc>
-              <a:spcBef>
-                <a:spcPts val="400"/>
-              </a:spcBef>
-              <a:buClr>
-                <a:srgbClr val="000000"/>
-              </a:buClr>
-              <a:buFont typeface="Symbol" charset="2"/>
-              <a:buChar char=""/>
-            </a:pPr>
-            <a:r>
-              <a:rPr lang="en-US" sz="2000" b="0" u="none" strike="noStrike">
-                <a:solidFill>
-                  <a:schemeClr val="dk1"/>
-                </a:solidFill>
-                <a:effectLst/>
-                <a:uFillTx/>
-                <a:latin typeface="Arial"/>
-                <a:ea typeface="SimSun"/>
-              </a:rPr>
-              <a:t>Fourth level</a:t>
-            </a:r>
-            <a:endParaRPr lang="en-US" sz="2000" b="0" u="none" strike="noStrike">
-              <a:solidFill>
-                <a:srgbClr val="000000"/>
-              </a:solidFill>
-              <a:effectLst/>
-              <a:uFillTx/>
-              <a:latin typeface="Arial"/>
-            </a:endParaRPr>
-          </a:p>
-          <a:p>
-            <a:pPr marL="2057400" lvl="4" indent="-228600">
-              <a:lnSpc>
-                <a:spcPct val="100000"/>
-              </a:lnSpc>
-              <a:spcBef>
-                <a:spcPts val="400"/>
-              </a:spcBef>
-              <a:buClr>
-                <a:srgbClr val="000000"/>
-              </a:buClr>
-              <a:buFont typeface="OpenSymbol"/>
-              <a:buChar char="»"/>
-            </a:pPr>
-            <a:r>
-              <a:rPr lang="en-US" sz="2000" b="0" u="none" strike="noStrike">
-                <a:solidFill>
-                  <a:schemeClr val="dk1"/>
-                </a:solidFill>
-                <a:effectLst/>
-                <a:uFillTx/>
-                <a:latin typeface="Arial"/>
-                <a:ea typeface="SimSun"/>
-              </a:rPr>
-              <a:t>Fifth level</a:t>
-            </a:r>
-            <a:endParaRPr lang="en-US" sz="2000" b="0" u="none" strike="noStrike">
-              <a:solidFill>
-                <a:srgbClr val="000000"/>
-              </a:solidFill>
-              <a:effectLst/>
-              <a:uFillTx/>
-              <a:latin typeface="Arial"/>
-            </a:endParaRPr>
-          </a:p>
-        </p:txBody>
-      </p:sp>
-      <p:sp>
-        <p:nvSpPr>
-          <p:cNvPr id="34" name="PlaceHolder 3"/>
-          <p:cNvSpPr>
-            <a:spLocks noGrp="1"/>
-          </p:cNvSpPr>
-          <p:nvPr>
-            <p:ph type="body"/>
-          </p:nvPr>
-        </p:nvSpPr>
-        <p:spPr>
-          <a:xfrm>
-            <a:off x="6197760" y="1174680"/>
-            <a:ext cx="5369760" cy="4937760"/>
-          </a:xfrm>
-          <a:prstGeom prst="rect">
-            <a:avLst/>
-          </a:prstGeom>
-          <a:noFill/>
-          <a:ln w="9360">
-            <a:noFill/>
-          </a:ln>
-        </p:spPr>
-        <p:txBody>
-          <a:bodyPr lIns="90000" rIns="90000" tIns="45000" bIns="45000" anchor="t">
-            <a:noAutofit/>
-          </a:bodyPr>
-          <a:p>
-            <a:pPr marL="343080" indent="-343080">
-              <a:lnSpc>
-                <a:spcPct val="100000"/>
-              </a:lnSpc>
-              <a:spcBef>
-                <a:spcPts val="641"/>
-              </a:spcBef>
-              <a:buClr>
-                <a:srgbClr val="000000"/>
-              </a:buClr>
-              <a:buFont typeface="Symbol" charset="2"/>
-              <a:buChar char=""/>
-            </a:pPr>
-            <a:r>
-              <a:rPr lang="en-US" sz="3200" b="0" u="none" strike="noStrike">
-                <a:solidFill>
-                  <a:schemeClr val="dk1"/>
-                </a:solidFill>
-                <a:effectLst/>
-                <a:uFillTx/>
-                <a:latin typeface="Arial"/>
-                <a:ea typeface="SimSun"/>
-              </a:rPr>
-              <a:t>Click to edit Master text styles</a:t>
-            </a:r>
-            <a:endParaRPr lang="en-US" sz="3200" b="0" u="none" strike="noStrike">
-              <a:solidFill>
-                <a:srgbClr val="000000"/>
-              </a:solidFill>
-              <a:effectLst/>
-              <a:uFillTx/>
-              <a:latin typeface="Arial"/>
-            </a:endParaRPr>
-          </a:p>
-          <a:p>
-            <a:pPr marL="743040" lvl="1" indent="-285840">
-              <a:lnSpc>
-                <a:spcPct val="100000"/>
-              </a:lnSpc>
-              <a:spcBef>
-                <a:spcPts val="561"/>
-              </a:spcBef>
-              <a:buClr>
-                <a:srgbClr val="000000"/>
-              </a:buClr>
-              <a:buFont typeface="Symbol" charset="2"/>
-              <a:buChar char=""/>
-            </a:pPr>
-            <a:r>
-              <a:rPr lang="en-US" sz="2800" b="0" u="none" strike="noStrike">
-                <a:solidFill>
-                  <a:schemeClr val="dk1"/>
-                </a:solidFill>
-                <a:effectLst/>
-                <a:uFillTx/>
-                <a:latin typeface="Arial"/>
-                <a:ea typeface="SimSun"/>
-              </a:rPr>
-              <a:t>Second level</a:t>
-            </a:r>
-            <a:endParaRPr lang="en-US" sz="2800" b="0" u="none" strike="noStrike">
-              <a:solidFill>
-                <a:srgbClr val="000000"/>
-              </a:solidFill>
-              <a:effectLst/>
-              <a:uFillTx/>
-              <a:latin typeface="Arial"/>
-            </a:endParaRPr>
-          </a:p>
-          <a:p>
-            <a:pPr marL="1143000" lvl="2" indent="-228600">
-              <a:lnSpc>
-                <a:spcPct val="100000"/>
-              </a:lnSpc>
-              <a:spcBef>
-                <a:spcPts val="479"/>
-              </a:spcBef>
-              <a:buClr>
-                <a:srgbClr val="000000"/>
-              </a:buClr>
-              <a:buFont typeface="Symbol" charset="2"/>
-              <a:buChar char=""/>
-            </a:pPr>
-            <a:r>
-              <a:rPr lang="en-US" sz="2400" b="0" u="none" strike="noStrike">
-                <a:solidFill>
-                  <a:schemeClr val="dk1"/>
-                </a:solidFill>
-                <a:effectLst/>
-                <a:uFillTx/>
-                <a:latin typeface="Arial"/>
-                <a:ea typeface="SimSun"/>
-              </a:rPr>
-              <a:t>Third level</a:t>
-            </a:r>
-            <a:endParaRPr lang="en-US" sz="2400" b="0" u="none" strike="noStrike">
-              <a:solidFill>
-                <a:srgbClr val="000000"/>
-              </a:solidFill>
-              <a:effectLst/>
-              <a:uFillTx/>
-              <a:latin typeface="Arial"/>
-            </a:endParaRPr>
-          </a:p>
-          <a:p>
-            <a:pPr marL="1600200" lvl="3" indent="-228600">
-              <a:lnSpc>
-                <a:spcPct val="100000"/>
-              </a:lnSpc>
-              <a:spcBef>
-                <a:spcPts val="400"/>
-              </a:spcBef>
-              <a:buClr>
-                <a:srgbClr val="000000"/>
-              </a:buClr>
-              <a:buFont typeface="Symbol" charset="2"/>
-              <a:buChar char=""/>
-            </a:pPr>
-            <a:r>
-              <a:rPr lang="en-US" sz="2000" b="0" u="none" strike="noStrike">
-                <a:solidFill>
-                  <a:schemeClr val="dk1"/>
-                </a:solidFill>
-                <a:effectLst/>
-                <a:uFillTx/>
-                <a:latin typeface="Arial"/>
-                <a:ea typeface="SimSun"/>
-              </a:rPr>
-              <a:t>Fourth level</a:t>
-            </a:r>
-            <a:endParaRPr lang="en-US" sz="2000" b="0" u="none" strike="noStrike">
-              <a:solidFill>
-                <a:srgbClr val="000000"/>
-              </a:solidFill>
-              <a:effectLst/>
-              <a:uFillTx/>
-              <a:latin typeface="Arial"/>
-            </a:endParaRPr>
-          </a:p>
-          <a:p>
-            <a:pPr marL="2057400" lvl="4" indent="-228600">
-              <a:lnSpc>
-                <a:spcPct val="100000"/>
-              </a:lnSpc>
-              <a:spcBef>
-                <a:spcPts val="400"/>
-              </a:spcBef>
-              <a:buClr>
-                <a:srgbClr val="000000"/>
-              </a:buClr>
-              <a:buFont typeface="OpenSymbol"/>
-              <a:buChar char="»"/>
-            </a:pPr>
-            <a:r>
-              <a:rPr lang="en-US" sz="2000" b="0" u="none" strike="noStrike">
-                <a:solidFill>
-                  <a:schemeClr val="dk1"/>
-                </a:solidFill>
-                <a:effectLst/>
-                <a:uFillTx/>
-                <a:latin typeface="Arial"/>
-                <a:ea typeface="SimSun"/>
-              </a:rPr>
-              <a:t>Fifth level</a:t>
-            </a:r>
-            <a:endParaRPr lang="en-US" sz="2000" b="0" u="none" strike="noStrike">
-              <a:solidFill>
-                <a:srgbClr val="000000"/>
-              </a:solidFill>
-              <a:effectLst/>
-              <a:uFillTx/>
-              <a:latin typeface="Arial"/>
-            </a:endParaRPr>
-          </a:p>
-        </p:txBody>
-      </p:sp>
-      <p:sp>
-        <p:nvSpPr>
-          <p:cNvPr id="35" name="PlaceHolder 4"/>
-          <p:cNvSpPr>
-            <a:spLocks noGrp="1"/>
-          </p:cNvSpPr>
-          <p:nvPr>
-            <p:ph type="dt" idx="16"/>
-          </p:nvPr>
-        </p:nvSpPr>
-        <p:spPr>
-          <a:xfrm>
-            <a:off x="609480" y="6245280"/>
-            <a:ext cx="2829600" cy="461160"/>
-          </a:xfrm>
-          <a:prstGeom prst="rect">
-            <a:avLst/>
-          </a:prstGeom>
-          <a:noFill/>
-          <a:ln w="0">
-            <a:noFill/>
-          </a:ln>
-        </p:spPr>
-        <p:txBody>
-          <a:bodyPr numCol="1" spcCol="0" lIns="91440" rIns="91440" tIns="45720" bIns="45720" anchor="t">
-            <a:noAutofit/>
-          </a:bodyPr>
-          <a:lstStyle>
-            <a:lvl1pPr indent="0" defTabSz="914400">
-              <a:lnSpc>
-                <a:spcPct val="100000"/>
-              </a:lnSpc>
-              <a:buNone/>
-              <a:tabLst>
-                <a:tab algn="l" pos="0"/>
-              </a:tabLst>
-              <a:defRPr lang="en-US" sz="1400" b="0" u="none" strike="noStrike">
-                <a:solidFill>
-                  <a:srgbClr val="000000"/>
-                </a:solidFill>
-                <a:effectLst/>
-                <a:uFillTx/>
-                <a:latin typeface="Times New Roman"/>
-                <a:ea typeface="SimSun"/>
-              </a:defRPr>
-            </a:lvl1pPr>
-          </a:lstStyle>
-          <a:p>
-            <a:pPr indent="0" defTabSz="914400">
-              <a:lnSpc>
-                <a:spcPct val="100000"/>
-              </a:lnSpc>
-              <a:buNone/>
-              <a:tabLst>
-                <a:tab algn="l" pos="0"/>
-              </a:tabLst>
-            </a:pPr>
-            <a:r>
-              <a:rPr lang="en-US" sz="1400" b="0" u="none" strike="noStrike">
-                <a:solidFill>
-                  <a:srgbClr val="000000"/>
-                </a:solidFill>
-                <a:effectLst/>
-                <a:uFillTx/>
-                <a:latin typeface="Times New Roman"/>
-                <a:ea typeface="SimSun"/>
-              </a:rPr>
-              <a:t>&lt;date/time&gt;</a:t>
-            </a:r>
-            <a:endParaRPr lang="en-US" sz="1400" b="0" u="none" strike="noStrike">
-              <a:solidFill>
-                <a:srgbClr val="000000"/>
-              </a:solidFill>
-              <a:effectLst/>
-              <a:uFillTx/>
-              <a:latin typeface="Times New Roman"/>
-            </a:endParaRPr>
-          </a:p>
-        </p:txBody>
-      </p:sp>
-      <p:sp>
-        <p:nvSpPr>
-          <p:cNvPr id="36" name="PlaceHolder 5"/>
-          <p:cNvSpPr>
-            <a:spLocks noGrp="1"/>
-          </p:cNvSpPr>
-          <p:nvPr>
-            <p:ph type="ftr" idx="17"/>
-          </p:nvPr>
-        </p:nvSpPr>
-        <p:spPr>
-          <a:xfrm>
-            <a:off x="4165560" y="6245280"/>
-            <a:ext cx="3845520" cy="461160"/>
-          </a:xfrm>
-          <a:prstGeom prst="rect">
-            <a:avLst/>
-          </a:prstGeom>
-          <a:noFill/>
-          <a:ln w="0">
-            <a:noFill/>
-          </a:ln>
-        </p:spPr>
-        <p:txBody>
-          <a:bodyPr numCol="1" spcCol="0" lIns="91440" rIns="91440" tIns="45720" bIns="45720" anchor="t">
-            <a:noAutofit/>
-          </a:bodyPr>
-          <a:lstStyle>
-            <a:lvl1pPr indent="0" algn="ctr" defTabSz="914400">
-              <a:lnSpc>
-                <a:spcPct val="100000"/>
-              </a:lnSpc>
-              <a:buNone/>
-              <a:tabLst>
-                <a:tab algn="l" pos="0"/>
-              </a:tabLst>
-              <a:defRPr lang="en-US" sz="1400" b="0" u="none" strike="noStrike">
-                <a:solidFill>
-                  <a:srgbClr val="000000"/>
-                </a:solidFill>
-                <a:effectLst/>
-                <a:uFillTx/>
-                <a:latin typeface="Times New Roman"/>
-                <a:ea typeface="SimSun"/>
-              </a:defRPr>
-            </a:lvl1pPr>
-          </a:lstStyle>
-          <a:p>
-            <a:pPr indent="0" algn="ctr" defTabSz="914400">
-              <a:lnSpc>
-                <a:spcPct val="100000"/>
-              </a:lnSpc>
-              <a:buNone/>
-              <a:tabLst>
-                <a:tab algn="l" pos="0"/>
-              </a:tabLst>
-            </a:pPr>
-            <a:r>
-              <a:rPr lang="en-US" sz="1400" b="0" u="none" strike="noStrike">
-                <a:solidFill>
-                  <a:srgbClr val="000000"/>
-                </a:solidFill>
-                <a:effectLst/>
-                <a:uFillTx/>
-                <a:latin typeface="Times New Roman"/>
-                <a:ea typeface="SimSun"/>
-              </a:rPr>
-              <a:t>&lt;footer&gt;</a:t>
-            </a:r>
-            <a:endParaRPr lang="en-US" sz="1400" b="0" u="none" strike="noStrike">
-              <a:solidFill>
-                <a:srgbClr val="000000"/>
-              </a:solidFill>
-              <a:effectLst/>
-              <a:uFillTx/>
-              <a:latin typeface="Times New Roman"/>
-            </a:endParaRPr>
-          </a:p>
-        </p:txBody>
-      </p:sp>
-      <p:sp>
-        <p:nvSpPr>
-          <p:cNvPr id="37" name="PlaceHolder 6"/>
-          <p:cNvSpPr>
-            <a:spLocks noGrp="1"/>
-          </p:cNvSpPr>
-          <p:nvPr>
-            <p:ph type="sldNum" idx="18"/>
-          </p:nvPr>
-        </p:nvSpPr>
-        <p:spPr>
-          <a:xfrm>
-            <a:off x="8737560" y="6245280"/>
-            <a:ext cx="2829600" cy="461160"/>
-          </a:xfrm>
-          <a:prstGeom prst="rect">
-            <a:avLst/>
-          </a:prstGeom>
-          <a:noFill/>
-          <a:ln w="0">
-            <a:noFill/>
-          </a:ln>
-        </p:spPr>
-        <p:txBody>
-          <a:bodyPr numCol="1" spcCol="0" lIns="91440" rIns="91440" tIns="45720" bIns="45720" anchor="t">
-            <a:noAutofit/>
-          </a:bodyPr>
-          <a:p>
-            <a:pPr indent="0">
-              <a:buNone/>
-            </a:pPr>
-            <a:endParaRPr lang="en-US" sz="1800" b="0" u="none" strike="noStrike">
-              <a:solidFill>
-                <a:srgbClr val="000000"/>
-              </a:solidFill>
-              <a:effectLst/>
-              <a:uFillTx/>
-              <a:latin typeface="Times New Roman"/>
-            </a:endParaRPr>
-          </a:p>
-        </p:txBody>
-      </p:sp>
-    </p:spTree>
-  </p:cSld>
-</p:sldLayout>
-</file>
-
-<file path=ppt/slideLayouts/slideLayout7.xml><?xml version="1.0" encoding="utf-8"?>
-<p:sldLayout xmlns:a="http://schemas.openxmlformats.org/drawingml/2006/main" xmlns:p="http://schemas.openxmlformats.org/presentationml/2006/main" xmlns:r="http://schemas.openxmlformats.org/officeDocument/2006/relationships" xmlns:p14="http://schemas.microsoft.com/office/powerpoint/2010/main" xmlns:p15="http://schemas.microsoft.com/office/powerpoint/2012/main" xmlns:mc="http://schemas.openxmlformats.org/markup-compatibility/2006" type="blank" preserve="1">
-  <p:cSld name="Comparison">
-    <p:bg>
-      <p:bgPr>
-        <a:solidFill>
-          <a:srgbClr val="ffffff"/>
-        </a:solidFill>
-      </p:bgPr>
-    </p:bg>
-    <p:spTree>
-      <p:nvGrpSpPr>
-        <p:cNvPr id="1" name=""/>
-        <p:cNvGrpSpPr/>
-        <p:nvPr/>
-      </p:nvGrpSpPr>
-      <p:grpSpPr>
-        <a:xfrm>
-          <a:off x="0" y="0"/>
-          <a:ext cx="0" cy="0"/>
-          <a:chOff x="0" y="0"/>
-          <a:chExt cx="0" cy="0"/>
-        </a:xfrm>
-      </p:grpSpPr>
-      <p:pic>
-        <p:nvPicPr>
-          <p:cNvPr id="38" name="Picture 10"/>
-          <p:cNvPicPr/>
-          <p:nvPr/>
-        </p:nvPicPr>
-        <p:blipFill>
-          <a:blip r:embed="rId2"/>
-          <a:stretch/>
-        </p:blipFill>
-        <p:spPr>
-          <a:xfrm>
-            <a:off x="0" y="0"/>
-            <a:ext cx="12177000" cy="6842880"/>
-          </a:xfrm>
-          <a:prstGeom prst="rect">
-            <a:avLst/>
-          </a:prstGeom>
-          <a:noFill/>
-          <a:ln w="9525">
-            <a:noFill/>
-          </a:ln>
-        </p:spPr>
-      </p:pic>
-      <p:sp>
-        <p:nvSpPr>
-          <p:cNvPr id="39" name="PlaceHolder 1"/>
-          <p:cNvSpPr>
-            <a:spLocks noGrp="1"/>
-          </p:cNvSpPr>
-          <p:nvPr>
-            <p:ph type="title"/>
-          </p:nvPr>
-        </p:nvSpPr>
-        <p:spPr>
-          <a:xfrm>
-            <a:off x="840240" y="365040"/>
-            <a:ext cx="10500480" cy="1310400"/>
-          </a:xfrm>
-          <a:prstGeom prst="rect">
-            <a:avLst/>
-          </a:prstGeom>
-          <a:noFill/>
-          <a:ln w="9360">
-            <a:noFill/>
-          </a:ln>
-        </p:spPr>
-        <p:txBody>
-          <a:bodyPr lIns="90000" rIns="90000" tIns="45000" bIns="45000" anchor="ctr">
-            <a:noAutofit/>
-          </a:bodyPr>
-          <a:p>
-            <a:pPr indent="0">
-              <a:lnSpc>
-                <a:spcPct val="100000"/>
-              </a:lnSpc>
-              <a:buNone/>
-              <a:tabLst>
-                <a:tab algn="l" pos="0"/>
-              </a:tabLst>
-            </a:pPr>
-            <a:r>
-              <a:rPr lang="en-US" sz="3600" b="0" u="none" strike="noStrike">
-                <a:solidFill>
-                  <a:schemeClr val="dk1"/>
-                </a:solidFill>
-                <a:effectLst/>
-                <a:uFillTx/>
-                <a:latin typeface="Arial"/>
-                <a:ea typeface="SimSun"/>
-              </a:rPr>
-              <a:t>Click to edit Master title style</a:t>
-            </a:r>
-            <a:endParaRPr lang="en-US" sz="3600" b="0" u="none" strike="noStrike">
-              <a:solidFill>
-                <a:srgbClr val="000000"/>
-              </a:solidFill>
-              <a:effectLst/>
-              <a:uFillTx/>
-              <a:latin typeface="Arial"/>
-            </a:endParaRPr>
-          </a:p>
-        </p:txBody>
-      </p:sp>
-      <p:sp>
-        <p:nvSpPr>
-          <p:cNvPr id="40" name="PlaceHolder 2"/>
-          <p:cNvSpPr>
-            <a:spLocks noGrp="1"/>
-          </p:cNvSpPr>
-          <p:nvPr>
-            <p:ph type="body"/>
-          </p:nvPr>
-        </p:nvSpPr>
-        <p:spPr>
-          <a:xfrm>
-            <a:off x="840240" y="1681200"/>
-            <a:ext cx="5143320" cy="808920"/>
-          </a:xfrm>
-          <a:prstGeom prst="rect">
-            <a:avLst/>
-          </a:prstGeom>
-          <a:noFill/>
-          <a:ln w="9360">
-            <a:noFill/>
-          </a:ln>
-        </p:spPr>
-        <p:txBody>
-          <a:bodyPr lIns="90000" rIns="90000" tIns="45000" bIns="45000" anchor="b">
-            <a:noAutofit/>
-          </a:bodyPr>
-          <a:p>
-            <a:pPr indent="0">
-              <a:lnSpc>
-                <a:spcPct val="100000"/>
-              </a:lnSpc>
-              <a:spcBef>
-                <a:spcPts val="479"/>
-              </a:spcBef>
-              <a:buNone/>
-              <a:tabLst>
-                <a:tab algn="l" pos="0"/>
-              </a:tabLst>
-            </a:pPr>
-            <a:r>
-              <a:rPr lang="en-US" sz="2400" b="1" u="none" strike="noStrike">
-                <a:solidFill>
-                  <a:schemeClr val="dk1"/>
-                </a:solidFill>
-                <a:effectLst/>
-                <a:uFillTx/>
-                <a:latin typeface="Arial"/>
-                <a:ea typeface="SimSun"/>
-              </a:rPr>
-              <a:t>Click to edit Master text styles</a:t>
-            </a:r>
-            <a:endParaRPr lang="en-US" sz="2400" b="0" u="none" strike="noStrike">
-              <a:solidFill>
-                <a:srgbClr val="000000"/>
-              </a:solidFill>
-              <a:effectLst/>
-              <a:uFillTx/>
-              <a:latin typeface="Arial"/>
-            </a:endParaRPr>
-          </a:p>
-        </p:txBody>
-      </p:sp>
-      <p:sp>
-        <p:nvSpPr>
-          <p:cNvPr id="41" name="PlaceHolder 3"/>
-          <p:cNvSpPr>
-            <a:spLocks noGrp="1"/>
-          </p:cNvSpPr>
-          <p:nvPr>
-            <p:ph type="body"/>
-          </p:nvPr>
-        </p:nvSpPr>
-        <p:spPr>
-          <a:xfrm>
-            <a:off x="840240" y="2505240"/>
-            <a:ext cx="5143320" cy="3669480"/>
-          </a:xfrm>
-          <a:prstGeom prst="rect">
-            <a:avLst/>
-          </a:prstGeom>
-          <a:noFill/>
-          <a:ln w="9360">
-            <a:noFill/>
-          </a:ln>
-        </p:spPr>
-        <p:txBody>
-          <a:bodyPr lIns="90000" rIns="90000" tIns="45000" bIns="45000" anchor="t">
-            <a:noAutofit/>
-          </a:bodyPr>
-          <a:p>
-            <a:pPr marL="343080" indent="-343080">
-              <a:lnSpc>
-                <a:spcPct val="100000"/>
-              </a:lnSpc>
-              <a:spcBef>
-                <a:spcPts val="641"/>
-              </a:spcBef>
-              <a:buClr>
-                <a:srgbClr val="000000"/>
-              </a:buClr>
-              <a:buFont typeface="Symbol" charset="2"/>
-              <a:buChar char=""/>
-            </a:pPr>
-            <a:r>
-              <a:rPr lang="en-US" sz="3200" b="0" u="none" strike="noStrike">
-                <a:solidFill>
-                  <a:schemeClr val="dk1"/>
-                </a:solidFill>
-                <a:effectLst/>
-                <a:uFillTx/>
-                <a:latin typeface="Arial"/>
-                <a:ea typeface="SimSun"/>
-              </a:rPr>
-              <a:t>Click to edit Master text styles</a:t>
-            </a:r>
-            <a:endParaRPr lang="en-US" sz="3200" b="0" u="none" strike="noStrike">
-              <a:solidFill>
-                <a:srgbClr val="000000"/>
-              </a:solidFill>
-              <a:effectLst/>
-              <a:uFillTx/>
-              <a:latin typeface="Arial"/>
-            </a:endParaRPr>
-          </a:p>
-          <a:p>
-            <a:pPr marL="743040" lvl="1" indent="-285840">
-              <a:lnSpc>
-                <a:spcPct val="100000"/>
-              </a:lnSpc>
-              <a:spcBef>
-                <a:spcPts val="561"/>
-              </a:spcBef>
-              <a:buClr>
-                <a:srgbClr val="000000"/>
-              </a:buClr>
-              <a:buFont typeface="Symbol" charset="2"/>
-              <a:buChar char=""/>
-            </a:pPr>
-            <a:r>
-              <a:rPr lang="en-US" sz="2800" b="0" u="none" strike="noStrike">
-                <a:solidFill>
-                  <a:schemeClr val="dk1"/>
-                </a:solidFill>
-                <a:effectLst/>
-                <a:uFillTx/>
-                <a:latin typeface="Arial"/>
-                <a:ea typeface="SimSun"/>
-              </a:rPr>
-              <a:t>Second level</a:t>
-            </a:r>
-            <a:endParaRPr lang="en-US" sz="2800" b="0" u="none" strike="noStrike">
-              <a:solidFill>
-                <a:srgbClr val="000000"/>
-              </a:solidFill>
-              <a:effectLst/>
-              <a:uFillTx/>
-              <a:latin typeface="Arial"/>
-            </a:endParaRPr>
-          </a:p>
-          <a:p>
-            <a:pPr marL="1143000" lvl="2" indent="-228600">
-              <a:lnSpc>
-                <a:spcPct val="100000"/>
-              </a:lnSpc>
-              <a:spcBef>
-                <a:spcPts val="479"/>
-              </a:spcBef>
-              <a:buClr>
-                <a:srgbClr val="000000"/>
-              </a:buClr>
-              <a:buFont typeface="Symbol" charset="2"/>
-              <a:buChar char=""/>
-            </a:pPr>
-            <a:r>
-              <a:rPr lang="en-US" sz="2400" b="0" u="none" strike="noStrike">
-                <a:solidFill>
-                  <a:schemeClr val="dk1"/>
-                </a:solidFill>
-                <a:effectLst/>
-                <a:uFillTx/>
-                <a:latin typeface="Arial"/>
-                <a:ea typeface="SimSun"/>
-              </a:rPr>
-              <a:t>Third level</a:t>
-            </a:r>
-            <a:endParaRPr lang="en-US" sz="2400" b="0" u="none" strike="noStrike">
-              <a:solidFill>
-                <a:srgbClr val="000000"/>
-              </a:solidFill>
-              <a:effectLst/>
-              <a:uFillTx/>
-              <a:latin typeface="Arial"/>
-            </a:endParaRPr>
-          </a:p>
-          <a:p>
-            <a:pPr marL="1600200" lvl="3" indent="-228600">
-              <a:lnSpc>
-                <a:spcPct val="100000"/>
-              </a:lnSpc>
-              <a:spcBef>
-                <a:spcPts val="400"/>
-              </a:spcBef>
-              <a:buClr>
-                <a:srgbClr val="000000"/>
-              </a:buClr>
-              <a:buFont typeface="Symbol" charset="2"/>
-              <a:buChar char=""/>
-            </a:pPr>
-            <a:r>
-              <a:rPr lang="en-US" sz="2000" b="0" u="none" strike="noStrike">
-                <a:solidFill>
-                  <a:schemeClr val="dk1"/>
-                </a:solidFill>
-                <a:effectLst/>
-                <a:uFillTx/>
-                <a:latin typeface="Arial"/>
-                <a:ea typeface="SimSun"/>
-              </a:rPr>
-              <a:t>Fourth level</a:t>
-            </a:r>
-            <a:endParaRPr lang="en-US" sz="2000" b="0" u="none" strike="noStrike">
-              <a:solidFill>
-                <a:srgbClr val="000000"/>
-              </a:solidFill>
-              <a:effectLst/>
-              <a:uFillTx/>
-              <a:latin typeface="Arial"/>
-            </a:endParaRPr>
-          </a:p>
-          <a:p>
-            <a:pPr marL="2057400" lvl="4" indent="-228600">
-              <a:lnSpc>
-                <a:spcPct val="100000"/>
-              </a:lnSpc>
-              <a:spcBef>
-                <a:spcPts val="400"/>
-              </a:spcBef>
-              <a:buClr>
-                <a:srgbClr val="000000"/>
-              </a:buClr>
-              <a:buFont typeface="OpenSymbol"/>
-              <a:buChar char="»"/>
-            </a:pPr>
-            <a:r>
-              <a:rPr lang="en-US" sz="2000" b="0" u="none" strike="noStrike">
-                <a:solidFill>
-                  <a:schemeClr val="dk1"/>
-                </a:solidFill>
-                <a:effectLst/>
-                <a:uFillTx/>
-                <a:latin typeface="Arial"/>
-                <a:ea typeface="SimSun"/>
-              </a:rPr>
-              <a:t>Fifth level</a:t>
-            </a:r>
-            <a:endParaRPr lang="en-US" sz="2000" b="0" u="none" strike="noStrike">
-              <a:solidFill>
-                <a:srgbClr val="000000"/>
-              </a:solidFill>
-              <a:effectLst/>
-              <a:uFillTx/>
-              <a:latin typeface="Arial"/>
-            </a:endParaRPr>
-          </a:p>
-        </p:txBody>
-      </p:sp>
-      <p:sp>
-        <p:nvSpPr>
-          <p:cNvPr id="42" name="PlaceHolder 4"/>
-          <p:cNvSpPr>
-            <a:spLocks noGrp="1"/>
-          </p:cNvSpPr>
-          <p:nvPr>
-            <p:ph type="body"/>
-          </p:nvPr>
-        </p:nvSpPr>
-        <p:spPr>
-          <a:xfrm>
-            <a:off x="6172200" y="1681200"/>
-            <a:ext cx="5168520" cy="808920"/>
-          </a:xfrm>
-          <a:prstGeom prst="rect">
-            <a:avLst/>
-          </a:prstGeom>
-          <a:noFill/>
-          <a:ln w="9360">
-            <a:noFill/>
-          </a:ln>
-        </p:spPr>
-        <p:txBody>
-          <a:bodyPr lIns="90000" rIns="90000" tIns="45000" bIns="45000" anchor="b">
-            <a:noAutofit/>
-          </a:bodyPr>
-          <a:p>
-            <a:pPr indent="0">
-              <a:lnSpc>
-                <a:spcPct val="100000"/>
-              </a:lnSpc>
-              <a:spcBef>
-                <a:spcPts val="479"/>
-              </a:spcBef>
-              <a:buNone/>
-              <a:tabLst>
-                <a:tab algn="l" pos="0"/>
-              </a:tabLst>
-            </a:pPr>
-            <a:r>
-              <a:rPr lang="en-US" sz="2400" b="1" u="none" strike="noStrike">
-                <a:solidFill>
-                  <a:schemeClr val="dk1"/>
-                </a:solidFill>
-                <a:effectLst/>
-                <a:uFillTx/>
-                <a:latin typeface="Arial"/>
-                <a:ea typeface="SimSun"/>
-              </a:rPr>
-              <a:t>Click to edit Master text styles</a:t>
-            </a:r>
-            <a:endParaRPr lang="en-US" sz="2400" b="0" u="none" strike="noStrike">
-              <a:solidFill>
-                <a:srgbClr val="000000"/>
-              </a:solidFill>
-              <a:effectLst/>
-              <a:uFillTx/>
-              <a:latin typeface="Arial"/>
-            </a:endParaRPr>
-          </a:p>
-        </p:txBody>
-      </p:sp>
-      <p:sp>
-        <p:nvSpPr>
-          <p:cNvPr id="43" name="PlaceHolder 5"/>
-          <p:cNvSpPr>
-            <a:spLocks noGrp="1"/>
-          </p:cNvSpPr>
-          <p:nvPr>
-            <p:ph type="body"/>
-          </p:nvPr>
-        </p:nvSpPr>
-        <p:spPr>
-          <a:xfrm>
-            <a:off x="6172200" y="2505240"/>
-            <a:ext cx="5168520" cy="3669480"/>
-          </a:xfrm>
-          <a:prstGeom prst="rect">
-            <a:avLst/>
-          </a:prstGeom>
-          <a:noFill/>
-          <a:ln w="9360">
-            <a:noFill/>
-          </a:ln>
-        </p:spPr>
-        <p:txBody>
-          <a:bodyPr lIns="90000" rIns="90000" tIns="45000" bIns="45000" anchor="t">
-            <a:noAutofit/>
-          </a:bodyPr>
-          <a:p>
-            <a:pPr marL="343080" indent="-343080">
-              <a:lnSpc>
-                <a:spcPct val="100000"/>
-              </a:lnSpc>
-              <a:spcBef>
-                <a:spcPts val="641"/>
-              </a:spcBef>
-              <a:buClr>
-                <a:srgbClr val="000000"/>
-              </a:buClr>
-              <a:buFont typeface="Symbol" charset="2"/>
-              <a:buChar char=""/>
-            </a:pPr>
-            <a:r>
-              <a:rPr lang="en-US" sz="3200" b="0" u="none" strike="noStrike">
-                <a:solidFill>
-                  <a:schemeClr val="dk1"/>
-                </a:solidFill>
-                <a:effectLst/>
-                <a:uFillTx/>
-                <a:latin typeface="Arial"/>
-                <a:ea typeface="SimSun"/>
-              </a:rPr>
-              <a:t>Click to edit Master text styles</a:t>
-            </a:r>
-            <a:endParaRPr lang="en-US" sz="3200" b="0" u="none" strike="noStrike">
-              <a:solidFill>
-                <a:srgbClr val="000000"/>
-              </a:solidFill>
-              <a:effectLst/>
-              <a:uFillTx/>
-              <a:latin typeface="Arial"/>
-            </a:endParaRPr>
-          </a:p>
-          <a:p>
-            <a:pPr marL="743040" lvl="1" indent="-285840">
-              <a:lnSpc>
-                <a:spcPct val="100000"/>
-              </a:lnSpc>
-              <a:spcBef>
-                <a:spcPts val="561"/>
-              </a:spcBef>
-              <a:buClr>
-                <a:srgbClr val="000000"/>
-              </a:buClr>
-              <a:buFont typeface="Symbol" charset="2"/>
-              <a:buChar char=""/>
-            </a:pPr>
-            <a:r>
-              <a:rPr lang="en-US" sz="2800" b="0" u="none" strike="noStrike">
-                <a:solidFill>
-                  <a:schemeClr val="dk1"/>
-                </a:solidFill>
-                <a:effectLst/>
-                <a:uFillTx/>
-                <a:latin typeface="Arial"/>
-                <a:ea typeface="SimSun"/>
-              </a:rPr>
-              <a:t>Second level</a:t>
-            </a:r>
-            <a:endParaRPr lang="en-US" sz="2800" b="0" u="none" strike="noStrike">
-              <a:solidFill>
-                <a:srgbClr val="000000"/>
-              </a:solidFill>
-              <a:effectLst/>
-              <a:uFillTx/>
-              <a:latin typeface="Arial"/>
-            </a:endParaRPr>
-          </a:p>
-          <a:p>
-            <a:pPr marL="1143000" lvl="2" indent="-228600">
-              <a:lnSpc>
-                <a:spcPct val="100000"/>
-              </a:lnSpc>
-              <a:spcBef>
-                <a:spcPts val="479"/>
-              </a:spcBef>
-              <a:buClr>
-                <a:srgbClr val="000000"/>
-              </a:buClr>
-              <a:buFont typeface="Symbol" charset="2"/>
-              <a:buChar char=""/>
-            </a:pPr>
-            <a:r>
-              <a:rPr lang="en-US" sz="2400" b="0" u="none" strike="noStrike">
-                <a:solidFill>
-                  <a:schemeClr val="dk1"/>
-                </a:solidFill>
-                <a:effectLst/>
-                <a:uFillTx/>
-                <a:latin typeface="Arial"/>
-                <a:ea typeface="SimSun"/>
-              </a:rPr>
-              <a:t>Third level</a:t>
-            </a:r>
-            <a:endParaRPr lang="en-US" sz="2400" b="0" u="none" strike="noStrike">
-              <a:solidFill>
-                <a:srgbClr val="000000"/>
-              </a:solidFill>
-              <a:effectLst/>
-              <a:uFillTx/>
-              <a:latin typeface="Arial"/>
-            </a:endParaRPr>
-          </a:p>
-          <a:p>
-            <a:pPr marL="1600200" lvl="3" indent="-228600">
-              <a:lnSpc>
-                <a:spcPct val="100000"/>
-              </a:lnSpc>
-              <a:spcBef>
-                <a:spcPts val="400"/>
-              </a:spcBef>
-              <a:buClr>
-                <a:srgbClr val="000000"/>
-              </a:buClr>
-              <a:buFont typeface="Symbol" charset="2"/>
-              <a:buChar char=""/>
-            </a:pPr>
-            <a:r>
-              <a:rPr lang="en-US" sz="2000" b="0" u="none" strike="noStrike">
-                <a:solidFill>
-                  <a:schemeClr val="dk1"/>
-                </a:solidFill>
-                <a:effectLst/>
-                <a:uFillTx/>
-                <a:latin typeface="Arial"/>
-                <a:ea typeface="SimSun"/>
-              </a:rPr>
-              <a:t>Fourth level</a:t>
-            </a:r>
-            <a:endParaRPr lang="en-US" sz="2000" b="0" u="none" strike="noStrike">
-              <a:solidFill>
-                <a:srgbClr val="000000"/>
-              </a:solidFill>
-              <a:effectLst/>
-              <a:uFillTx/>
-              <a:latin typeface="Arial"/>
-            </a:endParaRPr>
-          </a:p>
-          <a:p>
-            <a:pPr marL="2057400" lvl="4" indent="-228600">
-              <a:lnSpc>
-                <a:spcPct val="100000"/>
-              </a:lnSpc>
-              <a:spcBef>
-                <a:spcPts val="400"/>
-              </a:spcBef>
-              <a:buClr>
-                <a:srgbClr val="000000"/>
-              </a:buClr>
-              <a:buFont typeface="OpenSymbol"/>
-              <a:buChar char="»"/>
-            </a:pPr>
-            <a:r>
-              <a:rPr lang="en-US" sz="2000" b="0" u="none" strike="noStrike">
-                <a:solidFill>
-                  <a:schemeClr val="dk1"/>
-                </a:solidFill>
-                <a:effectLst/>
-                <a:uFillTx/>
-                <a:latin typeface="Arial"/>
-                <a:ea typeface="SimSun"/>
-              </a:rPr>
-              <a:t>Fifth level</a:t>
-            </a:r>
-            <a:endParaRPr lang="en-US" sz="2000" b="0" u="none" strike="noStrike">
-              <a:solidFill>
-                <a:srgbClr val="000000"/>
-              </a:solidFill>
-              <a:effectLst/>
-              <a:uFillTx/>
-              <a:latin typeface="Arial"/>
-            </a:endParaRPr>
-          </a:p>
-        </p:txBody>
-      </p:sp>
-      <p:sp>
-        <p:nvSpPr>
-          <p:cNvPr id="44" name="PlaceHolder 6"/>
-          <p:cNvSpPr>
-            <a:spLocks noGrp="1"/>
-          </p:cNvSpPr>
-          <p:nvPr>
-            <p:ph type="dt" idx="19"/>
-          </p:nvPr>
-        </p:nvSpPr>
-        <p:spPr>
-          <a:xfrm>
-            <a:off x="609480" y="6245280"/>
-            <a:ext cx="2829600" cy="461160"/>
-          </a:xfrm>
-          <a:prstGeom prst="rect">
-            <a:avLst/>
-          </a:prstGeom>
-          <a:noFill/>
-          <a:ln w="0">
-            <a:noFill/>
-          </a:ln>
-        </p:spPr>
-        <p:txBody>
-          <a:bodyPr numCol="1" spcCol="0" lIns="91440" rIns="91440" tIns="45720" bIns="45720" anchor="t">
-            <a:noAutofit/>
-          </a:bodyPr>
-          <a:lstStyle>
-            <a:lvl1pPr indent="0" defTabSz="914400">
-              <a:lnSpc>
-                <a:spcPct val="100000"/>
-              </a:lnSpc>
-              <a:buNone/>
-              <a:tabLst>
-                <a:tab algn="l" pos="0"/>
-              </a:tabLst>
-              <a:defRPr lang="en-US" sz="1400" b="0" u="none" strike="noStrike">
-                <a:solidFill>
-                  <a:srgbClr val="000000"/>
-                </a:solidFill>
-                <a:effectLst/>
-                <a:uFillTx/>
-                <a:latin typeface="Times New Roman"/>
-                <a:ea typeface="SimSun"/>
-              </a:defRPr>
-            </a:lvl1pPr>
-          </a:lstStyle>
-          <a:p>
-            <a:pPr indent="0" defTabSz="914400">
-              <a:lnSpc>
-                <a:spcPct val="100000"/>
-              </a:lnSpc>
-              <a:buNone/>
-              <a:tabLst>
-                <a:tab algn="l" pos="0"/>
-              </a:tabLst>
-            </a:pPr>
-            <a:r>
-              <a:rPr lang="en-US" sz="1400" b="0" u="none" strike="noStrike">
-                <a:solidFill>
-                  <a:srgbClr val="000000"/>
-                </a:solidFill>
-                <a:effectLst/>
-                <a:uFillTx/>
-                <a:latin typeface="Times New Roman"/>
-                <a:ea typeface="SimSun"/>
-              </a:rPr>
-              <a:t>&lt;date/time&gt;</a:t>
-            </a:r>
-            <a:endParaRPr lang="en-US" sz="1400" b="0" u="none" strike="noStrike">
-              <a:solidFill>
-                <a:srgbClr val="000000"/>
-              </a:solidFill>
-              <a:effectLst/>
-              <a:uFillTx/>
-              <a:latin typeface="Times New Roman"/>
-            </a:endParaRPr>
-          </a:p>
-        </p:txBody>
-      </p:sp>
-      <p:sp>
-        <p:nvSpPr>
-          <p:cNvPr id="45" name="PlaceHolder 7"/>
-          <p:cNvSpPr>
-            <a:spLocks noGrp="1"/>
-          </p:cNvSpPr>
-          <p:nvPr>
-            <p:ph type="ftr" idx="20"/>
-          </p:nvPr>
-        </p:nvSpPr>
-        <p:spPr>
-          <a:xfrm>
-            <a:off x="4165560" y="6245280"/>
-            <a:ext cx="3845520" cy="461160"/>
-          </a:xfrm>
-          <a:prstGeom prst="rect">
-            <a:avLst/>
-          </a:prstGeom>
-          <a:noFill/>
-          <a:ln w="0">
-            <a:noFill/>
-          </a:ln>
-        </p:spPr>
-        <p:txBody>
-          <a:bodyPr numCol="1" spcCol="0" lIns="91440" rIns="91440" tIns="45720" bIns="45720" anchor="t">
-            <a:noAutofit/>
-          </a:bodyPr>
-          <a:lstStyle>
-            <a:lvl1pPr indent="0" algn="ctr" defTabSz="914400">
-              <a:lnSpc>
-                <a:spcPct val="100000"/>
-              </a:lnSpc>
-              <a:buNone/>
-              <a:tabLst>
-                <a:tab algn="l" pos="0"/>
-              </a:tabLst>
-              <a:defRPr lang="en-US" sz="1400" b="0" u="none" strike="noStrike">
-                <a:solidFill>
-                  <a:srgbClr val="000000"/>
-                </a:solidFill>
-                <a:effectLst/>
-                <a:uFillTx/>
-                <a:latin typeface="Times New Roman"/>
-                <a:ea typeface="SimSun"/>
-              </a:defRPr>
-            </a:lvl1pPr>
-          </a:lstStyle>
-          <a:p>
-            <a:pPr indent="0" algn="ctr" defTabSz="914400">
-              <a:lnSpc>
-                <a:spcPct val="100000"/>
-              </a:lnSpc>
-              <a:buNone/>
-              <a:tabLst>
-                <a:tab algn="l" pos="0"/>
-              </a:tabLst>
-            </a:pPr>
-            <a:r>
-              <a:rPr lang="en-US" sz="1400" b="0" u="none" strike="noStrike">
-                <a:solidFill>
-                  <a:srgbClr val="000000"/>
-                </a:solidFill>
-                <a:effectLst/>
-                <a:uFillTx/>
-                <a:latin typeface="Times New Roman"/>
-                <a:ea typeface="SimSun"/>
-              </a:rPr>
-              <a:t>&lt;footer&gt;</a:t>
-            </a:r>
-            <a:endParaRPr lang="en-US" sz="1400" b="0" u="none" strike="noStrike">
-              <a:solidFill>
-                <a:srgbClr val="000000"/>
-              </a:solidFill>
-              <a:effectLst/>
-              <a:uFillTx/>
-              <a:latin typeface="Times New Roman"/>
-            </a:endParaRPr>
-          </a:p>
-        </p:txBody>
-      </p:sp>
-      <p:sp>
-        <p:nvSpPr>
-          <p:cNvPr id="46" name="PlaceHolder 8"/>
-          <p:cNvSpPr>
-            <a:spLocks noGrp="1"/>
-          </p:cNvSpPr>
-          <p:nvPr>
-            <p:ph type="sldNum" idx="21"/>
-          </p:nvPr>
-        </p:nvSpPr>
-        <p:spPr>
-          <a:xfrm>
-            <a:off x="8737560" y="6245280"/>
-            <a:ext cx="2829600" cy="461160"/>
-          </a:xfrm>
-          <a:prstGeom prst="rect">
-            <a:avLst/>
-          </a:prstGeom>
-          <a:noFill/>
-          <a:ln w="0">
-            <a:noFill/>
-          </a:ln>
-        </p:spPr>
-        <p:txBody>
-          <a:bodyPr numCol="1" spcCol="0" lIns="91440" rIns="91440" tIns="45720" bIns="45720" anchor="t">
-            <a:noAutofit/>
-          </a:bodyPr>
-          <a:p>
-            <a:pPr indent="0">
-              <a:buNone/>
-            </a:pPr>
-            <a:endParaRPr lang="en-US" sz="1800" b="0" u="none" strike="noStrike">
-              <a:solidFill>
-                <a:srgbClr val="000000"/>
-              </a:solidFill>
-              <a:effectLst/>
-              <a:uFillTx/>
-              <a:latin typeface="Times New Roman"/>
-            </a:endParaRPr>
-          </a:p>
-        </p:txBody>
-      </p:sp>
-    </p:spTree>
-  </p:cSld>
-</p:sldLayout>
-</file>
-
-<file path=ppt/slideLayouts/slideLayout8.xml><?xml version="1.0" encoding="utf-8"?>
-<p:sldLayout xmlns:a="http://schemas.openxmlformats.org/drawingml/2006/main" xmlns:p="http://schemas.openxmlformats.org/presentationml/2006/main" xmlns:r="http://schemas.openxmlformats.org/officeDocument/2006/relationships" xmlns:p14="http://schemas.microsoft.com/office/powerpoint/2010/main" xmlns:p15="http://schemas.microsoft.com/office/powerpoint/2012/main" xmlns:mc="http://schemas.openxmlformats.org/markup-compatibility/2006" type="blank" preserve="1">
-  <p:cSld name="Blank">
-    <p:bg>
-      <p:bgPr>
-        <a:solidFill>
-          <a:srgbClr val="ffffff"/>
-        </a:solidFill>
-      </p:bgPr>
-    </p:bg>
-    <p:spTree>
-      <p:nvGrpSpPr>
-        <p:cNvPr id="1" name=""/>
-        <p:cNvGrpSpPr/>
-        <p:nvPr/>
-      </p:nvGrpSpPr>
-      <p:grpSpPr>
-        <a:xfrm>
-          <a:off x="0" y="0"/>
-          <a:ext cx="0" cy="0"/>
-          <a:chOff x="0" y="0"/>
-          <a:chExt cx="0" cy="0"/>
-        </a:xfrm>
-      </p:grpSpPr>
-      <p:pic>
-        <p:nvPicPr>
-          <p:cNvPr id="47" name="Picture 10"/>
-          <p:cNvPicPr/>
-          <p:nvPr/>
-        </p:nvPicPr>
-        <p:blipFill>
-          <a:blip r:embed="rId2"/>
-          <a:stretch/>
-        </p:blipFill>
-        <p:spPr>
-          <a:xfrm>
-            <a:off x="0" y="0"/>
-            <a:ext cx="12177000" cy="6842880"/>
-          </a:xfrm>
-          <a:prstGeom prst="rect">
-            <a:avLst/>
-          </a:prstGeom>
-          <a:noFill/>
-          <a:ln w="9525">
-            <a:noFill/>
-          </a:ln>
-        </p:spPr>
-      </p:pic>
-      <p:sp>
-        <p:nvSpPr>
-          <p:cNvPr id="48" name="PlaceHolder 1"/>
-          <p:cNvSpPr>
-            <a:spLocks noGrp="1"/>
-          </p:cNvSpPr>
-          <p:nvPr>
-            <p:ph type="dt" idx="22"/>
-          </p:nvPr>
-        </p:nvSpPr>
-        <p:spPr>
-          <a:xfrm>
-            <a:off x="609480" y="6245280"/>
-            <a:ext cx="2829600" cy="461160"/>
-          </a:xfrm>
-          <a:prstGeom prst="rect">
-            <a:avLst/>
-          </a:prstGeom>
-          <a:noFill/>
-          <a:ln w="0">
-            <a:noFill/>
-          </a:ln>
-        </p:spPr>
-        <p:txBody>
-          <a:bodyPr numCol="1" spcCol="0" lIns="91440" rIns="91440" tIns="45720" bIns="45720" anchor="t">
-            <a:noAutofit/>
-          </a:bodyPr>
-          <a:lstStyle>
-            <a:lvl1pPr indent="0" defTabSz="914400">
-              <a:lnSpc>
-                <a:spcPct val="100000"/>
-              </a:lnSpc>
-              <a:buNone/>
-              <a:tabLst>
-                <a:tab algn="l" pos="0"/>
-              </a:tabLst>
-              <a:defRPr lang="en-US" sz="1400" b="0" u="none" strike="noStrike">
-                <a:solidFill>
-                  <a:srgbClr val="000000"/>
-                </a:solidFill>
-                <a:effectLst/>
-                <a:uFillTx/>
-                <a:latin typeface="Times New Roman"/>
-                <a:ea typeface="SimSun"/>
-              </a:defRPr>
-            </a:lvl1pPr>
-          </a:lstStyle>
-          <a:p>
-            <a:pPr indent="0" defTabSz="914400">
-              <a:lnSpc>
-                <a:spcPct val="100000"/>
-              </a:lnSpc>
-              <a:buNone/>
-              <a:tabLst>
-                <a:tab algn="l" pos="0"/>
-              </a:tabLst>
-            </a:pPr>
-            <a:r>
-              <a:rPr lang="en-US" sz="1400" b="0" u="none" strike="noStrike">
-                <a:solidFill>
-                  <a:srgbClr val="000000"/>
-                </a:solidFill>
-                <a:effectLst/>
-                <a:uFillTx/>
-                <a:latin typeface="Times New Roman"/>
-                <a:ea typeface="SimSun"/>
-              </a:rPr>
-              <a:t>&lt;date/time&gt;</a:t>
-            </a:r>
-            <a:endParaRPr lang="en-US" sz="1400" b="0" u="none" strike="noStrike">
-              <a:solidFill>
-                <a:srgbClr val="000000"/>
-              </a:solidFill>
-              <a:effectLst/>
-              <a:uFillTx/>
-              <a:latin typeface="Times New Roman"/>
-            </a:endParaRPr>
-          </a:p>
-        </p:txBody>
-      </p:sp>
-      <p:sp>
-        <p:nvSpPr>
-          <p:cNvPr id="49" name="PlaceHolder 2"/>
-          <p:cNvSpPr>
-            <a:spLocks noGrp="1"/>
-          </p:cNvSpPr>
-          <p:nvPr>
-            <p:ph type="ftr" idx="23"/>
-          </p:nvPr>
-        </p:nvSpPr>
-        <p:spPr>
-          <a:xfrm>
-            <a:off x="4165560" y="6245280"/>
-            <a:ext cx="3845520" cy="461160"/>
-          </a:xfrm>
-          <a:prstGeom prst="rect">
-            <a:avLst/>
-          </a:prstGeom>
-          <a:noFill/>
-          <a:ln w="0">
-            <a:noFill/>
-          </a:ln>
-        </p:spPr>
-        <p:txBody>
-          <a:bodyPr numCol="1" spcCol="0" lIns="91440" rIns="91440" tIns="45720" bIns="45720" anchor="t">
-            <a:noAutofit/>
-          </a:bodyPr>
-          <a:lstStyle>
-            <a:lvl1pPr indent="0" algn="ctr" defTabSz="914400">
-              <a:lnSpc>
-                <a:spcPct val="100000"/>
-              </a:lnSpc>
-              <a:buNone/>
-              <a:tabLst>
-                <a:tab algn="l" pos="0"/>
-              </a:tabLst>
-              <a:defRPr lang="en-US" sz="1400" b="0" u="none" strike="noStrike">
-                <a:solidFill>
-                  <a:srgbClr val="000000"/>
-                </a:solidFill>
-                <a:effectLst/>
-                <a:uFillTx/>
-                <a:latin typeface="Times New Roman"/>
-                <a:ea typeface="SimSun"/>
-              </a:defRPr>
-            </a:lvl1pPr>
-          </a:lstStyle>
-          <a:p>
-            <a:pPr indent="0" algn="ctr" defTabSz="914400">
-              <a:lnSpc>
-                <a:spcPct val="100000"/>
-              </a:lnSpc>
-              <a:buNone/>
-              <a:tabLst>
-                <a:tab algn="l" pos="0"/>
-              </a:tabLst>
-            </a:pPr>
-            <a:r>
-              <a:rPr lang="en-US" sz="1400" b="0" u="none" strike="noStrike">
-                <a:solidFill>
-                  <a:srgbClr val="000000"/>
-                </a:solidFill>
-                <a:effectLst/>
-                <a:uFillTx/>
-                <a:latin typeface="Times New Roman"/>
-                <a:ea typeface="SimSun"/>
-              </a:rPr>
-              <a:t>&lt;footer&gt;</a:t>
-            </a:r>
-            <a:endParaRPr lang="en-US" sz="1400" b="0" u="none" strike="noStrike">
-              <a:solidFill>
-                <a:srgbClr val="000000"/>
-              </a:solidFill>
-              <a:effectLst/>
-              <a:uFillTx/>
-              <a:latin typeface="Times New Roman"/>
-            </a:endParaRPr>
-          </a:p>
-        </p:txBody>
-      </p:sp>
-      <p:sp>
-        <p:nvSpPr>
-          <p:cNvPr id="50" name="PlaceHolder 3"/>
-          <p:cNvSpPr>
-            <a:spLocks noGrp="1"/>
-          </p:cNvSpPr>
-          <p:nvPr>
-            <p:ph type="sldNum" idx="24"/>
-          </p:nvPr>
-        </p:nvSpPr>
-        <p:spPr>
-          <a:xfrm>
-            <a:off x="8737560" y="6245280"/>
-            <a:ext cx="2829600" cy="461160"/>
-          </a:xfrm>
-          <a:prstGeom prst="rect">
-            <a:avLst/>
-          </a:prstGeom>
-          <a:noFill/>
-          <a:ln w="0">
-            <a:noFill/>
-          </a:ln>
-        </p:spPr>
-        <p:txBody>
-          <a:bodyPr numCol="1" spcCol="0" lIns="91440" rIns="91440" tIns="45720" bIns="45720" anchor="t">
-            <a:noAutofit/>
-          </a:bodyPr>
-          <a:p>
-            <a:pPr indent="0">
-              <a:buNone/>
-            </a:pPr>
-            <a:endParaRPr lang="en-US" sz="1800" b="0" u="none" strike="noStrike">
-              <a:solidFill>
-                <a:srgbClr val="000000"/>
-              </a:solidFill>
-              <a:effectLst/>
-              <a:uFillTx/>
-              <a:latin typeface="Times New Roman"/>
-            </a:endParaRPr>
-          </a:p>
-        </p:txBody>
-      </p:sp>
-    </p:spTree>
-  </p:cSld>
-</p:sldLayout>
-</file>
-
-<file path=ppt/slideLayouts/slideLayout9.xml><?xml version="1.0" encoding="utf-8"?>
-<p:sldLayout xmlns:a="http://schemas.openxmlformats.org/drawingml/2006/main" xmlns:p="http://schemas.openxmlformats.org/presentationml/2006/main" xmlns:r="http://schemas.openxmlformats.org/officeDocument/2006/relationships" xmlns:p14="http://schemas.microsoft.com/office/powerpoint/2010/main" xmlns:p15="http://schemas.microsoft.com/office/powerpoint/2012/main" xmlns:mc="http://schemas.openxmlformats.org/markup-compatibility/2006" type="vertTitleAndTx" preserve="1">
-  <p:cSld name="Vertical Title and Text">
     <p:bg>
       <p:bgPr>
         <a:solidFill>
@@ -5204,7 +5000,7 @@
         <p:spPr>
           <a:xfrm>
             <a:off x="0" y="0"/>
-            <a:ext cx="12177000" cy="6842880"/>
+            <a:ext cx="12176640" cy="6842520"/>
           </a:xfrm>
           <a:prstGeom prst="rect">
             <a:avLst/>
@@ -5227,8 +5023,8 @@
         </p:nvSpPr>
         <p:spPr>
           <a:xfrm>
-            <a:off x="8839080" y="190440"/>
-            <a:ext cx="2728080" cy="5922000"/>
+            <a:off x="609480" y="190440"/>
+            <a:ext cx="10957320" cy="567000"/>
           </a:xfrm>
           <a:prstGeom prst="rect">
             <a:avLst/>
@@ -5239,7 +5035,7 @@
           </a:ln>
         </p:spPr>
         <p:txBody>
-          <a:bodyPr lIns="45000" rIns="45000" tIns="90000" bIns="90000" anchor="ctr" vert="eaVert">
+          <a:bodyPr lIns="90000" rIns="90000" tIns="45000" bIns="45000" anchor="ctr">
             <a:noAutofit/>
           </a:bodyPr>
           <a:p>
@@ -5287,8 +5083,8 @@
         </p:nvSpPr>
         <p:spPr>
           <a:xfrm>
-            <a:off x="609480" y="190440"/>
-            <a:ext cx="8011440" cy="5922000"/>
+            <a:off x="609480" y="1174680"/>
+            <a:ext cx="5369400" cy="4937400"/>
           </a:xfrm>
           <a:prstGeom prst="rect">
             <a:avLst/>
@@ -5299,7 +5095,7 @@
           </a:ln>
         </p:spPr>
         <p:txBody>
-          <a:bodyPr lIns="45000" rIns="45000" tIns="90000" bIns="90000" anchor="t" vert="eaVert">
+          <a:bodyPr lIns="90000" rIns="90000" tIns="45000" bIns="45000" anchor="t">
             <a:noAutofit/>
           </a:bodyPr>
           <a:p>
@@ -5482,6 +5278,210 @@
       <p:sp>
         <p:nvSpPr>
           <p:cNvPr id="54" name="PlaceHolder 3"/>
+          <p:cNvSpPr>
+            <a:spLocks noGrp="1"/>
+          </p:cNvSpPr>
+          <p:nvPr>
+            <p:ph type="body"/>
+          </p:nvPr>
+        </p:nvSpPr>
+        <p:spPr>
+          <a:xfrm>
+            <a:off x="6197760" y="1174680"/>
+            <a:ext cx="5369400" cy="4937400"/>
+          </a:xfrm>
+          <a:prstGeom prst="rect">
+            <a:avLst/>
+          </a:prstGeom>
+          <a:noFill/>
+          <a:ln w="9360">
+            <a:noFill/>
+          </a:ln>
+        </p:spPr>
+        <p:txBody>
+          <a:bodyPr lIns="90000" rIns="90000" tIns="45000" bIns="45000" anchor="t">
+            <a:noAutofit/>
+          </a:bodyPr>
+          <a:p>
+            <a:pPr marL="343080" indent="-343080">
+              <a:lnSpc>
+                <a:spcPct val="100000"/>
+              </a:lnSpc>
+              <a:spcBef>
+                <a:spcPts val="641"/>
+              </a:spcBef>
+              <a:buClr>
+                <a:srgbClr val="000000"/>
+              </a:buClr>
+              <a:buFont typeface="Symbol" charset="2"/>
+              <a:buChar char=""/>
+            </a:pPr>
+            <a:r>
+              <a:rPr lang="en-US" sz="3200" b="0" u="none" strike="noStrike">
+                <a:solidFill>
+                  <a:schemeClr val="dk1"/>
+                </a:solidFill>
+                <a:effectLst/>
+                <a:uFillTx/>
+                <a:latin typeface="Arial"/>
+                <a:ea typeface="SimSun"/>
+              </a:rPr>
+              <a:t>Click to edit Master text styles</a:t>
+            </a:r>
+            <a:endParaRPr lang="en-US" sz="3200" b="0" u="none" strike="noStrike">
+              <a:solidFill>
+                <a:srgbClr val="000000"/>
+              </a:solidFill>
+              <a:effectLst/>
+              <a:uFillTx/>
+              <a:latin typeface="Arial"/>
+            </a:endParaRPr>
+          </a:p>
+          <a:p>
+            <a:pPr marL="743040" lvl="1" indent="-285840">
+              <a:lnSpc>
+                <a:spcPct val="100000"/>
+              </a:lnSpc>
+              <a:spcBef>
+                <a:spcPts val="561"/>
+              </a:spcBef>
+              <a:buClr>
+                <a:srgbClr val="000000"/>
+              </a:buClr>
+              <a:buFont typeface="Symbol" charset="2"/>
+              <a:buChar char=""/>
+            </a:pPr>
+            <a:r>
+              <a:rPr lang="en-US" sz="2800" b="0" u="none" strike="noStrike">
+                <a:solidFill>
+                  <a:schemeClr val="dk1"/>
+                </a:solidFill>
+                <a:effectLst/>
+                <a:uFillTx/>
+                <a:latin typeface="Arial"/>
+                <a:ea typeface="SimSun"/>
+              </a:rPr>
+              <a:t>Second level</a:t>
+            </a:r>
+            <a:endParaRPr lang="en-US" sz="2800" b="0" u="none" strike="noStrike">
+              <a:solidFill>
+                <a:srgbClr val="000000"/>
+              </a:solidFill>
+              <a:effectLst/>
+              <a:uFillTx/>
+              <a:latin typeface="Arial"/>
+            </a:endParaRPr>
+          </a:p>
+          <a:p>
+            <a:pPr marL="1143000" lvl="2" indent="-228600">
+              <a:lnSpc>
+                <a:spcPct val="100000"/>
+              </a:lnSpc>
+              <a:spcBef>
+                <a:spcPts val="479"/>
+              </a:spcBef>
+              <a:buClr>
+                <a:srgbClr val="000000"/>
+              </a:buClr>
+              <a:buFont typeface="Symbol" charset="2"/>
+              <a:buChar char=""/>
+            </a:pPr>
+            <a:r>
+              <a:rPr lang="en-US" sz="2400" b="0" u="none" strike="noStrike">
+                <a:solidFill>
+                  <a:schemeClr val="dk1"/>
+                </a:solidFill>
+                <a:effectLst/>
+                <a:uFillTx/>
+                <a:latin typeface="Arial"/>
+                <a:ea typeface="SimSun"/>
+              </a:rPr>
+              <a:t>Third level</a:t>
+            </a:r>
+            <a:endParaRPr lang="en-US" sz="2400" b="0" u="none" strike="noStrike">
+              <a:solidFill>
+                <a:srgbClr val="000000"/>
+              </a:solidFill>
+              <a:effectLst/>
+              <a:uFillTx/>
+              <a:latin typeface="Arial"/>
+            </a:endParaRPr>
+          </a:p>
+          <a:p>
+            <a:pPr marL="1600200" lvl="3" indent="-228600">
+              <a:lnSpc>
+                <a:spcPct val="100000"/>
+              </a:lnSpc>
+              <a:spcBef>
+                <a:spcPts val="400"/>
+              </a:spcBef>
+              <a:buClr>
+                <a:srgbClr val="000000"/>
+              </a:buClr>
+              <a:buFont typeface="Symbol" charset="2"/>
+              <a:buChar char=""/>
+            </a:pPr>
+            <a:r>
+              <a:rPr lang="en-US" sz="2000" b="0" u="none" strike="noStrike">
+                <a:solidFill>
+                  <a:schemeClr val="dk1"/>
+                </a:solidFill>
+                <a:effectLst/>
+                <a:uFillTx/>
+                <a:latin typeface="Arial"/>
+                <a:ea typeface="SimSun"/>
+              </a:rPr>
+              <a:t>Fourth level</a:t>
+            </a:r>
+            <a:endParaRPr lang="en-US" sz="2000" b="0" u="none" strike="noStrike">
+              <a:solidFill>
+                <a:srgbClr val="000000"/>
+              </a:solidFill>
+              <a:effectLst/>
+              <a:uFillTx/>
+              <a:latin typeface="Arial"/>
+            </a:endParaRPr>
+          </a:p>
+          <a:p>
+            <a:pPr marL="2057400" lvl="4" indent="-228600">
+              <a:lnSpc>
+                <a:spcPct val="100000"/>
+              </a:lnSpc>
+              <a:spcBef>
+                <a:spcPts val="400"/>
+              </a:spcBef>
+              <a:buClr>
+                <a:srgbClr val="000000"/>
+              </a:buClr>
+              <a:buFont typeface="OpenSymbol"/>
+              <a:buChar char="»"/>
+            </a:pPr>
+            <a:r>
+              <a:rPr lang="en-US" sz="2000" b="0" u="none" strike="noStrike">
+                <a:solidFill>
+                  <a:schemeClr val="dk1"/>
+                </a:solidFill>
+                <a:effectLst/>
+                <a:uFillTx/>
+                <a:latin typeface="Arial"/>
+                <a:ea typeface="SimSun"/>
+              </a:rPr>
+              <a:t>Fifth level</a:t>
+            </a:r>
+            <a:endParaRPr lang="en-US" sz="2000" b="0" u="none" strike="noStrike">
+              <a:solidFill>
+                <a:srgbClr val="000000"/>
+              </a:solidFill>
+              <a:effectLst/>
+              <a:uFillTx/>
+              <a:latin typeface="Arial"/>
+            </a:endParaRPr>
+          </a:p>
+        </p:txBody>
+      </p:sp>
+      <p:sp>
+        <p:nvSpPr>
+          <p:cNvPr id="55" name="PlaceHolder 4"/>
           <p:cNvSpPr>
             <a:spLocks noGrp="1"/>
           </p:cNvSpPr>
@@ -5492,7 +5492,7 @@
         <p:spPr>
           <a:xfrm>
             <a:off x="609480" y="6245280"/>
-            <a:ext cx="2829600" cy="461160"/>
+            <a:ext cx="2829240" cy="460800"/>
           </a:xfrm>
           <a:prstGeom prst="rect">
             <a:avLst/>
@@ -5561,7 +5561,7 @@
       </p:sp>
       <p:sp>
         <p:nvSpPr>
-          <p:cNvPr id="55" name="PlaceHolder 4"/>
+          <p:cNvPr id="56" name="PlaceHolder 5"/>
           <p:cNvSpPr>
             <a:spLocks noGrp="1"/>
           </p:cNvSpPr>
@@ -5572,7 +5572,7 @@
         <p:spPr>
           <a:xfrm>
             <a:off x="4165560" y="6245280"/>
-            <a:ext cx="3845520" cy="461160"/>
+            <a:ext cx="3845160" cy="460800"/>
           </a:xfrm>
           <a:prstGeom prst="rect">
             <a:avLst/>
@@ -5641,7 +5641,7 @@
       </p:sp>
       <p:sp>
         <p:nvSpPr>
-          <p:cNvPr id="56" name="PlaceHolder 5"/>
+          <p:cNvPr id="57" name="PlaceHolder 6"/>
           <p:cNvSpPr>
             <a:spLocks noGrp="1"/>
           </p:cNvSpPr>
@@ -5652,7 +5652,7 @@
         <p:spPr>
           <a:xfrm>
             <a:off x="8737560" y="6245280"/>
-            <a:ext cx="2829600" cy="461160"/>
+            <a:ext cx="2829240" cy="460800"/>
           </a:xfrm>
           <a:prstGeom prst="rect">
             <a:avLst/>
@@ -5752,7 +5752,7 @@
         <p:spPr>
           <a:xfrm>
             <a:off x="734760" y="1720800"/>
-            <a:ext cx="10323360" cy="2885400"/>
+            <a:ext cx="10323000" cy="2885040"/>
           </a:xfrm>
           <a:prstGeom prst="rect">
             <a:avLst/>
@@ -5894,7 +5894,7 @@
         <p:spPr>
           <a:xfrm>
             <a:off x="228600" y="0"/>
-            <a:ext cx="10957680" cy="747000"/>
+            <a:ext cx="10957320" cy="746640"/>
           </a:xfrm>
           <a:prstGeom prst="rect">
             <a:avLst/>
@@ -5955,7 +5955,7 @@
         <p:spPr>
           <a:xfrm>
             <a:off x="228600" y="703080"/>
-            <a:ext cx="11199600" cy="8325000"/>
+            <a:ext cx="11199240" cy="8324280"/>
           </a:xfrm>
           <a:prstGeom prst="rect">
             <a:avLst/>
@@ -5994,7 +5994,6 @@
               <a:effectLst/>
               <a:uFillTx/>
               <a:latin typeface="Arial"/>
-              <a:ea typeface="Microsoft YaHei"/>
             </a:endParaRPr>
           </a:p>
           <a:p>
@@ -6017,19 +6016,9 @@
                 <a:effectLst/>
                 <a:uFillTx/>
                 <a:latin typeface="Arial"/>
-              </a:rPr>
-              <a:t>The parameters in </a:t>
-            </a:r>
-            <a:r>
-              <a:rPr lang="en-US" sz="1800" b="0" u="none" strike="noStrike">
-                <a:solidFill>
-                  <a:srgbClr val="000000"/>
-                </a:solidFill>
-                <a:effectLst/>
-                <a:uFillTx/>
-                <a:latin typeface="Arial"/>
-              </a:rPr>
-              <a:t>Spotiflow:</a:t>
+                <a:ea typeface="SimSun"/>
+              </a:rPr>
+              <a:t>The parameters in Spotiflow:</a:t>
             </a:r>
             <a:endParaRPr lang="en-US" sz="1800" b="0" u="none" strike="noStrike">
               <a:solidFill>
@@ -6060,19 +6049,9 @@
                 <a:effectLst/>
                 <a:uFillTx/>
                 <a:latin typeface="Arial"/>
-              </a:rPr>
-              <a:t>1)Probability </a:t>
-            </a:r>
-            <a:r>
-              <a:rPr lang="en-US" sz="1800" b="1" u="none" strike="noStrike">
-                <a:solidFill>
-                  <a:srgbClr val="000000"/>
-                </a:solidFill>
-                <a:effectLst/>
-                <a:uFillTx/>
-                <a:latin typeface="Arial"/>
-              </a:rPr>
-              <a:t>threshold:</a:t>
+                <a:ea typeface="SimSun"/>
+              </a:rPr>
+              <a:t>1)Probability threshold:</a:t>
             </a:r>
             <a:endParaRPr lang="en-US" sz="1800" b="0" u="none" strike="noStrike">
               <a:solidFill>
@@ -6081,7 +6060,6 @@
               <a:effectLst/>
               <a:uFillTx/>
               <a:latin typeface="Arial"/>
-              <a:ea typeface="Microsoft YaHei"/>
             </a:endParaRPr>
           </a:p>
           <a:p>
@@ -6104,74 +6082,9 @@
                 <a:effectLst/>
                 <a:uFillTx/>
                 <a:latin typeface="Arial"/>
-              </a:rPr>
-              <a:t>The model assigns </a:t>
-            </a:r>
-            <a:r>
-              <a:rPr lang="en-US" sz="1800" b="0" u="none" strike="noStrike">
-                <a:solidFill>
-                  <a:srgbClr val="000000"/>
-                </a:solidFill>
-                <a:effectLst/>
-                <a:uFillTx/>
-                <a:latin typeface="Arial"/>
-              </a:rPr>
-              <a:t>a probability </a:t>
-            </a:r>
-            <a:r>
-              <a:rPr lang="en-US" sz="1800" b="0" u="none" strike="noStrike">
-                <a:solidFill>
-                  <a:srgbClr val="000000"/>
-                </a:solidFill>
-                <a:effectLst/>
-                <a:uFillTx/>
-                <a:latin typeface="Arial"/>
-              </a:rPr>
-              <a:t>(confidence) to each </a:t>
-            </a:r>
-            <a:r>
-              <a:rPr lang="en-US" sz="1800" b="0" u="none" strike="noStrike">
-                <a:solidFill>
-                  <a:srgbClr val="000000"/>
-                </a:solidFill>
-                <a:effectLst/>
-                <a:uFillTx/>
-                <a:latin typeface="Arial"/>
-              </a:rPr>
-              <a:t>potential spot. Only </a:t>
-            </a:r>
-            <a:r>
-              <a:rPr lang="en-US" sz="1800" b="0" u="none" strike="noStrike">
-                <a:solidFill>
-                  <a:srgbClr val="000000"/>
-                </a:solidFill>
-                <a:effectLst/>
-                <a:uFillTx/>
-                <a:latin typeface="Arial"/>
-              </a:rPr>
-              <a:t>detections above </a:t>
-            </a:r>
-            <a:r>
-              <a:rPr lang="en-US" sz="1800" b="0" u="none" strike="noStrike">
-                <a:solidFill>
-                  <a:srgbClr val="000000"/>
-                </a:solidFill>
-                <a:effectLst/>
-                <a:uFillTx/>
-                <a:latin typeface="Arial"/>
-              </a:rPr>
-              <a:t>this threshold are </a:t>
-            </a:r>
-            <a:r>
-              <a:rPr lang="en-US" sz="1800" b="0" u="none" strike="noStrike">
-                <a:solidFill>
-                  <a:srgbClr val="000000"/>
-                </a:solidFill>
-                <a:effectLst/>
-                <a:uFillTx/>
-                <a:latin typeface="Arial"/>
-              </a:rPr>
-              <a:t>kept.</a:t>
+                <a:ea typeface="SimSun"/>
+              </a:rPr>
+              <a:t>The model assigns a probability (confidence) to each potential spot. Only detections above this threshold are kept.</a:t>
             </a:r>
             <a:endParaRPr lang="en-US" sz="1800" b="0" u="none" strike="noStrike">
               <a:solidFill>
@@ -6180,7 +6093,6 @@
               <a:effectLst/>
               <a:uFillTx/>
               <a:latin typeface="Arial"/>
-              <a:ea typeface="Microsoft YaHei"/>
             </a:endParaRPr>
           </a:p>
           <a:p>
@@ -6203,6 +6115,7 @@
                 <a:effectLst/>
                 <a:uFillTx/>
                 <a:latin typeface="Arial"/>
+                <a:ea typeface="SimSun"/>
               </a:rPr>
               <a:t>Effect:</a:t>
             </a:r>
@@ -6213,7 +6126,6 @@
               <a:effectLst/>
               <a:uFillTx/>
               <a:latin typeface="Arial"/>
-              <a:ea typeface="Microsoft YaHei"/>
             </a:endParaRPr>
           </a:p>
           <a:p>
@@ -6236,63 +6148,9 @@
                 <a:effectLst/>
                 <a:uFillTx/>
                 <a:latin typeface="Arial"/>
-              </a:rPr>
-              <a:t>Lower value (e.g., </a:t>
-            </a:r>
-            <a:r>
-              <a:rPr lang="en-US" sz="1800" b="0" u="none" strike="noStrike">
-                <a:solidFill>
-                  <a:srgbClr val="000000"/>
-                </a:solidFill>
-                <a:effectLst/>
-                <a:uFillTx/>
-                <a:latin typeface="Arial"/>
-              </a:rPr>
-              <a:t>0.3–0.5) → more </a:t>
-            </a:r>
-            <a:r>
-              <a:rPr lang="en-US" sz="1800" b="0" u="none" strike="noStrike">
-                <a:solidFill>
-                  <a:srgbClr val="000000"/>
-                </a:solidFill>
-                <a:effectLst/>
-                <a:uFillTx/>
-                <a:latin typeface="Arial"/>
-              </a:rPr>
-              <a:t>sensitive→ detects </a:t>
-            </a:r>
-            <a:r>
-              <a:rPr lang="en-US" sz="1800" b="0" u="none" strike="noStrike">
-                <a:solidFill>
-                  <a:srgbClr val="000000"/>
-                </a:solidFill>
-                <a:effectLst/>
-                <a:uFillTx/>
-                <a:latin typeface="Arial"/>
-              </a:rPr>
-              <a:t>more spots, but </a:t>
-            </a:r>
-            <a:r>
-              <a:rPr lang="en-US" sz="1800" b="0" u="none" strike="noStrike">
-                <a:solidFill>
-                  <a:srgbClr val="000000"/>
-                </a:solidFill>
-                <a:effectLst/>
-                <a:uFillTx/>
-                <a:latin typeface="Arial"/>
-              </a:rPr>
-              <a:t>increases false </a:t>
-            </a:r>
-            <a:r>
-              <a:rPr lang="en-US" sz="1800" b="0" u="none" strike="noStrike">
-                <a:solidFill>
-                  <a:srgbClr val="000000"/>
-                </a:solidFill>
-                <a:effectLst/>
-                <a:uFillTx/>
-                <a:latin typeface="Arial"/>
-              </a:rPr>
-              <a:t>positives</a:t>
+                <a:ea typeface="SimSun"/>
+              </a:rPr>
+              <a:t>Lower value (e.g., 0.3–0.5) → more sensitive→ detects more spots, but increases false positives</a:t>
             </a:r>
             <a:endParaRPr lang="en-US" sz="1800" b="0" u="none" strike="noStrike">
               <a:solidFill>
@@ -6301,7 +6159,6 @@
               <a:effectLst/>
               <a:uFillTx/>
               <a:latin typeface="Arial"/>
-              <a:ea typeface="Microsoft YaHei"/>
             </a:endParaRPr>
           </a:p>
           <a:p>
@@ -6324,63 +6181,9 @@
                 <a:effectLst/>
                 <a:uFillTx/>
                 <a:latin typeface="Arial"/>
-              </a:rPr>
-              <a:t>Higher value (e.g., </a:t>
-            </a:r>
-            <a:r>
-              <a:rPr lang="en-US" sz="1800" b="0" u="none" strike="noStrike">
-                <a:solidFill>
-                  <a:srgbClr val="000000"/>
-                </a:solidFill>
-                <a:effectLst/>
-                <a:uFillTx/>
-                <a:latin typeface="Arial"/>
-              </a:rPr>
-              <a:t>0.6–0.8) → more </a:t>
-            </a:r>
-            <a:r>
-              <a:rPr lang="en-US" sz="1800" b="0" u="none" strike="noStrike">
-                <a:solidFill>
-                  <a:srgbClr val="000000"/>
-                </a:solidFill>
-                <a:effectLst/>
-                <a:uFillTx/>
-                <a:latin typeface="Arial"/>
-              </a:rPr>
-              <a:t>strict→ fewer false </a:t>
-            </a:r>
-            <a:r>
-              <a:rPr lang="en-US" sz="1800" b="0" u="none" strike="noStrike">
-                <a:solidFill>
-                  <a:srgbClr val="000000"/>
-                </a:solidFill>
-                <a:effectLst/>
-                <a:uFillTx/>
-                <a:latin typeface="Arial"/>
-              </a:rPr>
-              <a:t>positives, but may </a:t>
-            </a:r>
-            <a:r>
-              <a:rPr lang="en-US" sz="1800" b="0" u="none" strike="noStrike">
-                <a:solidFill>
-                  <a:srgbClr val="000000"/>
-                </a:solidFill>
-                <a:effectLst/>
-                <a:uFillTx/>
-                <a:latin typeface="Arial"/>
-              </a:rPr>
-              <a:t>miss weak/low-</a:t>
-            </a:r>
-            <a:r>
-              <a:rPr lang="en-US" sz="1800" b="0" u="none" strike="noStrike">
-                <a:solidFill>
-                  <a:srgbClr val="000000"/>
-                </a:solidFill>
-                <a:effectLst/>
-                <a:uFillTx/>
-                <a:latin typeface="Arial"/>
-              </a:rPr>
-              <a:t>intensity spots</a:t>
+                <a:ea typeface="SimSun"/>
+              </a:rPr>
+              <a:t>Higher value (e.g., 0.6–0.8) → more strict→ fewer false positives, but may miss weak/low-intensity spots</a:t>
             </a:r>
             <a:endParaRPr lang="en-US" sz="1800" b="0" u="none" strike="noStrike">
               <a:solidFill>
@@ -6389,7 +6192,6 @@
               <a:effectLst/>
               <a:uFillTx/>
               <a:latin typeface="Arial"/>
-              <a:ea typeface="Microsoft YaHei"/>
             </a:endParaRPr>
           </a:p>
           <a:p>
@@ -6411,7 +6213,6 @@
               <a:effectLst/>
               <a:uFillTx/>
               <a:latin typeface="Arial"/>
-              <a:ea typeface="Microsoft YaHei"/>
             </a:endParaRPr>
           </a:p>
           <a:p>
@@ -6434,19 +6235,9 @@
                 <a:effectLst/>
                 <a:uFillTx/>
                 <a:latin typeface="Arial"/>
-              </a:rPr>
-              <a:t>2)Minimum </a:t>
-            </a:r>
-            <a:r>
-              <a:rPr lang="en-US" sz="1800" b="1" u="none" strike="noStrike">
-                <a:solidFill>
-                  <a:srgbClr val="000000"/>
-                </a:solidFill>
-                <a:effectLst/>
-                <a:uFillTx/>
-                <a:latin typeface="Arial"/>
-              </a:rPr>
-              <a:t>distance:</a:t>
+                <a:ea typeface="SimSun"/>
+              </a:rPr>
+              <a:t>2)Minimum distance:</a:t>
             </a:r>
             <a:endParaRPr lang="en-US" sz="1800" b="0" u="none" strike="noStrike">
               <a:solidFill>
@@ -6455,7 +6246,6 @@
               <a:effectLst/>
               <a:uFillTx/>
               <a:latin typeface="Arial"/>
-              <a:ea typeface="Microsoft YaHei"/>
             </a:endParaRPr>
           </a:p>
           <a:p>
@@ -6478,41 +6268,9 @@
                 <a:effectLst/>
                 <a:uFillTx/>
                 <a:latin typeface="Arial"/>
-              </a:rPr>
-              <a:t>This controls how </a:t>
-            </a:r>
-            <a:r>
-              <a:rPr lang="en-US" sz="1800" b="0" u="none" strike="noStrike">
-                <a:solidFill>
-                  <a:srgbClr val="000000"/>
-                </a:solidFill>
-                <a:effectLst/>
-                <a:uFillTx/>
-                <a:latin typeface="Arial"/>
-              </a:rPr>
-              <a:t>close two detected </a:t>
-            </a:r>
-            <a:r>
-              <a:rPr lang="en-US" sz="1800" b="0" u="none" strike="noStrike">
-                <a:solidFill>
-                  <a:srgbClr val="000000"/>
-                </a:solidFill>
-                <a:effectLst/>
-                <a:uFillTx/>
-                <a:latin typeface="Arial"/>
-              </a:rPr>
-              <a:t>spots are allowed to </a:t>
-            </a:r>
-            <a:r>
-              <a:rPr lang="en-US" sz="1800" b="0" u="none" strike="noStrike">
-                <a:solidFill>
-                  <a:srgbClr val="000000"/>
-                </a:solidFill>
-                <a:effectLst/>
-                <a:uFillTx/>
-                <a:latin typeface="Arial"/>
-              </a:rPr>
-              <a:t>be.</a:t>
+                <a:ea typeface="SimSun"/>
+              </a:rPr>
+              <a:t>This controls how close two detected spots are allowed to be.</a:t>
             </a:r>
             <a:endParaRPr lang="en-US" sz="1800" b="0" u="none" strike="noStrike">
               <a:solidFill>
@@ -6521,7 +6279,6 @@
               <a:effectLst/>
               <a:uFillTx/>
               <a:latin typeface="Arial"/>
-              <a:ea typeface="Microsoft YaHei"/>
             </a:endParaRPr>
           </a:p>
           <a:p>
@@ -6549,52 +6306,9 @@
                 <a:effectLst/>
                 <a:uFillTx/>
                 <a:latin typeface="Arial"/>
-              </a:rPr>
-              <a:t>It enforces a </a:t>
-            </a:r>
-            <a:r>
-              <a:rPr lang="en-US" sz="1800" b="0" u="none" strike="noStrike">
-                <a:solidFill>
-                  <a:srgbClr val="000000"/>
-                </a:solidFill>
-                <a:effectLst/>
-                <a:uFillTx/>
-                <a:latin typeface="Arial"/>
-              </a:rPr>
-              <a:t>minimum distance </a:t>
-            </a:r>
-            <a:r>
-              <a:rPr lang="en-US" sz="1800" b="0" u="none" strike="noStrike">
-                <a:solidFill>
-                  <a:srgbClr val="000000"/>
-                </a:solidFill>
-                <a:effectLst/>
-                <a:uFillTx/>
-                <a:latin typeface="Arial"/>
-              </a:rPr>
-              <a:t>(in pixels/voxels) </a:t>
-            </a:r>
-            <a:r>
-              <a:rPr lang="en-US" sz="1800" b="0" u="none" strike="noStrike">
-                <a:solidFill>
-                  <a:srgbClr val="000000"/>
-                </a:solidFill>
-                <a:effectLst/>
-                <a:uFillTx/>
-                <a:latin typeface="Arial"/>
-              </a:rPr>
-              <a:t>between detected </a:t>
-            </a:r>
-            <a:r>
-              <a:rPr lang="en-US" sz="1800" b="0" u="none" strike="noStrike">
-                <a:solidFill>
-                  <a:srgbClr val="000000"/>
-                </a:solidFill>
-                <a:effectLst/>
-                <a:uFillTx/>
-                <a:latin typeface="Arial"/>
-              </a:rPr>
-              <a:t>spot centers.</a:t>
+                <a:ea typeface="SimSun"/>
+              </a:rPr>
+              <a:t>It enforces a minimum distance (in pixels/voxels) between detected spot centers.</a:t>
             </a:r>
             <a:endParaRPr lang="en-US" sz="1800" b="0" u="none" strike="noStrike">
               <a:solidFill>
@@ -6603,7 +6317,6 @@
               <a:effectLst/>
               <a:uFillTx/>
               <a:latin typeface="Arial"/>
-              <a:ea typeface="Microsoft YaHei"/>
             </a:endParaRPr>
           </a:p>
           <a:p>
@@ -6631,63 +6344,9 @@
                 <a:effectLst/>
                 <a:uFillTx/>
                 <a:latin typeface="Arial"/>
-              </a:rPr>
-              <a:t>If two detections </a:t>
-            </a:r>
-            <a:r>
-              <a:rPr lang="en-US" sz="1800" b="0" u="none" strike="noStrike">
-                <a:solidFill>
-                  <a:srgbClr val="000000"/>
-                </a:solidFill>
-                <a:effectLst/>
-                <a:uFillTx/>
-                <a:latin typeface="Arial"/>
-              </a:rPr>
-              <a:t>are closer than </a:t>
-            </a:r>
-            <a:r>
-              <a:rPr lang="en-US" sz="1800" b="0" u="none" strike="noStrike">
-                <a:solidFill>
-                  <a:srgbClr val="000000"/>
-                </a:solidFill>
-                <a:effectLst/>
-                <a:uFillTx/>
-                <a:latin typeface="Arial"/>
-              </a:rPr>
-              <a:t>this, typically only </a:t>
-            </a:r>
-            <a:r>
-              <a:rPr lang="en-US" sz="1800" b="0" u="none" strike="noStrike">
-                <a:solidFill>
-                  <a:srgbClr val="000000"/>
-                </a:solidFill>
-                <a:effectLst/>
-                <a:uFillTx/>
-                <a:latin typeface="Arial"/>
-              </a:rPr>
-              <a:t>one is kept </a:t>
-            </a:r>
-            <a:r>
-              <a:rPr lang="en-US" sz="1800" b="0" u="none" strike="noStrike">
-                <a:solidFill>
-                  <a:srgbClr val="000000"/>
-                </a:solidFill>
-                <a:effectLst/>
-                <a:uFillTx/>
-                <a:latin typeface="Arial"/>
-              </a:rPr>
-              <a:t>(usually the </a:t>
-            </a:r>
-            <a:r>
-              <a:rPr lang="en-US" sz="1800" b="0" u="none" strike="noStrike">
-                <a:solidFill>
-                  <a:srgbClr val="000000"/>
-                </a:solidFill>
-                <a:effectLst/>
-                <a:uFillTx/>
-                <a:latin typeface="Arial"/>
-              </a:rPr>
-              <a:t>stronger one).</a:t>
+                <a:ea typeface="SimSun"/>
+              </a:rPr>
+              <a:t>If two detections are closer than this, typically only one is kept (usually the stronger one).</a:t>
             </a:r>
             <a:endParaRPr lang="en-US" sz="1800" b="0" u="none" strike="noStrike">
               <a:solidFill>
@@ -6696,7 +6355,6 @@
               <a:effectLst/>
               <a:uFillTx/>
               <a:latin typeface="Arial"/>
-              <a:ea typeface="Microsoft YaHei"/>
             </a:endParaRPr>
           </a:p>
           <a:p>
@@ -6719,6 +6377,7 @@
                 <a:effectLst/>
                 <a:uFillTx/>
                 <a:latin typeface="Arial"/>
+                <a:ea typeface="SimSun"/>
               </a:rPr>
               <a:t>Effect:</a:t>
             </a:r>
@@ -6729,7 +6388,6 @@
               <a:effectLst/>
               <a:uFillTx/>
               <a:latin typeface="Arial"/>
-              <a:ea typeface="Microsoft YaHei"/>
             </a:endParaRPr>
           </a:p>
           <a:p>
@@ -6752,63 +6410,9 @@
                 <a:effectLst/>
                 <a:uFillTx/>
                 <a:latin typeface="Arial"/>
-              </a:rPr>
-              <a:t>Smaller value → </a:t>
-            </a:r>
-            <a:r>
-              <a:rPr lang="en-US" sz="1800" b="0" u="none" strike="noStrike">
-                <a:solidFill>
-                  <a:srgbClr val="000000"/>
-                </a:solidFill>
-                <a:effectLst/>
-                <a:uFillTx/>
-                <a:latin typeface="Arial"/>
-              </a:rPr>
-              <a:t>allows tightly packed </a:t>
-            </a:r>
-            <a:r>
-              <a:rPr lang="en-US" sz="1800" b="0" u="none" strike="noStrike">
-                <a:solidFill>
-                  <a:srgbClr val="000000"/>
-                </a:solidFill>
-                <a:effectLst/>
-                <a:uFillTx/>
-                <a:latin typeface="Arial"/>
-              </a:rPr>
-              <a:t>spots→ risk of over-</a:t>
-            </a:r>
-            <a:r>
-              <a:rPr lang="en-US" sz="1800" b="0" u="none" strike="noStrike">
-                <a:solidFill>
-                  <a:srgbClr val="000000"/>
-                </a:solidFill>
-                <a:effectLst/>
-                <a:uFillTx/>
-                <a:latin typeface="Arial"/>
-              </a:rPr>
-              <a:t>segmentation </a:t>
-            </a:r>
-            <a:r>
-              <a:rPr lang="en-US" sz="1800" b="0" u="none" strike="noStrike">
-                <a:solidFill>
-                  <a:srgbClr val="000000"/>
-                </a:solidFill>
-                <a:effectLst/>
-                <a:uFillTx/>
-                <a:latin typeface="Arial"/>
-              </a:rPr>
-              <a:t>(multiple detections </a:t>
-            </a:r>
-            <a:r>
-              <a:rPr lang="en-US" sz="1800" b="0" u="none" strike="noStrike">
-                <a:solidFill>
-                  <a:srgbClr val="000000"/>
-                </a:solidFill>
-                <a:effectLst/>
-                <a:uFillTx/>
-                <a:latin typeface="Arial"/>
-              </a:rPr>
-              <a:t>in one object)</a:t>
+                <a:ea typeface="SimSun"/>
+              </a:rPr>
+              <a:t>Smaller value → allows tightly packed spots→ risk of over-segmentation (multiple detections in one object)</a:t>
             </a:r>
             <a:endParaRPr lang="en-US" sz="1800" b="0" u="none" strike="noStrike">
               <a:solidFill>
@@ -6817,7 +6421,6 @@
               <a:effectLst/>
               <a:uFillTx/>
               <a:latin typeface="Arial"/>
-              <a:ea typeface="Microsoft YaHei"/>
             </a:endParaRPr>
           </a:p>
           <a:p>
@@ -6840,63 +6443,9 @@
                 <a:effectLst/>
                 <a:uFillTx/>
                 <a:latin typeface="Arial"/>
-              </a:rPr>
-              <a:t>Larger value → </a:t>
-            </a:r>
-            <a:r>
-              <a:rPr lang="en-US" sz="1800" b="0" u="none" strike="noStrike">
-                <a:solidFill>
-                  <a:srgbClr val="000000"/>
-                </a:solidFill>
-                <a:effectLst/>
-                <a:uFillTx/>
-                <a:latin typeface="Arial"/>
-              </a:rPr>
-              <a:t>enforces </a:t>
-            </a:r>
-            <a:r>
-              <a:rPr lang="en-US" sz="1800" b="0" u="none" strike="noStrike">
-                <a:solidFill>
-                  <a:srgbClr val="000000"/>
-                </a:solidFill>
-                <a:effectLst/>
-                <a:uFillTx/>
-                <a:latin typeface="Arial"/>
-              </a:rPr>
-              <a:t>separation→ </a:t>
-            </a:r>
-            <a:r>
-              <a:rPr lang="en-US" sz="1800" b="0" u="none" strike="noStrike">
-                <a:solidFill>
-                  <a:srgbClr val="000000"/>
-                </a:solidFill>
-                <a:effectLst/>
-                <a:uFillTx/>
-                <a:latin typeface="Arial"/>
-              </a:rPr>
-              <a:t>prevents duplicates, </a:t>
-            </a:r>
-            <a:r>
-              <a:rPr lang="en-US" sz="1800" b="0" u="none" strike="noStrike">
-                <a:solidFill>
-                  <a:srgbClr val="000000"/>
-                </a:solidFill>
-                <a:effectLst/>
-                <a:uFillTx/>
-                <a:latin typeface="Arial"/>
-              </a:rPr>
-              <a:t>but may merge </a:t>
-            </a:r>
-            <a:r>
-              <a:rPr lang="en-US" sz="1800" b="0" u="none" strike="noStrike">
-                <a:solidFill>
-                  <a:srgbClr val="000000"/>
-                </a:solidFill>
-                <a:effectLst/>
-                <a:uFillTx/>
-                <a:latin typeface="Arial"/>
-              </a:rPr>
-              <a:t>nearby distinct spots</a:t>
+                <a:ea typeface="SimSun"/>
+              </a:rPr>
+              <a:t>Larger value → enforces separation→ prevents duplicates, but may merge nearby distinct spots</a:t>
             </a:r>
             <a:endParaRPr lang="en-US" sz="1800" b="0" u="none" strike="noStrike">
               <a:solidFill>
@@ -6905,7 +6454,6 @@
               <a:effectLst/>
               <a:uFillTx/>
               <a:latin typeface="Arial"/>
-              <a:ea typeface="Microsoft YaHei"/>
             </a:endParaRPr>
           </a:p>
           <a:p>
@@ -6928,6 +6476,7 @@
                 <a:effectLst/>
                 <a:uFillTx/>
                 <a:latin typeface="Arial"/>
+                <a:ea typeface="SimSun"/>
               </a:rPr>
               <a:t> </a:t>
             </a:r>
@@ -6938,7 +6487,6 @@
               <a:effectLst/>
               <a:uFillTx/>
               <a:latin typeface="Arial"/>
-              <a:ea typeface="Microsoft YaHei"/>
             </a:endParaRPr>
           </a:p>
           <a:p>
@@ -7081,7 +6629,7 @@
         <p:spPr>
           <a:xfrm>
             <a:off x="228600" y="0"/>
-            <a:ext cx="10957680" cy="747000"/>
+            <a:ext cx="10957320" cy="746640"/>
           </a:xfrm>
           <a:prstGeom prst="rect">
             <a:avLst/>
@@ -7146,7 +6694,7 @@
         <p:spPr>
           <a:xfrm>
             <a:off x="228600" y="1371600"/>
-            <a:ext cx="6147000" cy="4739400"/>
+            <a:ext cx="6146640" cy="4739040"/>
           </a:xfrm>
           <a:prstGeom prst="rect">
             <a:avLst/>
@@ -7170,7 +6718,7 @@
         <p:spPr>
           <a:xfrm>
             <a:off x="6400800" y="506160"/>
-            <a:ext cx="5572440" cy="2095200"/>
+            <a:ext cx="5572080" cy="2094840"/>
           </a:xfrm>
           <a:prstGeom prst="rect">
             <a:avLst/>
@@ -7194,7 +6742,7 @@
         <p:spPr>
           <a:xfrm>
             <a:off x="7178760" y="2971800"/>
-            <a:ext cx="4479840" cy="3211560"/>
+            <a:ext cx="4479480" cy="3211200"/>
           </a:xfrm>
           <a:prstGeom prst="rect">
             <a:avLst/>
@@ -7208,13 +6756,13 @@
       <p:sp>
         <p:nvSpPr>
           <p:cNvPr id="98" name=""/>
-          <p:cNvSpPr txBox="1"/>
+          <p:cNvSpPr/>
           <p:nvPr/>
         </p:nvSpPr>
         <p:spPr>
           <a:xfrm>
             <a:off x="9372600" y="159840"/>
-            <a:ext cx="2743200" cy="346320"/>
+            <a:ext cx="2742840" cy="345960"/>
           </a:xfrm>
           <a:prstGeom prst="rect">
             <a:avLst/>
@@ -7227,11 +6775,22 @@
             <a:round/>
           </a:ln>
         </p:spPr>
+        <p:style>
+          <a:lnRef idx="0"/>
+          <a:fillRef idx="0"/>
+          <a:effectRef idx="0"/>
+          <a:fontRef idx="minor"/>
+        </p:style>
         <p:txBody>
           <a:bodyPr lIns="90000" rIns="90000" tIns="45000" bIns="45000" anchor="t">
             <a:spAutoFit/>
           </a:bodyPr>
           <a:p>
+            <a:pPr>
+              <a:lnSpc>
+                <a:spcPct val="100000"/>
+              </a:lnSpc>
+            </a:pPr>
             <a:r>
               <a:rPr lang="en-US" sz="1800" b="0" u="none" strike="noStrike">
                 <a:solidFill>
@@ -7294,6 +6853,7 @@
               <a:effectLst/>
               <a:uFillTx/>
               <a:latin typeface="Arial"/>
+              <a:ea typeface="SimSun"/>
             </a:endParaRPr>
           </a:p>
         </p:txBody>
@@ -7337,7 +6897,7 @@
         <p:spPr>
           <a:xfrm>
             <a:off x="228600" y="0"/>
-            <a:ext cx="10957680" cy="747000"/>
+            <a:ext cx="10957320" cy="746640"/>
           </a:xfrm>
           <a:prstGeom prst="rect">
             <a:avLst/>
@@ -7398,7 +6958,7 @@
         <p:spPr>
           <a:xfrm>
             <a:off x="228600" y="1778760"/>
-            <a:ext cx="11199600" cy="4530600"/>
+            <a:ext cx="11199240" cy="4530600"/>
           </a:xfrm>
           <a:prstGeom prst="rect">
             <a:avLst/>
@@ -7630,32 +7190,8 @@
         </p:blipFill>
         <p:spPr>
           <a:xfrm>
-            <a:off x="1600200" y="457200"/>
-            <a:ext cx="4517640" cy="3657600"/>
-          </a:xfrm>
-          <a:prstGeom prst="rect">
-            <a:avLst/>
-          </a:prstGeom>
-          <a:noFill/>
-          <a:ln w="36720">
-            <a:noFill/>
-          </a:ln>
-        </p:spPr>
-      </p:pic>
-      <p:pic>
-        <p:nvPicPr>
-          <p:cNvPr id="103" name=""/>
-          <p:cNvPicPr/>
-          <p:nvPr/>
-        </p:nvPicPr>
-        <p:blipFill>
-          <a:blip r:embed="rId2"/>
-          <a:stretch/>
-        </p:blipFill>
-        <p:spPr>
-          <a:xfrm>
             <a:off x="6267240" y="457200"/>
-            <a:ext cx="5160960" cy="3668040"/>
+            <a:ext cx="5160600" cy="3667680"/>
           </a:xfrm>
           <a:prstGeom prst="rect">
             <a:avLst/>
@@ -7668,14 +7204,14 @@
       </p:pic>
       <p:sp>
         <p:nvSpPr>
-          <p:cNvPr id="104" name=""/>
-          <p:cNvSpPr txBox="1"/>
+          <p:cNvPr id="103" name=""/>
+          <p:cNvSpPr/>
           <p:nvPr/>
         </p:nvSpPr>
         <p:spPr>
           <a:xfrm>
             <a:off x="0" y="1828800"/>
-            <a:ext cx="1600200" cy="914400"/>
+            <a:ext cx="1599840" cy="914040"/>
           </a:xfrm>
           <a:prstGeom prst="rect">
             <a:avLst/>
@@ -7685,11 +7221,22 @@
             <a:noFill/>
           </a:ln>
         </p:spPr>
+        <p:style>
+          <a:lnRef idx="0"/>
+          <a:fillRef idx="0"/>
+          <a:effectRef idx="0"/>
+          <a:fontRef idx="minor"/>
+        </p:style>
         <p:txBody>
           <a:bodyPr lIns="90000" rIns="90000" tIns="45000" bIns="45000" anchor="t">
             <a:spAutoFit/>
           </a:bodyPr>
           <a:p>
+            <a:pPr>
+              <a:lnSpc>
+                <a:spcPct val="100000"/>
+              </a:lnSpc>
+            </a:pPr>
             <a:r>
               <a:rPr lang="en-US" sz="1800" b="0" u="none" strike="noStrike">
                 <a:solidFill>
@@ -7711,6 +7258,11 @@
             </a:endParaRPr>
           </a:p>
           <a:p>
+            <a:pPr>
+              <a:lnSpc>
+                <a:spcPct val="100000"/>
+              </a:lnSpc>
+            </a:pPr>
             <a:r>
               <a:rPr lang="en-US" sz="1800" b="0" u="none" strike="noStrike">
                 <a:solidFill>
@@ -7733,6 +7285,30 @@
           </a:p>
         </p:txBody>
       </p:sp>
+      <p:pic>
+        <p:nvPicPr>
+          <p:cNvPr id="104" name=""/>
+          <p:cNvPicPr/>
+          <p:nvPr/>
+        </p:nvPicPr>
+        <p:blipFill>
+          <a:blip r:embed="rId2"/>
+          <a:stretch/>
+        </p:blipFill>
+        <p:spPr>
+          <a:xfrm>
+            <a:off x="1955520" y="746640"/>
+            <a:ext cx="3988080" cy="3200400"/>
+          </a:xfrm>
+          <a:prstGeom prst="rect">
+            <a:avLst/>
+          </a:prstGeom>
+          <a:noFill/>
+          <a:ln w="0">
+            <a:noFill/>
+          </a:ln>
+        </p:spPr>
+      </p:pic>
     </p:spTree>
   </p:cSld>
   <mc:AlternateContent>
@@ -7772,7 +7348,7 @@
         <p:spPr>
           <a:xfrm>
             <a:off x="199800" y="1600200"/>
-            <a:ext cx="4372200" cy="457200"/>
+            <a:ext cx="4371840" cy="456840"/>
           </a:xfrm>
           <a:prstGeom prst="rect">
             <a:avLst/>
@@ -7798,6 +7374,11 @@
             <a:noAutofit/>
           </a:bodyPr>
           <a:p>
+            <a:pPr>
+              <a:lnSpc>
+                <a:spcPct val="100000"/>
+              </a:lnSpc>
+            </a:pPr>
             <a:endParaRPr lang="en-US" sz="1800" b="0" u="none" strike="noStrike">
               <a:solidFill>
                 <a:srgbClr val="000000"/>
@@ -7805,6 +7386,7 @@
               <a:effectLst/>
               <a:uFillTx/>
               <a:latin typeface="Arial"/>
+              <a:ea typeface="SimSun"/>
             </a:endParaRPr>
           </a:p>
         </p:txBody>
@@ -7818,7 +7400,7 @@
         <p:spPr>
           <a:xfrm>
             <a:off x="228600" y="0"/>
-            <a:ext cx="10957680" cy="747000"/>
+            <a:ext cx="10957320" cy="746640"/>
           </a:xfrm>
           <a:prstGeom prst="rect">
             <a:avLst/>
@@ -7883,7 +7465,7 @@
         <p:spPr>
           <a:xfrm>
             <a:off x="199800" y="1208160"/>
-            <a:ext cx="4600800" cy="1763640"/>
+            <a:ext cx="4600440" cy="1763280"/>
           </a:xfrm>
           <a:prstGeom prst="rect">
             <a:avLst/>
@@ -7907,7 +7489,7 @@
         <p:spPr>
           <a:xfrm>
             <a:off x="5029200" y="685800"/>
-            <a:ext cx="7116120" cy="5486400"/>
+            <a:ext cx="7115760" cy="5486040"/>
           </a:xfrm>
           <a:prstGeom prst="rect">
             <a:avLst/>
@@ -7921,13 +7503,13 @@
       <p:sp>
         <p:nvSpPr>
           <p:cNvPr id="109" name=""/>
-          <p:cNvSpPr txBox="1"/>
+          <p:cNvSpPr/>
           <p:nvPr/>
         </p:nvSpPr>
         <p:spPr>
           <a:xfrm>
             <a:off x="262800" y="3657600"/>
-            <a:ext cx="4309200" cy="1762920"/>
+            <a:ext cx="4308840" cy="1762560"/>
           </a:xfrm>
           <a:prstGeom prst="rect">
             <a:avLst/>
@@ -7937,11 +7519,22 @@
             <a:noFill/>
           </a:ln>
         </p:spPr>
+        <p:style>
+          <a:lnRef idx="0"/>
+          <a:fillRef idx="0"/>
+          <a:effectRef idx="0"/>
+          <a:fontRef idx="minor"/>
+        </p:style>
         <p:txBody>
           <a:bodyPr lIns="90000" rIns="90000" tIns="45000" bIns="45000" anchor="t">
             <a:spAutoFit/>
           </a:bodyPr>
           <a:p>
+            <a:pPr>
+              <a:lnSpc>
+                <a:spcPct val="100000"/>
+              </a:lnSpc>
+            </a:pPr>
             <a:r>
               <a:rPr lang="en-US" sz="2000" b="1" u="none" strike="noStrike">
                 <a:solidFill>
@@ -7952,67 +7545,7 @@
                 <a:latin typeface="Arial"/>
                 <a:ea typeface="SimSun"/>
               </a:rPr>
-              <a:t>Finally, in the Napari </a:t>
-            </a:r>
-            <a:r>
-              <a:rPr lang="en-US" sz="2000" b="1" u="none" strike="noStrike">
-                <a:solidFill>
-                  <a:srgbClr val="000000"/>
-                </a:solidFill>
-                <a:effectLst/>
-                <a:uFillTx/>
-                <a:latin typeface="Arial"/>
-                <a:ea typeface="SimSun"/>
-              </a:rPr>
-              <a:t>interface, I filtered out </a:t>
-            </a:r>
-            <a:r>
-              <a:rPr lang="en-US" sz="2000" b="1" u="none" strike="noStrike">
-                <a:solidFill>
-                  <a:srgbClr val="000000"/>
-                </a:solidFill>
-                <a:effectLst/>
-                <a:uFillTx/>
-                <a:latin typeface="Arial"/>
-                <a:ea typeface="SimSun"/>
-              </a:rPr>
-              <a:t>SPOTS outside of cells </a:t>
-            </a:r>
-            <a:r>
-              <a:rPr lang="en-US" sz="2000" b="1" u="none" strike="noStrike">
-                <a:solidFill>
-                  <a:srgbClr val="000000"/>
-                </a:solidFill>
-                <a:effectLst/>
-                <a:uFillTx/>
-                <a:latin typeface="Arial"/>
-                <a:ea typeface="SimSun"/>
-              </a:rPr>
-              <a:t>and detected them in </a:t>
-            </a:r>
-            <a:r>
-              <a:rPr lang="en-US" sz="2000" b="1" u="none" strike="noStrike">
-                <a:solidFill>
-                  <a:srgbClr val="000000"/>
-                </a:solidFill>
-                <a:effectLst/>
-                <a:uFillTx/>
-                <a:latin typeface="Arial"/>
-                <a:ea typeface="SimSun"/>
-              </a:rPr>
-              <a:t>regions that are not cells, </a:t>
-            </a:r>
-            <a:r>
-              <a:rPr lang="en-US" sz="2000" b="1" u="none" strike="noStrike">
-                <a:solidFill>
-                  <a:srgbClr val="000000"/>
-                </a:solidFill>
-                <a:effectLst/>
-                <a:uFillTx/>
-                <a:latin typeface="Arial"/>
-                <a:ea typeface="SimSun"/>
-              </a:rPr>
-              <a:t>just background noise.</a:t>
+              <a:t>Finally, in the Napari interface, I filtered out SPOTS outside of cells and detected them in regions that are not cells, just background noise.</a:t>
             </a:r>
             <a:endParaRPr lang="en-US" sz="2000" b="0" u="none" strike="noStrike">
               <a:solidFill>
@@ -8024,6 +7557,11 @@
             </a:endParaRPr>
           </a:p>
           <a:p>
+            <a:pPr>
+              <a:lnSpc>
+                <a:spcPct val="100000"/>
+              </a:lnSpc>
+            </a:pPr>
             <a:endParaRPr lang="en-US" sz="1800" b="0" u="none" strike="noStrike">
               <a:solidFill>
                 <a:srgbClr val="000000"/>
@@ -8075,6 +7613,7 @@
               <a:effectLst/>
               <a:uFillTx/>
               <a:latin typeface="Arial"/>
+              <a:ea typeface="SimSun"/>
             </a:endParaRPr>
           </a:p>
         </p:txBody>
@@ -8082,13 +7621,13 @@
       <p:sp>
         <p:nvSpPr>
           <p:cNvPr id="111" name=""/>
-          <p:cNvSpPr txBox="1"/>
+          <p:cNvSpPr/>
           <p:nvPr/>
         </p:nvSpPr>
         <p:spPr>
           <a:xfrm>
             <a:off x="4572000" y="228600"/>
-            <a:ext cx="3886200" cy="346320"/>
+            <a:ext cx="3885840" cy="345960"/>
           </a:xfrm>
           <a:prstGeom prst="rect">
             <a:avLst/>
@@ -8101,11 +7640,22 @@
             <a:round/>
           </a:ln>
         </p:spPr>
+        <p:style>
+          <a:lnRef idx="0"/>
+          <a:fillRef idx="0"/>
+          <a:effectRef idx="0"/>
+          <a:fontRef idx="minor"/>
+        </p:style>
         <p:txBody>
           <a:bodyPr lIns="90000" rIns="90000" tIns="45000" bIns="45000" anchor="t">
             <a:spAutoFit/>
           </a:bodyPr>
           <a:p>
+            <a:pPr>
+              <a:lnSpc>
+                <a:spcPct val="100000"/>
+              </a:lnSpc>
+            </a:pPr>
             <a:r>
               <a:rPr lang="en-US" sz="1800" b="0" u="none" strike="noStrike">
                 <a:solidFill>
@@ -8170,8 +7720,8 @@
         </p:nvSpPr>
         <p:spPr>
           <a:xfrm>
-            <a:off x="609480" y="133560"/>
-            <a:ext cx="2581920" cy="681840"/>
+            <a:off x="609480" y="133200"/>
+            <a:ext cx="2581560" cy="682200"/>
           </a:xfrm>
           <a:prstGeom prst="rect">
             <a:avLst/>
@@ -8226,7 +7776,7 @@
         <p:spPr>
           <a:xfrm>
             <a:off x="1440" y="914400"/>
-            <a:ext cx="2280240" cy="5245560"/>
+            <a:ext cx="2279880" cy="5245200"/>
           </a:xfrm>
           <a:prstGeom prst="rect">
             <a:avLst/>
@@ -8511,7 +8061,7 @@
         <p:spPr>
           <a:xfrm>
             <a:off x="2057400" y="1600200"/>
-            <a:ext cx="4800600" cy="3701160"/>
+            <a:ext cx="4800240" cy="3700800"/>
           </a:xfrm>
           <a:prstGeom prst="rect">
             <a:avLst/>
@@ -8535,7 +8085,7 @@
         <p:spPr>
           <a:xfrm>
             <a:off x="7154640" y="1609200"/>
-            <a:ext cx="4732560" cy="3648600"/>
+            <a:ext cx="4732200" cy="3648240"/>
           </a:xfrm>
           <a:prstGeom prst="rect">
             <a:avLst/>
@@ -8588,8 +8138,8 @@
         </p:nvSpPr>
         <p:spPr>
           <a:xfrm>
-            <a:off x="609480" y="133560"/>
-            <a:ext cx="2581920" cy="681840"/>
+            <a:off x="609480" y="133200"/>
+            <a:ext cx="2581560" cy="682200"/>
           </a:xfrm>
           <a:prstGeom prst="rect">
             <a:avLst/>
@@ -8648,7 +8198,7 @@
         <p:spPr>
           <a:xfrm>
             <a:off x="0" y="1595880"/>
-            <a:ext cx="4813920" cy="4114800"/>
+            <a:ext cx="4813560" cy="4114440"/>
           </a:xfrm>
           <a:prstGeom prst="rect">
             <a:avLst/>
@@ -8672,7 +8222,7 @@
         <p:spPr>
           <a:xfrm>
             <a:off x="5715000" y="1582920"/>
-            <a:ext cx="4826880" cy="4127760"/>
+            <a:ext cx="4826520" cy="4127400"/>
           </a:xfrm>
           <a:prstGeom prst="rect">
             <a:avLst/>
@@ -8722,7 +8272,7 @@
         <p:spPr>
           <a:xfrm>
             <a:off x="609480" y="140400"/>
-            <a:ext cx="3501000" cy="669600"/>
+            <a:ext cx="3500640" cy="669600"/>
           </a:xfrm>
           <a:prstGeom prst="rect">
             <a:avLst/>
@@ -8787,7 +8337,7 @@
         <p:spPr>
           <a:xfrm>
             <a:off x="1143000" y="914400"/>
-            <a:ext cx="3429000" cy="2643480"/>
+            <a:ext cx="3428640" cy="2643120"/>
           </a:xfrm>
           <a:prstGeom prst="rect">
             <a:avLst/>
@@ -8811,7 +8361,7 @@
         <p:spPr>
           <a:xfrm>
             <a:off x="5766840" y="914400"/>
-            <a:ext cx="3377160" cy="2603520"/>
+            <a:ext cx="3376800" cy="2603160"/>
           </a:xfrm>
           <a:prstGeom prst="rect">
             <a:avLst/>
@@ -8835,7 +8385,7 @@
         <p:spPr>
           <a:xfrm>
             <a:off x="1034280" y="3657600"/>
-            <a:ext cx="3766320" cy="2903760"/>
+            <a:ext cx="3765960" cy="2903400"/>
           </a:xfrm>
           <a:prstGeom prst="rect">
             <a:avLst/>
@@ -8859,7 +8409,7 @@
         <p:spPr>
           <a:xfrm>
             <a:off x="5715000" y="3722760"/>
-            <a:ext cx="3474000" cy="2678040"/>
+            <a:ext cx="3473640" cy="2677680"/>
           </a:xfrm>
           <a:prstGeom prst="rect">
             <a:avLst/>
@@ -8909,7 +8459,7 @@
         <p:spPr>
           <a:xfrm>
             <a:off x="609480" y="140400"/>
-            <a:ext cx="3501000" cy="669600"/>
+            <a:ext cx="3500640" cy="669600"/>
           </a:xfrm>
           <a:prstGeom prst="rect">
             <a:avLst/>
@@ -8974,7 +8524,7 @@
         <p:spPr>
           <a:xfrm>
             <a:off x="1371600" y="914400"/>
-            <a:ext cx="3429000" cy="2643480"/>
+            <a:ext cx="3428640" cy="2643120"/>
           </a:xfrm>
           <a:prstGeom prst="rect">
             <a:avLst/>
@@ -8998,7 +8548,7 @@
         <p:spPr>
           <a:xfrm>
             <a:off x="6147360" y="923400"/>
-            <a:ext cx="3453840" cy="2662560"/>
+            <a:ext cx="3453480" cy="2662200"/>
           </a:xfrm>
           <a:prstGeom prst="rect">
             <a:avLst/>
@@ -9022,7 +8572,7 @@
         <p:spPr>
           <a:xfrm>
             <a:off x="1414800" y="3886200"/>
-            <a:ext cx="3639240" cy="2805840"/>
+            <a:ext cx="3638880" cy="2805480"/>
           </a:xfrm>
           <a:prstGeom prst="rect">
             <a:avLst/>
@@ -9046,7 +8596,7 @@
         <p:spPr>
           <a:xfrm>
             <a:off x="5943600" y="3886200"/>
-            <a:ext cx="3270240" cy="2521080"/>
+            <a:ext cx="3269880" cy="2520720"/>
           </a:xfrm>
           <a:prstGeom prst="rect">
             <a:avLst/>
@@ -9096,7 +8646,7 @@
         <p:spPr>
           <a:xfrm>
             <a:off x="243720" y="197280"/>
-            <a:ext cx="10957680" cy="488520"/>
+            <a:ext cx="10957320" cy="488160"/>
           </a:xfrm>
           <a:prstGeom prst="rect">
             <a:avLst/>
@@ -9161,7 +8711,7 @@
         <p:spPr>
           <a:xfrm>
             <a:off x="76320" y="685800"/>
-            <a:ext cx="3581280" cy="6191640"/>
+            <a:ext cx="3580920" cy="6191280"/>
           </a:xfrm>
           <a:prstGeom prst="rect">
             <a:avLst/>
@@ -9185,7 +8735,7 @@
         <p:spPr>
           <a:xfrm>
             <a:off x="3886200" y="685800"/>
-            <a:ext cx="3571920" cy="5353200"/>
+            <a:ext cx="3571560" cy="5352840"/>
           </a:xfrm>
           <a:prstGeom prst="rect">
             <a:avLst/>
@@ -9209,7 +8759,7 @@
         <p:spPr>
           <a:xfrm>
             <a:off x="8001000" y="943560"/>
-            <a:ext cx="3855240" cy="1342440"/>
+            <a:ext cx="3854880" cy="1342080"/>
           </a:xfrm>
           <a:prstGeom prst="rect">
             <a:avLst/>
@@ -9259,7 +8809,7 @@
         <p:spPr>
           <a:xfrm>
             <a:off x="1143000" y="2743560"/>
-            <a:ext cx="10957680" cy="747000"/>
+            <a:ext cx="10957320" cy="746640"/>
           </a:xfrm>
           <a:prstGeom prst="rect">
             <a:avLst/>
@@ -9353,8 +8903,8 @@
         </p:nvSpPr>
         <p:spPr>
           <a:xfrm>
-            <a:off x="242280" y="-16200"/>
-            <a:ext cx="10957680" cy="427680"/>
+            <a:off x="242280" y="-16560"/>
+            <a:ext cx="10957320" cy="428040"/>
           </a:xfrm>
           <a:prstGeom prst="rect">
             <a:avLst/>
@@ -9409,7 +8959,7 @@
         <p:spPr>
           <a:xfrm>
             <a:off x="228600" y="402840"/>
-            <a:ext cx="11428560" cy="6973560"/>
+            <a:ext cx="11428200" cy="6973560"/>
           </a:xfrm>
           <a:prstGeom prst="rect">
             <a:avLst/>
@@ -9821,8 +9371,8 @@
         </p:nvSpPr>
         <p:spPr>
           <a:xfrm>
-            <a:off x="609480" y="133560"/>
-            <a:ext cx="2581920" cy="681840"/>
+            <a:off x="609480" y="133200"/>
+            <a:ext cx="2581560" cy="682200"/>
           </a:xfrm>
           <a:prstGeom prst="rect">
             <a:avLst/>
@@ -9877,7 +9427,7 @@
         <p:spPr>
           <a:xfrm>
             <a:off x="1440" y="914400"/>
-            <a:ext cx="2280240" cy="5245560"/>
+            <a:ext cx="2279880" cy="5245200"/>
           </a:xfrm>
           <a:prstGeom prst="rect">
             <a:avLst/>
@@ -10066,7 +9616,7 @@
         <p:spPr>
           <a:xfrm>
             <a:off x="2142360" y="1363680"/>
-            <a:ext cx="4831560" cy="4120200"/>
+            <a:ext cx="4831200" cy="4119840"/>
           </a:xfrm>
           <a:prstGeom prst="rect">
             <a:avLst/>
@@ -10090,7 +9640,7 @@
         <p:spPr>
           <a:xfrm>
             <a:off x="7011360" y="1321200"/>
-            <a:ext cx="4881240" cy="4162680"/>
+            <a:ext cx="4880880" cy="4162320"/>
           </a:xfrm>
           <a:prstGeom prst="rect">
             <a:avLst/>
@@ -10143,8 +9693,8 @@
         </p:nvSpPr>
         <p:spPr>
           <a:xfrm>
-            <a:off x="609480" y="133560"/>
-            <a:ext cx="2581920" cy="681840"/>
+            <a:off x="609480" y="133200"/>
+            <a:ext cx="2581560" cy="682200"/>
           </a:xfrm>
           <a:prstGeom prst="rect">
             <a:avLst/>
@@ -10203,7 +9753,7 @@
         <p:spPr>
           <a:xfrm>
             <a:off x="0" y="1595880"/>
-            <a:ext cx="4813920" cy="4114800"/>
+            <a:ext cx="4813560" cy="4114440"/>
           </a:xfrm>
           <a:prstGeom prst="rect">
             <a:avLst/>
@@ -10227,7 +9777,7 @@
         <p:spPr>
           <a:xfrm>
             <a:off x="5715000" y="1582920"/>
-            <a:ext cx="4826880" cy="4127760"/>
+            <a:ext cx="4826520" cy="4127400"/>
           </a:xfrm>
           <a:prstGeom prst="rect">
             <a:avLst/>
@@ -10277,7 +9827,7 @@
         <p:spPr>
           <a:xfrm>
             <a:off x="609480" y="139320"/>
-            <a:ext cx="3501000" cy="670680"/>
+            <a:ext cx="3500640" cy="670320"/>
           </a:xfrm>
           <a:prstGeom prst="rect">
             <a:avLst/>
@@ -10342,7 +9892,7 @@
         <p:spPr>
           <a:xfrm>
             <a:off x="37440" y="906480"/>
-            <a:ext cx="5903640" cy="5034600"/>
+            <a:ext cx="5903280" cy="5034240"/>
           </a:xfrm>
           <a:prstGeom prst="rect">
             <a:avLst/>
@@ -10366,7 +9916,7 @@
         <p:spPr>
           <a:xfrm>
             <a:off x="6167880" y="914400"/>
-            <a:ext cx="5945400" cy="5070240"/>
+            <a:ext cx="5945040" cy="5069880"/>
           </a:xfrm>
           <a:prstGeom prst="rect">
             <a:avLst/>
@@ -10416,7 +9966,7 @@
         <p:spPr>
           <a:xfrm>
             <a:off x="609480" y="139320"/>
-            <a:ext cx="3501000" cy="670680"/>
+            <a:ext cx="3500640" cy="670320"/>
           </a:xfrm>
           <a:prstGeom prst="rect">
             <a:avLst/>
@@ -10481,7 +10031,7 @@
         <p:spPr>
           <a:xfrm>
             <a:off x="46440" y="1143000"/>
-            <a:ext cx="5894640" cy="5026680"/>
+            <a:ext cx="5894280" cy="5026320"/>
           </a:xfrm>
           <a:prstGeom prst="rect">
             <a:avLst/>
@@ -10505,7 +10055,7 @@
         <p:spPr>
           <a:xfrm>
             <a:off x="6099120" y="1135080"/>
-            <a:ext cx="5904000" cy="5034600"/>
+            <a:ext cx="5903640" cy="5034240"/>
           </a:xfrm>
           <a:prstGeom prst="rect">
             <a:avLst/>
@@ -10555,7 +10105,7 @@
         <p:spPr>
           <a:xfrm>
             <a:off x="468000" y="239400"/>
-            <a:ext cx="10957680" cy="669600"/>
+            <a:ext cx="10957320" cy="669600"/>
           </a:xfrm>
           <a:prstGeom prst="rect">
             <a:avLst/>
@@ -10620,7 +10170,7 @@
         <p:spPr>
           <a:xfrm>
             <a:off x="5976000" y="228600"/>
-            <a:ext cx="4766040" cy="6398640"/>
+            <a:ext cx="4765680" cy="6398280"/>
           </a:xfrm>
           <a:prstGeom prst="rect">
             <a:avLst/>
@@ -10644,7 +10194,7 @@
         <p:spPr>
           <a:xfrm>
             <a:off x="1572120" y="2229120"/>
-            <a:ext cx="2822760" cy="2340720"/>
+            <a:ext cx="2822400" cy="2340360"/>
           </a:xfrm>
           <a:prstGeom prst="rect">
             <a:avLst/>
@@ -10694,7 +10244,7 @@
         <p:spPr>
           <a:xfrm>
             <a:off x="470160" y="75600"/>
-            <a:ext cx="10957680" cy="547920"/>
+            <a:ext cx="10957320" cy="547920"/>
           </a:xfrm>
           <a:prstGeom prst="rect">
             <a:avLst/>
@@ -10755,7 +10305,7 @@
         <p:spPr>
           <a:xfrm>
             <a:off x="228600" y="685800"/>
-            <a:ext cx="4569840" cy="747000"/>
+            <a:ext cx="4569480" cy="746640"/>
           </a:xfrm>
           <a:prstGeom prst="rect">
             <a:avLst/>
@@ -10819,7 +10369,7 @@
         <p:spPr>
           <a:xfrm>
             <a:off x="6629400" y="685800"/>
-            <a:ext cx="5255640" cy="747000"/>
+            <a:ext cx="5255280" cy="746640"/>
           </a:xfrm>
           <a:prstGeom prst="rect">
             <a:avLst/>
@@ -10887,7 +10437,7 @@
         <p:spPr>
           <a:xfrm>
             <a:off x="6172200" y="1828800"/>
-            <a:ext cx="2796480" cy="2384640"/>
+            <a:ext cx="2796120" cy="2384280"/>
           </a:xfrm>
           <a:prstGeom prst="rect">
             <a:avLst/>
@@ -10955,7 +10505,7 @@
         <p:spPr>
           <a:xfrm>
             <a:off x="9372600" y="1775160"/>
-            <a:ext cx="2741040" cy="2337480"/>
+            <a:ext cx="2740680" cy="2337120"/>
           </a:xfrm>
           <a:prstGeom prst="rect">
             <a:avLst/>
@@ -10979,7 +10529,7 @@
         <p:spPr>
           <a:xfrm>
             <a:off x="6195240" y="4353480"/>
-            <a:ext cx="2946600" cy="2512440"/>
+            <a:ext cx="2946240" cy="2512080"/>
           </a:xfrm>
           <a:prstGeom prst="rect">
             <a:avLst/>
@@ -11003,7 +10553,7 @@
         <p:spPr>
           <a:xfrm>
             <a:off x="9243360" y="4343400"/>
-            <a:ext cx="2946600" cy="2512440"/>
+            <a:ext cx="2946240" cy="2512080"/>
           </a:xfrm>
           <a:prstGeom prst="rect">
             <a:avLst/>
@@ -11027,7 +10577,7 @@
         <p:spPr>
           <a:xfrm>
             <a:off x="228600" y="1699920"/>
-            <a:ext cx="2539440" cy="1957680"/>
+            <a:ext cx="2539080" cy="1957320"/>
           </a:xfrm>
           <a:prstGeom prst="rect">
             <a:avLst/>
@@ -11051,7 +10601,7 @@
         <p:spPr>
           <a:xfrm>
             <a:off x="135720" y="4114800"/>
-            <a:ext cx="2836080" cy="2186280"/>
+            <a:ext cx="2835720" cy="2185920"/>
           </a:xfrm>
           <a:prstGeom prst="rect">
             <a:avLst/>
@@ -11075,7 +10625,7 @@
         <p:spPr>
           <a:xfrm>
             <a:off x="2971800" y="1537560"/>
-            <a:ext cx="2749680" cy="2120040"/>
+            <a:ext cx="2749320" cy="2119680"/>
           </a:xfrm>
           <a:prstGeom prst="rect">
             <a:avLst/>
@@ -11099,7 +10649,7 @@
         <p:spPr>
           <a:xfrm>
             <a:off x="3066840" y="4114800"/>
-            <a:ext cx="2876760" cy="2217960"/>
+            <a:ext cx="2876400" cy="2217600"/>
           </a:xfrm>
           <a:prstGeom prst="rect">
             <a:avLst/>
@@ -11152,8 +10702,8 @@
         </p:nvSpPr>
         <p:spPr>
           <a:xfrm>
-            <a:off x="242280" y="-16200"/>
-            <a:ext cx="10957680" cy="427680"/>
+            <a:off x="242280" y="-16560"/>
+            <a:ext cx="10957320" cy="428040"/>
           </a:xfrm>
           <a:prstGeom prst="rect">
             <a:avLst/>
@@ -11208,7 +10758,7 @@
         <p:spPr>
           <a:xfrm>
             <a:off x="228600" y="402840"/>
-            <a:ext cx="11428560" cy="4933440"/>
+            <a:ext cx="11428200" cy="4933440"/>
           </a:xfrm>
           <a:prstGeom prst="rect">
             <a:avLst/>
@@ -11478,6 +11028,11 @@
                       <a:noAutofit/>
                     </a:bodyPr>
                     <a:p>
+                      <a:pPr>
+                        <a:lnSpc>
+                          <a:spcPct val="100000"/>
+                        </a:lnSpc>
+                      </a:pPr>
                       <a:endParaRPr lang="en-US" sz="1800" b="0" u="none" strike="noStrike">
                         <a:solidFill>
                           <a:srgbClr val="000000"/>
@@ -12250,8 +11805,8 @@
         </p:nvSpPr>
         <p:spPr>
           <a:xfrm>
-            <a:off x="242280" y="-16200"/>
-            <a:ext cx="10957680" cy="427680"/>
+            <a:off x="242280" y="-16560"/>
+            <a:ext cx="10957320" cy="428040"/>
           </a:xfrm>
           <a:prstGeom prst="rect">
             <a:avLst/>
@@ -12284,18 +11839,7 @@
                 <a:uFillTx/>
                 <a:latin typeface="Arial"/>
               </a:rPr>
-              <a:t>MY SCRIPT AND </a:t>
-            </a:r>
-            <a:r>
-              <a:rPr lang="en-US" sz="2800" b="1" u="none" strike="noStrike">
-                <a:solidFill>
-                  <a:srgbClr val="ff0000"/>
-                </a:solidFill>
-                <a:effectLst/>
-                <a:uFillTx/>
-                <a:latin typeface="Arial"/>
-              </a:rPr>
-              <a:t>SPOTIFLOW</a:t>
+              <a:t>MY SCRIPT AND SPOTIFLOW</a:t>
             </a:r>
             <a:endParaRPr lang="en-US" sz="2800" b="0" u="none" strike="noStrike">
               <a:solidFill>
@@ -12317,7 +11861,7 @@
         <p:spPr>
           <a:xfrm>
             <a:off x="228600" y="402840"/>
-            <a:ext cx="11428560" cy="4811760"/>
+            <a:ext cx="11428200" cy="4811760"/>
           </a:xfrm>
           <a:prstGeom prst="rect">
             <a:avLst/>
@@ -13461,7 +13005,7 @@
         <p:spPr>
           <a:xfrm>
             <a:off x="3429000" y="5292000"/>
-            <a:ext cx="6400440" cy="1320840"/>
+            <a:ext cx="6400080" cy="1320120"/>
           </a:xfrm>
           <a:prstGeom prst="rect">
             <a:avLst/>
@@ -13507,6 +13051,7 @@
                 <a:effectLst/>
                 <a:uFillTx/>
                 <a:latin typeface="Arial"/>
+                <a:ea typeface="SimSun"/>
               </a:rPr>
               <a:t>Spotiflow uses biology (cell mask) to guide detection.</a:t>
             </a:r>
@@ -13545,6 +13090,7 @@
                 <a:effectLst/>
                 <a:uFillTx/>
                 <a:latin typeface="Arial"/>
+                <a:ea typeface="SimSun"/>
               </a:rPr>
               <a:t>My script is blind detection everywhere. </a:t>
             </a:r>
@@ -13601,8 +13147,8 @@
         </p:nvSpPr>
         <p:spPr>
           <a:xfrm>
-            <a:off x="242280" y="-16200"/>
-            <a:ext cx="10957680" cy="427680"/>
+            <a:off x="242280" y="-16560"/>
+            <a:ext cx="10957320" cy="428040"/>
           </a:xfrm>
           <a:prstGeom prst="rect">
             <a:avLst/>
@@ -13657,7 +13203,7 @@
         <p:spPr>
           <a:xfrm>
             <a:off x="228600" y="228600"/>
-            <a:ext cx="11428560" cy="4811760"/>
+            <a:ext cx="11428200" cy="4811760"/>
           </a:xfrm>
           <a:prstGeom prst="rect">
             <a:avLst/>
@@ -13909,7 +13455,7 @@
         </p:nvGraphicFramePr>
         <p:xfrm>
           <a:off x="1429920" y="745920"/>
-          <a:ext cx="9771480" cy="5883480"/>
+          <a:ext cx="9771120" cy="6255360"/>
         </p:xfrm>
         <a:graphic>
           <a:graphicData uri="http://schemas.openxmlformats.org/drawingml/2006/table">
@@ -13927,6 +13473,11 @@
                       <a:noAutofit/>
                     </a:bodyPr>
                     <a:p>
+                      <a:pPr>
+                        <a:lnSpc>
+                          <a:spcPct val="100000"/>
+                        </a:lnSpc>
+                      </a:pPr>
                       <a:endParaRPr lang="en-US" sz="1800" b="0" u="none" strike="noStrike">
                         <a:solidFill>
                           <a:srgbClr val="000000"/>
@@ -14159,7 +13710,7 @@
                       <a:noAutofit/>
                     </a:bodyPr>
                     <a:p>
-                      <a:pPr marL="216000" indent="-216000">
+                      <a:pPr>
                         <a:lnSpc>
                           <a:spcPct val="100000"/>
                         </a:lnSpc>
@@ -14169,12 +13720,6 @@
                         <a:spcAft>
                           <a:spcPts val="142"/>
                         </a:spcAft>
-                        <a:buClr>
-                          <a:srgbClr val="000000"/>
-                        </a:buClr>
-                        <a:buSzPct val="45000"/>
-                        <a:buFont typeface="Wingdings" charset="2"/>
-                        <a:buChar char=""/>
                       </a:pPr>
                       <a:endParaRPr lang="en-US" sz="1400" b="0" u="none" strike="noStrike">
                         <a:solidFill>
@@ -15374,8 +14919,8 @@
         </p:nvSpPr>
         <p:spPr>
           <a:xfrm>
-            <a:off x="242280" y="-16200"/>
-            <a:ext cx="10957680" cy="427680"/>
+            <a:off x="242280" y="-16560"/>
+            <a:ext cx="10957320" cy="428040"/>
           </a:xfrm>
           <a:prstGeom prst="rect">
             <a:avLst/>
@@ -15430,7 +14975,7 @@
         <p:spPr>
           <a:xfrm>
             <a:off x="228600" y="402840"/>
-            <a:ext cx="11428560" cy="4628880"/>
+            <a:ext cx="11428200" cy="4628880"/>
           </a:xfrm>
           <a:prstGeom prst="rect">
             <a:avLst/>
@@ -15700,6 +15245,11 @@
                       <a:noAutofit/>
                     </a:bodyPr>
                     <a:p>
+                      <a:pPr>
+                        <a:lnSpc>
+                          <a:spcPct val="100000"/>
+                        </a:lnSpc>
+                      </a:pPr>
                       <a:endParaRPr lang="en-US" sz="1800" b="0" u="none" strike="noStrike">
                         <a:solidFill>
                           <a:srgbClr val="000000"/>
@@ -16302,16 +15852,10 @@
                       </a:endParaRPr>
                     </a:p>
                     <a:p>
-                      <a:pPr marL="216000" indent="-216000">
+                      <a:pPr>
                         <a:lnSpc>
                           <a:spcPct val="100000"/>
                         </a:lnSpc>
-                        <a:buClr>
-                          <a:srgbClr val="000000"/>
-                        </a:buClr>
-                        <a:buSzPct val="45000"/>
-                        <a:buFont typeface="Wingdings" charset="2"/>
-                        <a:buChar char=""/>
                       </a:pPr>
                       <a:endParaRPr lang="en-US" sz="1800" b="0" u="none" strike="noStrike">
                         <a:solidFill>
@@ -16644,16 +16188,10 @@
                       <a:noAutofit/>
                     </a:bodyPr>
                     <a:p>
-                      <a:pPr marL="216000" indent="-216000">
+                      <a:pPr>
                         <a:lnSpc>
                           <a:spcPct val="100000"/>
                         </a:lnSpc>
-                        <a:buClr>
-                          <a:srgbClr val="000000"/>
-                        </a:buClr>
-                        <a:buSzPct val="45000"/>
-                        <a:buFont typeface="Wingdings" charset="2"/>
-                        <a:buChar char=""/>
                       </a:pPr>
                       <a:endParaRPr lang="en-US" sz="1800" b="0" u="none" strike="noStrike">
                         <a:solidFill>
@@ -16883,8 +16421,8 @@
         </p:nvSpPr>
         <p:spPr>
           <a:xfrm>
-            <a:off x="242280" y="-16200"/>
-            <a:ext cx="10957680" cy="427680"/>
+            <a:off x="242280" y="-16560"/>
+            <a:ext cx="10957320" cy="428040"/>
           </a:xfrm>
           <a:prstGeom prst="rect">
             <a:avLst/>
@@ -16939,7 +16477,7 @@
         <p:spPr>
           <a:xfrm>
             <a:off x="228600" y="402840"/>
-            <a:ext cx="11428560" cy="8541000"/>
+            <a:ext cx="11428200" cy="8540280"/>
           </a:xfrm>
           <a:prstGeom prst="rect">
             <a:avLst/>
@@ -17014,7 +16552,19 @@
                 <a:latin typeface="Arial"/>
                 <a:ea typeface="SimSun"/>
               </a:rPr>
-              <a:t>According to the Spotiflow </a:t>
+              <a:t>According to the Spotiflow documentation I can research, it works best with images that have </a:t>
+            </a:r>
+            <a:r>
+              <a:rPr lang="en-US" sz="2000" b="0" u="none" strike="noStrike">
+                <a:solidFill>
+                  <a:srgbClr val="000000"/>
+                </a:solidFill>
+                <a:effectLst/>
+                <a:uFillTx/>
+                <a:latin typeface="Arial"/>
+                <a:ea typeface="Microsoft YaHei"/>
+              </a:rPr>
+              <a:t>illumination variation</a:t>
             </a:r>
             <a:r>
               <a:rPr lang="en-US" sz="2000" b="0" u="none" strike="noStrike">
@@ -17026,187 +16576,7 @@
                 <a:latin typeface="Arial"/>
                 <a:ea typeface="SimSun"/>
               </a:rPr>
-              <a:t>documentation I can research, it </a:t>
-            </a:r>
-            <a:r>
-              <a:rPr lang="en-US" sz="2000" b="0" u="none" strike="noStrike">
-                <a:solidFill>
-                  <a:srgbClr val="000000"/>
-                </a:solidFill>
-                <a:effectLst/>
-                <a:uFillTx/>
-                <a:latin typeface="Arial"/>
-                <a:ea typeface="SimSun"/>
-              </a:rPr>
-              <a:t>works best with images that have </a:t>
-            </a:r>
-            <a:r>
-              <a:rPr lang="en-US" sz="2000" b="0" u="none" strike="noStrike">
-                <a:solidFill>
-                  <a:srgbClr val="000000"/>
-                </a:solidFill>
-                <a:effectLst/>
-                <a:uFillTx/>
-                <a:latin typeface="Arial"/>
-                <a:ea typeface="Microsoft YaHei"/>
-              </a:rPr>
-              <a:t>illumination variation</a:t>
-            </a:r>
-            <a:r>
-              <a:rPr lang="en-US" sz="2000" b="0" u="none" strike="noStrike">
-                <a:solidFill>
-                  <a:srgbClr val="000000"/>
-                </a:solidFill>
-                <a:effectLst/>
-                <a:uFillTx/>
-                <a:latin typeface="Arial"/>
-                <a:ea typeface="SimSun"/>
-              </a:rPr>
-              <a:t> and a lot of </a:t>
-            </a:r>
-            <a:r>
-              <a:rPr lang="en-US" sz="2000" b="0" u="none" strike="noStrike">
-                <a:solidFill>
-                  <a:srgbClr val="000000"/>
-                </a:solidFill>
-                <a:effectLst/>
-                <a:uFillTx/>
-                <a:latin typeface="Arial"/>
-                <a:ea typeface="SimSun"/>
-              </a:rPr>
-              <a:t>noise. However, the training model I </a:t>
-            </a:r>
-            <a:r>
-              <a:rPr lang="en-US" sz="2000" b="0" u="none" strike="noStrike">
-                <a:solidFill>
-                  <a:srgbClr val="000000"/>
-                </a:solidFill>
-                <a:effectLst/>
-                <a:uFillTx/>
-                <a:latin typeface="Arial"/>
-                <a:ea typeface="SimSun"/>
-              </a:rPr>
-              <a:t>use, called Sm Fish 3D, is not yet </a:t>
-            </a:r>
-            <a:r>
-              <a:rPr lang="en-US" sz="2000" b="0" u="none" strike="noStrike">
-                <a:solidFill>
-                  <a:srgbClr val="000000"/>
-                </a:solidFill>
-                <a:effectLst/>
-                <a:uFillTx/>
-                <a:latin typeface="Arial"/>
-                <a:ea typeface="SimSun"/>
-              </a:rPr>
-              <a:t>able to detect the correct geometry </a:t>
-            </a:r>
-            <a:r>
-              <a:rPr lang="en-US" sz="2000" b="0" u="none" strike="noStrike">
-                <a:solidFill>
-                  <a:srgbClr val="000000"/>
-                </a:solidFill>
-                <a:effectLst/>
-                <a:uFillTx/>
-                <a:latin typeface="Arial"/>
-                <a:ea typeface="SimSun"/>
-              </a:rPr>
-              <a:t>of lysosomes, which leads to over </a:t>
-            </a:r>
-            <a:r>
-              <a:rPr lang="en-US" sz="2000" b="0" u="none" strike="noStrike">
-                <a:solidFill>
-                  <a:srgbClr val="000000"/>
-                </a:solidFill>
-                <a:effectLst/>
-                <a:uFillTx/>
-                <a:latin typeface="Arial"/>
-                <a:ea typeface="SimSun"/>
-              </a:rPr>
-              <a:t>detection and many false positives. </a:t>
-            </a:r>
-            <a:r>
-              <a:rPr lang="en-US" sz="2000" b="0" u="none" strike="noStrike">
-                <a:solidFill>
-                  <a:srgbClr val="000000"/>
-                </a:solidFill>
-                <a:effectLst/>
-                <a:uFillTx/>
-                <a:latin typeface="Arial"/>
-                <a:ea typeface="SimSun"/>
-              </a:rPr>
-              <a:t>It can't capture the center of the </a:t>
-            </a:r>
-            <a:r>
-              <a:rPr lang="en-US" sz="2000" b="0" u="none" strike="noStrike">
-                <a:solidFill>
-                  <a:srgbClr val="000000"/>
-                </a:solidFill>
-                <a:effectLst/>
-                <a:uFillTx/>
-                <a:latin typeface="Arial"/>
-                <a:ea typeface="SimSun"/>
-              </a:rPr>
-              <a:t>spots or their shape, giving me </a:t>
-            </a:r>
-            <a:r>
-              <a:rPr lang="en-US" sz="2000" b="0" u="none" strike="noStrike">
-                <a:solidFill>
-                  <a:srgbClr val="000000"/>
-                </a:solidFill>
-                <a:effectLst/>
-                <a:uFillTx/>
-                <a:latin typeface="Arial"/>
-                <a:ea typeface="SimSun"/>
-              </a:rPr>
-              <a:t>incorrect radii. Its weakness is that </a:t>
-            </a:r>
-            <a:r>
-              <a:rPr lang="en-US" sz="2000" b="0" u="none" strike="noStrike">
-                <a:solidFill>
-                  <a:srgbClr val="000000"/>
-                </a:solidFill>
-                <a:effectLst/>
-                <a:uFillTx/>
-                <a:latin typeface="Arial"/>
-                <a:ea typeface="SimSun"/>
-              </a:rPr>
-              <a:t>it's not based on lysosomes, and I </a:t>
-            </a:r>
-            <a:r>
-              <a:rPr lang="en-US" sz="2000" b="0" u="none" strike="noStrike">
-                <a:solidFill>
-                  <a:srgbClr val="000000"/>
-                </a:solidFill>
-                <a:effectLst/>
-                <a:uFillTx/>
-                <a:latin typeface="Arial"/>
-                <a:ea typeface="SimSun"/>
-              </a:rPr>
-              <a:t>would have to research how to train </a:t>
-            </a:r>
-            <a:r>
-              <a:rPr lang="en-US" sz="2000" b="0" u="none" strike="noStrike">
-                <a:solidFill>
-                  <a:srgbClr val="000000"/>
-                </a:solidFill>
-                <a:effectLst/>
-                <a:uFillTx/>
-                <a:latin typeface="Arial"/>
-                <a:ea typeface="SimSun"/>
-              </a:rPr>
-              <a:t>a new model from scratch, which </a:t>
-            </a:r>
-            <a:r>
-              <a:rPr lang="en-US" sz="2000" b="0" u="none" strike="noStrike">
-                <a:solidFill>
-                  <a:srgbClr val="000000"/>
-                </a:solidFill>
-                <a:effectLst/>
-                <a:uFillTx/>
-                <a:latin typeface="Arial"/>
-                <a:ea typeface="SimSun"/>
-              </a:rPr>
-              <a:t>would take more time.</a:t>
+              <a:t> and a lot of noise. However, the training model I use, called Sm Fish 3D, is not yet able to detect the correct geometry of lysosomes, which leads to over detection and many false positives. It can't capture the center of the spots or their shape, giving me incorrect radii. Its weakness is that it's not based on lysosomes, and I would have to research how to train a new model from scratch, which would take more time.</a:t>
             </a:r>
             <a:endParaRPr lang="en-US" sz="2000" b="0" u="none" strike="noStrike">
               <a:solidFill>
@@ -17272,103 +16642,7 @@
                 <a:latin typeface="Arial"/>
                 <a:ea typeface="Microsoft YaHei"/>
               </a:rPr>
-              <a:t>Regarding my script, when dealing </a:t>
-            </a:r>
-            <a:r>
-              <a:rPr lang="en-US" sz="2000" b="0" u="none" strike="noStrike">
-                <a:solidFill>
-                  <a:srgbClr val="000000"/>
-                </a:solidFill>
-                <a:effectLst/>
-                <a:uFillTx/>
-                <a:latin typeface="Arial"/>
-                <a:ea typeface="Microsoft YaHei"/>
-              </a:rPr>
-              <a:t>with noisy images and illumination </a:t>
-            </a:r>
-            <a:r>
-              <a:rPr lang="en-US" sz="2000" b="0" u="none" strike="noStrike">
-                <a:solidFill>
-                  <a:srgbClr val="000000"/>
-                </a:solidFill>
-                <a:effectLst/>
-                <a:uFillTx/>
-                <a:latin typeface="Arial"/>
-                <a:ea typeface="Microsoft YaHei"/>
-              </a:rPr>
-              <a:t>variation, it needs to define more </a:t>
-            </a:r>
-            <a:r>
-              <a:rPr lang="en-US" sz="2000" b="0" u="none" strike="noStrike">
-                <a:solidFill>
-                  <a:srgbClr val="000000"/>
-                </a:solidFill>
-                <a:effectLst/>
-                <a:uFillTx/>
-                <a:latin typeface="Arial"/>
-                <a:ea typeface="Microsoft YaHei"/>
-              </a:rPr>
-              <a:t>parameters, making it less </a:t>
-            </a:r>
-            <a:r>
-              <a:rPr lang="en-US" sz="2000" b="0" u="none" strike="noStrike">
-                <a:solidFill>
-                  <a:srgbClr val="000000"/>
-                </a:solidFill>
-                <a:effectLst/>
-                <a:uFillTx/>
-                <a:latin typeface="Arial"/>
-                <a:ea typeface="Microsoft YaHei"/>
-              </a:rPr>
-              <a:t>automated and adaptable to other </a:t>
-            </a:r>
-            <a:r>
-              <a:rPr lang="en-US" sz="2000" b="0" u="none" strike="noStrike">
-                <a:solidFill>
-                  <a:srgbClr val="000000"/>
-                </a:solidFill>
-                <a:effectLst/>
-                <a:uFillTx/>
-                <a:latin typeface="Arial"/>
-                <a:ea typeface="Microsoft YaHei"/>
-              </a:rPr>
-              <a:t>types of images, although it does </a:t>
-            </a:r>
-            <a:r>
-              <a:rPr lang="en-US" sz="2000" b="0" u="none" strike="noStrike">
-                <a:solidFill>
-                  <a:srgbClr val="000000"/>
-                </a:solidFill>
-                <a:effectLst/>
-                <a:uFillTx/>
-                <a:latin typeface="Arial"/>
-                <a:ea typeface="Microsoft YaHei"/>
-              </a:rPr>
-              <a:t>manage to better capture the </a:t>
-            </a:r>
-            <a:r>
-              <a:rPr lang="en-US" sz="2000" b="0" u="none" strike="noStrike">
-                <a:solidFill>
-                  <a:srgbClr val="000000"/>
-                </a:solidFill>
-                <a:effectLst/>
-                <a:uFillTx/>
-                <a:latin typeface="Arial"/>
-                <a:ea typeface="Microsoft YaHei"/>
-              </a:rPr>
-              <a:t>geometry and location of the centers </a:t>
-            </a:r>
-            <a:r>
-              <a:rPr lang="en-US" sz="2000" b="0" u="none" strike="noStrike">
-                <a:solidFill>
-                  <a:srgbClr val="000000"/>
-                </a:solidFill>
-                <a:effectLst/>
-                <a:uFillTx/>
-                <a:latin typeface="Arial"/>
-                <a:ea typeface="Microsoft YaHei"/>
-              </a:rPr>
-              <a:t>of each lysosomes.</a:t>
+              <a:t>Regarding my script, when dealing with noisy images and illumination variation, it needs to define more parameters, making it less automated and adaptable to other types of images, although it does manage to better capture the geometry and location of the centers of each lysosomes.</a:t>
             </a:r>
             <a:endParaRPr lang="en-US" sz="2000" b="0" u="none" strike="noStrike">
               <a:solidFill>
@@ -17401,43 +16675,7 @@
                 <a:latin typeface="Arial"/>
                 <a:ea typeface="Microsoft YaHei"/>
               </a:rPr>
-              <a:t>On the other hand, I could try to </a:t>
-            </a:r>
-            <a:r>
-              <a:rPr lang="en-US" sz="2000" b="0" u="none" strike="noStrike">
-                <a:solidFill>
-                  <a:srgbClr val="000000"/>
-                </a:solidFill>
-                <a:effectLst/>
-                <a:uFillTx/>
-                <a:latin typeface="Arial"/>
-                <a:ea typeface="Microsoft YaHei"/>
-              </a:rPr>
-              <a:t>improve the preprocessing before </a:t>
-            </a:r>
-            <a:r>
-              <a:rPr lang="en-US" sz="2000" b="0" u="none" strike="noStrike">
-                <a:solidFill>
-                  <a:srgbClr val="000000"/>
-                </a:solidFill>
-                <a:effectLst/>
-                <a:uFillTx/>
-                <a:latin typeface="Arial"/>
-                <a:ea typeface="Microsoft YaHei"/>
-              </a:rPr>
-              <a:t>detection and try to automate more </a:t>
-            </a:r>
-            <a:r>
-              <a:rPr lang="en-US" sz="2000" b="0" u="none" strike="noStrike">
-                <a:solidFill>
-                  <a:srgbClr val="000000"/>
-                </a:solidFill>
-                <a:effectLst/>
-                <a:uFillTx/>
-                <a:latin typeface="Arial"/>
-                <a:ea typeface="Microsoft YaHei"/>
-              </a:rPr>
-              <a:t>parameters.</a:t>
+              <a:t>On the other hand, I could try to improve the preprocessing before detection and try to automate more parameters.</a:t>
             </a:r>
             <a:endParaRPr lang="en-US" sz="2000" b="0" u="none" strike="noStrike">
               <a:solidFill>
@@ -17503,79 +16741,7 @@
                 <a:latin typeface="Arial"/>
                 <a:ea typeface="Microsoft YaHei"/>
               </a:rPr>
-              <a:t>What I propose is, in order not to </a:t>
-            </a:r>
-            <a:r>
-              <a:rPr lang="en-US" sz="2000" b="0" u="none" strike="noStrike">
-                <a:solidFill>
-                  <a:srgbClr val="000000"/>
-                </a:solidFill>
-                <a:effectLst/>
-                <a:uFillTx/>
-                <a:latin typeface="Arial"/>
-                <a:ea typeface="Microsoft YaHei"/>
-              </a:rPr>
-              <a:t>delay the project any further, while I </a:t>
-            </a:r>
-            <a:r>
-              <a:rPr lang="en-US" sz="2000" b="0" u="none" strike="noStrike">
-                <a:solidFill>
-                  <a:srgbClr val="000000"/>
-                </a:solidFill>
-                <a:effectLst/>
-                <a:uFillTx/>
-                <a:latin typeface="Arial"/>
-                <a:ea typeface="Microsoft YaHei"/>
-              </a:rPr>
-              <a:t>process the new images, I will </a:t>
-            </a:r>
-            <a:r>
-              <a:rPr lang="en-US" sz="2000" b="0" u="none" strike="noStrike">
-                <a:solidFill>
-                  <a:srgbClr val="000000"/>
-                </a:solidFill>
-                <a:effectLst/>
-                <a:uFillTx/>
-                <a:latin typeface="Arial"/>
-                <a:ea typeface="Microsoft YaHei"/>
-              </a:rPr>
-              <a:t>improve the preprocessing of my </a:t>
-            </a:r>
-            <a:r>
-              <a:rPr lang="en-US" sz="2000" b="0" u="none" strike="noStrike">
-                <a:solidFill>
-                  <a:srgbClr val="000000"/>
-                </a:solidFill>
-                <a:effectLst/>
-                <a:uFillTx/>
-                <a:latin typeface="Arial"/>
-                <a:ea typeface="Microsoft YaHei"/>
-              </a:rPr>
-              <a:t>script to eliminate as much noise as </a:t>
-            </a:r>
-            <a:r>
-              <a:rPr lang="en-US" sz="2000" b="0" u="none" strike="noStrike">
-                <a:solidFill>
-                  <a:srgbClr val="000000"/>
-                </a:solidFill>
-                <a:effectLst/>
-                <a:uFillTx/>
-                <a:latin typeface="Arial"/>
-                <a:ea typeface="Microsoft YaHei"/>
-              </a:rPr>
-              <a:t>possible and look for ways to </a:t>
-            </a:r>
-            <a:r>
-              <a:rPr lang="en-US" sz="2000" b="0" u="none" strike="noStrike">
-                <a:solidFill>
-                  <a:srgbClr val="000000"/>
-                </a:solidFill>
-                <a:effectLst/>
-                <a:uFillTx/>
-                <a:latin typeface="Arial"/>
-                <a:ea typeface="Microsoft YaHei"/>
-              </a:rPr>
-              <a:t>automate more parameters.</a:t>
+              <a:t>What I propose is, in order not to delay the project any further, while I process the new images, I will improve the preprocessing of my script to eliminate as much noise as possible and look for ways to automate more parameters.</a:t>
             </a:r>
             <a:endParaRPr lang="en-US" sz="2000" b="0" u="none" strike="noStrike">
               <a:solidFill>
@@ -17587,19 +16753,13 @@
             </a:endParaRPr>
           </a:p>
           <a:p>
-            <a:pPr marL="216000" indent="-216000">
+            <a:pPr>
               <a:lnSpc>
                 <a:spcPct val="100000"/>
               </a:lnSpc>
               <a:spcBef>
                 <a:spcPts val="57"/>
               </a:spcBef>
-              <a:buClr>
-                <a:srgbClr val="000000"/>
-              </a:buClr>
-              <a:buSzPct val="45000"/>
-              <a:buFont typeface="Wingdings" charset="2"/>
-              <a:buChar char=""/>
             </a:pPr>
             <a:endParaRPr lang="en-US" sz="2000" b="0" u="none" strike="noStrike">
               <a:solidFill>
@@ -17765,7 +16925,7 @@
         <p:spPr>
           <a:xfrm>
             <a:off x="1143000" y="2743560"/>
-            <a:ext cx="10957680" cy="747000"/>
+            <a:ext cx="10957320" cy="746640"/>
           </a:xfrm>
           <a:prstGeom prst="rect">
             <a:avLst/>
@@ -17856,7 +17016,7 @@
         <p:spPr>
           <a:xfrm>
             <a:off x="228600" y="0"/>
-            <a:ext cx="10957680" cy="747000"/>
+            <a:ext cx="10957320" cy="746640"/>
           </a:xfrm>
           <a:prstGeom prst="rect">
             <a:avLst/>
@@ -17917,7 +17077,7 @@
         <p:spPr>
           <a:xfrm>
             <a:off x="228600" y="703080"/>
-            <a:ext cx="11199600" cy="7346160"/>
+            <a:ext cx="11199240" cy="7346160"/>
           </a:xfrm>
           <a:prstGeom prst="rect">
             <a:avLst/>
@@ -17968,7 +17128,6 @@
               <a:effectLst/>
               <a:uFillTx/>
               <a:latin typeface="Arial"/>
-              <a:ea typeface="Microsoft YaHei"/>
             </a:endParaRPr>
           </a:p>
           <a:p>
@@ -18002,7 +17161,6 @@
               <a:effectLst/>
               <a:uFillTx/>
               <a:latin typeface="Arial"/>
-              <a:ea typeface="Microsoft YaHei"/>
             </a:endParaRPr>
           </a:p>
           <a:p>
@@ -18025,6 +17183,7 @@
                 <a:effectLst/>
                 <a:uFillTx/>
                 <a:latin typeface="Arial"/>
+                <a:ea typeface="SimSun"/>
               </a:rPr>
               <a:t>Remove some sections to obtain the cleanest possible mask during preprocessing before applying Spotiflow. Use 2 parameters in the Spotiflow model.</a:t>
             </a:r>
@@ -18035,7 +17194,6 @@
               <a:effectLst/>
               <a:uFillTx/>
               <a:latin typeface="Arial"/>
-              <a:ea typeface="Microsoft YaHei"/>
             </a:endParaRPr>
           </a:p>
           <a:p>
@@ -18079,6 +17237,7 @@
                 <a:effectLst/>
                 <a:uFillTx/>
                 <a:latin typeface="Arial"/>
+                <a:ea typeface="SimSun"/>
               </a:rPr>
               <a:t> </a:t>
             </a:r>
@@ -18089,7 +17248,6 @@
               <a:effectLst/>
               <a:uFillTx/>
               <a:latin typeface="Arial"/>
-              <a:ea typeface="Microsoft YaHei"/>
             </a:endParaRPr>
           </a:p>
           <a:p>
